--- a/lectures/11/Exploring Program Memory.pptx
+++ b/lectures/11/Exploring Program Memory.pptx
@@ -240,7 +240,7 @@
           <a:p>
             <a:fld id="{9E22D613-641A-4514-B661-772688D3904A}" type="datetimeFigureOut">
               <a:rPr lang="en-US" smtClean="0"/>
-              <a:t>4/11/2026</a:t>
+              <a:t>7/1/2026</a:t>
             </a:fld>
             <a:endParaRPr lang="en-US"/>
           </a:p>
@@ -551,65 +551,7 @@
           <a:bodyPr/>
           <a:lstStyle/>
           <a:p>
-            <a:r>
-              <a:rPr lang="ru-RU" dirty="0"/>
-              <a:t>Процессор представляет собой устройство, которое непрерывно взаимодействует с памятью. Он извлекает из памяти инструкции программы и обрабатывает данные, которые в этой памяти находятся.</a:t>
-            </a:r>
-          </a:p>
-          <a:p>
-            <a:endParaRPr lang="ru-RU" dirty="0"/>
-          </a:p>
-          <a:p>
-            <a:r>
-              <a:rPr lang="ru-RU" dirty="0"/>
-              <a:t>Таким образом, память является не просто хранилищем, а ключевым элементом выполнения программы. В ней одновременно располагаются как код программы, так и данные, с которыми этот код работает.</a:t>
-            </a:r>
-          </a:p>
-          <a:p>
-            <a:endParaRPr lang="ru-RU" dirty="0"/>
-          </a:p>
-          <a:p>
-            <a:r>
-              <a:rPr lang="ru-RU" dirty="0"/>
-              <a:t>При этом память не является хаотичным набором байтов. Она организована определённым образом. Различные области памяти используются для разных целей, и каждая из них играет свою роль в процессе выполнения программы.</a:t>
-            </a:r>
-          </a:p>
-          <a:p>
-            <a:r>
-              <a:rPr lang="ru-RU" dirty="0"/>
-              <a:t>Способ организации памяти определяется как архитектурой процессора, так и операционной системой. Именно они задают правила размещения кода, данных, стека и динамической памяти.</a:t>
-            </a:r>
-          </a:p>
-          <a:p>
-            <a:endParaRPr lang="ru-RU" dirty="0"/>
-          </a:p>
-          <a:p>
-            <a:r>
-              <a:rPr lang="ru-RU" dirty="0"/>
-              <a:t>В рамках этой лекции мы подробно рассмотрим, как устроена память программы и как в ней размещаются различные объекты.</a:t>
-            </a:r>
-          </a:p>
-          <a:p>
-            <a:endParaRPr lang="ru-RU" dirty="0"/>
-          </a:p>
-          <a:p>
-            <a:r>
-              <a:rPr lang="ru-RU" dirty="0"/>
-              <a:t>Кроме того, важно понимать, что память неоднородна с точки зрения производительности. Разные уровни памяти имеют различную скорость доступа, и это напрямую влияет на время выполнения программы.</a:t>
-            </a:r>
-            <a:endParaRPr lang="en-US" dirty="0"/>
-          </a:p>
-          <a:p>
-            <a:endParaRPr lang="ru-RU" dirty="0"/>
-          </a:p>
-          <a:p>
-            <a:r>
-              <a:rPr lang="ru-RU" dirty="0"/>
-              <a:t>Понимание этих принципов позволяет глубже осознать, как именно работает программа на уровне выполнения и взаимодействия с аппаратным обеспечением.</a:t>
-            </a:r>
-          </a:p>
-          <a:p>
-            <a:endParaRPr lang="en-US" dirty="0"/>
+            <a:endParaRPr lang="en-US"/>
           </a:p>
         </p:txBody>
       </p:sp>
@@ -630,7 +572,7 @@
           <a:p>
             <a:fld id="{87259E61-CD8F-4EDB-89B2-A2524EC5B40A}" type="slidenum">
               <a:rPr lang="en-US" smtClean="0"/>
-              <a:t>2</a:t>
+              <a:t>1</a:t>
             </a:fld>
             <a:endParaRPr lang="en-US"/>
           </a:p>
@@ -639,7 +581,7 @@
     </p:spTree>
     <p:extLst>
       <p:ext uri="{BB962C8B-B14F-4D97-AF65-F5344CB8AC3E}">
-        <p14:creationId xmlns:p14="http://schemas.microsoft.com/office/powerpoint/2010/main" val="1850448865"/>
+        <p14:creationId xmlns:p14="http://schemas.microsoft.com/office/powerpoint/2010/main" val="982174560"/>
       </p:ext>
     </p:extLst>
   </p:cSld>
@@ -650,6 +592,143 @@
 </file>
 
 <file path=ppt/notesSlides/notesSlide10.xml><?xml version="1.0" encoding="utf-8"?>
+<p:notes xmlns:a="http://schemas.openxmlformats.org/drawingml/2006/main" xmlns:r="http://schemas.openxmlformats.org/officeDocument/2006/relationships" xmlns:p="http://schemas.openxmlformats.org/presentationml/2006/main">
+  <p:cSld>
+    <p:spTree>
+      <p:nvGrpSpPr>
+        <p:cNvPr id="1" name="">
+          <a:extLst>
+            <a:ext uri="{FF2B5EF4-FFF2-40B4-BE49-F238E27FC236}">
+              <a16:creationId xmlns:a16="http://schemas.microsoft.com/office/drawing/2014/main" id="{A1ED1150-353F-E84F-4F8F-3107302DAFB8}"/>
+            </a:ext>
+          </a:extLst>
+        </p:cNvPr>
+        <p:cNvGrpSpPr/>
+        <p:nvPr/>
+      </p:nvGrpSpPr>
+      <p:grpSpPr>
+        <a:xfrm>
+          <a:off x="0" y="0"/>
+          <a:ext cx="0" cy="0"/>
+          <a:chOff x="0" y="0"/>
+          <a:chExt cx="0" cy="0"/>
+        </a:xfrm>
+      </p:grpSpPr>
+      <p:sp>
+        <p:nvSpPr>
+          <p:cNvPr id="2" name="Slide Image Placeholder 1">
+            <a:extLst>
+              <a:ext uri="{FF2B5EF4-FFF2-40B4-BE49-F238E27FC236}">
+                <a16:creationId xmlns:a16="http://schemas.microsoft.com/office/drawing/2014/main" id="{0EB06648-0916-1DC2-E2BD-13E557C63F9B}"/>
+              </a:ext>
+            </a:extLst>
+          </p:cNvPr>
+          <p:cNvSpPr>
+            <a:spLocks noGrp="1" noRot="1" noChangeAspect="1"/>
+          </p:cNvSpPr>
+          <p:nvPr>
+            <p:ph type="sldImg"/>
+          </p:nvPr>
+        </p:nvSpPr>
+        <p:spPr/>
+      </p:sp>
+      <p:sp>
+        <p:nvSpPr>
+          <p:cNvPr id="3" name="Notes Placeholder 2">
+            <a:extLst>
+              <a:ext uri="{FF2B5EF4-FFF2-40B4-BE49-F238E27FC236}">
+                <a16:creationId xmlns:a16="http://schemas.microsoft.com/office/drawing/2014/main" id="{18377747-FD29-CA1F-FCE6-C94C9B285131}"/>
+              </a:ext>
+            </a:extLst>
+          </p:cNvPr>
+          <p:cNvSpPr>
+            <a:spLocks noGrp="1"/>
+          </p:cNvSpPr>
+          <p:nvPr>
+            <p:ph type="body" idx="1"/>
+          </p:nvPr>
+        </p:nvSpPr>
+        <p:spPr/>
+        <p:txBody>
+          <a:bodyPr/>
+          <a:lstStyle/>
+          <a:p>
+            <a:r>
+              <a:rPr lang="ru-RU" dirty="0"/>
+              <a:t>Затем аналогичным образом происходит возврат в </a:t>
+            </a:r>
+            <a:r>
+              <a:rPr lang="ru-RU" dirty="0" err="1"/>
+              <a:t>main</a:t>
+            </a:r>
+            <a:r>
+              <a:rPr lang="ru-RU" dirty="0"/>
+              <a:t>.</a:t>
+            </a:r>
+          </a:p>
+          <a:p>
+            <a:r>
+              <a:rPr lang="ru-RU" dirty="0"/>
+              <a:t>Обратите внимание, что память под кадры стека не очищается явно. После удаления кадра его содержимое может оставаться в памяти и рассматривается как неиспользуемые данные, которые могут быть перезаписаны при последующих вызовах функций.</a:t>
+            </a:r>
+          </a:p>
+          <a:p>
+            <a:endParaRPr lang="ru-RU" dirty="0"/>
+          </a:p>
+          <a:p>
+            <a:r>
+              <a:rPr lang="ru-RU" dirty="0"/>
+              <a:t>Таким образом, стек отражает не только структуру вызовов, но и текущее состояние выполнения программы.</a:t>
+            </a:r>
+          </a:p>
+          <a:p>
+            <a:endParaRPr lang="en-US" dirty="0"/>
+          </a:p>
+        </p:txBody>
+      </p:sp>
+      <p:sp>
+        <p:nvSpPr>
+          <p:cNvPr id="4" name="Slide Number Placeholder 3">
+            <a:extLst>
+              <a:ext uri="{FF2B5EF4-FFF2-40B4-BE49-F238E27FC236}">
+                <a16:creationId xmlns:a16="http://schemas.microsoft.com/office/drawing/2014/main" id="{C81F0EF6-64B7-2B8F-B086-D999C739D2ED}"/>
+              </a:ext>
+            </a:extLst>
+          </p:cNvPr>
+          <p:cNvSpPr>
+            <a:spLocks noGrp="1"/>
+          </p:cNvSpPr>
+          <p:nvPr>
+            <p:ph type="sldNum" sz="quarter" idx="5"/>
+          </p:nvPr>
+        </p:nvSpPr>
+        <p:spPr/>
+        <p:txBody>
+          <a:bodyPr/>
+          <a:lstStyle/>
+          <a:p>
+            <a:fld id="{87259E61-CD8F-4EDB-89B2-A2524EC5B40A}" type="slidenum">
+              <a:rPr lang="en-US" smtClean="0"/>
+              <a:t>10</a:t>
+            </a:fld>
+            <a:endParaRPr lang="en-US"/>
+          </a:p>
+        </p:txBody>
+      </p:sp>
+    </p:spTree>
+    <p:extLst>
+      <p:ext uri="{BB962C8B-B14F-4D97-AF65-F5344CB8AC3E}">
+        <p14:creationId xmlns:p14="http://schemas.microsoft.com/office/powerpoint/2010/main" val="4091617741"/>
+      </p:ext>
+    </p:extLst>
+  </p:cSld>
+  <p:clrMapOvr>
+    <a:masterClrMapping/>
+  </p:clrMapOvr>
+</p:notes>
+</file>
+
+<file path=ppt/notesSlides/notesSlide11.xml><?xml version="1.0" encoding="utf-8"?>
 <p:notes xmlns:a="http://schemas.openxmlformats.org/drawingml/2006/main" xmlns:r="http://schemas.openxmlformats.org/officeDocument/2006/relationships" xmlns:p="http://schemas.openxmlformats.org/presentationml/2006/main">
   <p:cSld>
     <p:spTree>
@@ -768,166 +847,6 @@
 </p:notes>
 </file>
 
-<file path=ppt/notesSlides/notesSlide11.xml><?xml version="1.0" encoding="utf-8"?>
-<p:notes xmlns:a="http://schemas.openxmlformats.org/drawingml/2006/main" xmlns:r="http://schemas.openxmlformats.org/officeDocument/2006/relationships" xmlns:p="http://schemas.openxmlformats.org/presentationml/2006/main">
-  <p:cSld>
-    <p:spTree>
-      <p:nvGrpSpPr>
-        <p:cNvPr id="1" name=""/>
-        <p:cNvGrpSpPr/>
-        <p:nvPr/>
-      </p:nvGrpSpPr>
-      <p:grpSpPr>
-        <a:xfrm>
-          <a:off x="0" y="0"/>
-          <a:ext cx="0" cy="0"/>
-          <a:chOff x="0" y="0"/>
-          <a:chExt cx="0" cy="0"/>
-        </a:xfrm>
-      </p:grpSpPr>
-      <p:sp>
-        <p:nvSpPr>
-          <p:cNvPr id="2" name="Slide Image Placeholder 1"/>
-          <p:cNvSpPr>
-            <a:spLocks noGrp="1" noRot="1" noChangeAspect="1"/>
-          </p:cNvSpPr>
-          <p:nvPr>
-            <p:ph type="sldImg"/>
-          </p:nvPr>
-        </p:nvSpPr>
-        <p:spPr/>
-      </p:sp>
-      <p:sp>
-        <p:nvSpPr>
-          <p:cNvPr id="3" name="Notes Placeholder 2"/>
-          <p:cNvSpPr>
-            <a:spLocks noGrp="1"/>
-          </p:cNvSpPr>
-          <p:nvPr>
-            <p:ph type="body" idx="1"/>
-          </p:nvPr>
-        </p:nvSpPr>
-        <p:spPr/>
-        <p:txBody>
-          <a:bodyPr/>
-          <a:lstStyle/>
-          <a:p>
-            <a:r>
-              <a:rPr lang="ru-RU" dirty="0"/>
-              <a:t>На этом слайде приведён пример программы, который позволяет увидеть, как стек влияет на размещение локальных переменных в памяти.</a:t>
-            </a:r>
-          </a:p>
-          <a:p>
-            <a:endParaRPr lang="ru-RU" dirty="0"/>
-          </a:p>
-          <a:p>
-            <a:r>
-              <a:rPr lang="ru-RU" dirty="0"/>
-              <a:t>Сначала в функции </a:t>
-            </a:r>
-            <a:r>
-              <a:rPr lang="ru-RU" dirty="0" err="1"/>
-              <a:t>main</a:t>
-            </a:r>
-            <a:r>
-              <a:rPr lang="ru-RU" dirty="0"/>
-              <a:t> вызывается функция B. В этот момент создаётся кадр стека для B, и локальная переменная y размещается в некоторой области памяти. Мы видим её адрес в выводе.</a:t>
-            </a:r>
-          </a:p>
-          <a:p>
-            <a:endParaRPr lang="ru-RU" dirty="0"/>
-          </a:p>
-          <a:p>
-            <a:r>
-              <a:rPr lang="ru-RU" dirty="0"/>
-              <a:t>Далее вызывается функция A. Для неё создаётся новый кадр стека, в котором размещается переменная x. Обратите внимание, что адрес переменной x совпадает с адресом, по которому ранее находилась переменная y из первого вызова функции B.</a:t>
-            </a:r>
-          </a:p>
-          <a:p>
-            <a:endParaRPr lang="ru-RU" dirty="0"/>
-          </a:p>
-          <a:p>
-            <a:r>
-              <a:rPr lang="ru-RU" dirty="0"/>
-              <a:t>Это происходит потому, что после завершения первого вызова B её кадр стека был удалён, и память, которую он занимал, стала доступной для повторного использования.</a:t>
-            </a:r>
-          </a:p>
-          <a:p>
-            <a:endParaRPr lang="ru-RU" dirty="0"/>
-          </a:p>
-          <a:p>
-            <a:r>
-              <a:rPr lang="ru-RU" dirty="0"/>
-              <a:t>Затем внутри функции A вызывается функция B. В этот момент стек уже содержит кадр функции A, поэтому новый кадр функции B размещается поверх него. Соответственно, переменная y получает другой адрес, отличный от предыдущего случая.</a:t>
-            </a:r>
-          </a:p>
-          <a:p>
-            <a:endParaRPr lang="ru-RU" dirty="0"/>
-          </a:p>
-          <a:p>
-            <a:r>
-              <a:rPr lang="ru-RU" dirty="0"/>
-              <a:t>После завершения функции A стек снова возвращается в состояние, соответствующее функции </a:t>
-            </a:r>
-            <a:r>
-              <a:rPr lang="ru-RU" dirty="0" err="1"/>
-              <a:t>main</a:t>
-            </a:r>
-            <a:r>
-              <a:rPr lang="ru-RU" dirty="0"/>
-              <a:t>. Когда мы повторно вызываем B, её кадр снова размещается в той же области памяти, что и при первом вызове, и адрес переменной y совпадает с первоначальным.</a:t>
-            </a:r>
-          </a:p>
-          <a:p>
-            <a:endParaRPr lang="ru-RU" dirty="0"/>
-          </a:p>
-          <a:p>
-            <a:r>
-              <a:rPr lang="ru-RU" dirty="0"/>
-              <a:t>Таким образом, мы видим, что адрес локальной переменной определяется не только самой функцией, но и текущим состоянием стека, то есть тем, какие функции вызваны в данный момент времени.</a:t>
-            </a:r>
-          </a:p>
-          <a:p>
-            <a:endParaRPr lang="en-US" dirty="0"/>
-          </a:p>
-        </p:txBody>
-      </p:sp>
-      <p:sp>
-        <p:nvSpPr>
-          <p:cNvPr id="4" name="Slide Number Placeholder 3"/>
-          <p:cNvSpPr>
-            <a:spLocks noGrp="1"/>
-          </p:cNvSpPr>
-          <p:nvPr>
-            <p:ph type="sldNum" sz="quarter" idx="5"/>
-          </p:nvPr>
-        </p:nvSpPr>
-        <p:spPr/>
-        <p:txBody>
-          <a:bodyPr/>
-          <a:lstStyle/>
-          <a:p>
-            <a:fld id="{87259E61-CD8F-4EDB-89B2-A2524EC5B40A}" type="slidenum">
-              <a:rPr lang="en-US" smtClean="0"/>
-              <a:t>12</a:t>
-            </a:fld>
-            <a:endParaRPr lang="en-US"/>
-          </a:p>
-        </p:txBody>
-      </p:sp>
-    </p:spTree>
-    <p:extLst>
-      <p:ext uri="{BB962C8B-B14F-4D97-AF65-F5344CB8AC3E}">
-        <p14:creationId xmlns:p14="http://schemas.microsoft.com/office/powerpoint/2010/main" val="3726991437"/>
-      </p:ext>
-    </p:extLst>
-  </p:cSld>
-  <p:clrMapOvr>
-    <a:masterClrMapping/>
-  </p:clrMapOvr>
-</p:notes>
-</file>
-
 <file path=ppt/notesSlides/notesSlide12.xml><?xml version="1.0" encoding="utf-8"?>
 <p:notes xmlns:a="http://schemas.openxmlformats.org/drawingml/2006/main" xmlns:r="http://schemas.openxmlformats.org/officeDocument/2006/relationships" xmlns:p="http://schemas.openxmlformats.org/presentationml/2006/main">
   <p:cSld>
@@ -974,7 +893,16 @@
           <a:p>
             <a:r>
               <a:rPr lang="ru-RU" dirty="0"/>
-              <a:t>Рассмотрим, как работает эта программа на уровне ассемблера, начиная с функции </a:t>
+              <a:t>На этом слайде приведён пример программы, который позволяет увидеть, как стек влияет на размещение локальных переменных в памяти.</a:t>
+            </a:r>
+          </a:p>
+          <a:p>
+            <a:endParaRPr lang="ru-RU" dirty="0"/>
+          </a:p>
+          <a:p>
+            <a:r>
+              <a:rPr lang="ru-RU" dirty="0"/>
+              <a:t>Сначала в функции </a:t>
             </a:r>
             <a:r>
               <a:rPr lang="ru-RU" dirty="0" err="1"/>
@@ -982,9 +910,8 @@
             </a:r>
             <a:r>
               <a:rPr lang="ru-RU" dirty="0"/>
-              <a:t>.</a:t>
-            </a:r>
-            <a:endParaRPr lang="en-US" dirty="0"/>
+              <a:t> вызывается функция B. В этот момент создаётся кадр стека для B, и локальная переменная y размещается в некоторой области памяти. Мы видим её адрес в выводе.</a:t>
+            </a:r>
           </a:p>
           <a:p>
             <a:endParaRPr lang="ru-RU" dirty="0"/>
@@ -992,7 +919,34 @@
           <a:p>
             <a:r>
               <a:rPr lang="ru-RU" dirty="0"/>
-              <a:t>В начале функции </a:t>
+              <a:t>Далее вызывается функция A. Для неё создаётся новый кадр стека, в котором размещается переменная x. Обратите внимание, что адрес переменной x совпадает с адресом, по которому ранее находилась переменная y из первого вызова функции B.</a:t>
+            </a:r>
+          </a:p>
+          <a:p>
+            <a:endParaRPr lang="ru-RU" dirty="0"/>
+          </a:p>
+          <a:p>
+            <a:r>
+              <a:rPr lang="ru-RU" dirty="0"/>
+              <a:t>Это происходит потому, что после завершения первого вызова B её кадр стека был удалён, и память, которую он занимал, стала доступной для повторного использования.</a:t>
+            </a:r>
+          </a:p>
+          <a:p>
+            <a:endParaRPr lang="ru-RU" dirty="0"/>
+          </a:p>
+          <a:p>
+            <a:r>
+              <a:rPr lang="ru-RU" dirty="0"/>
+              <a:t>Затем внутри функции A вызывается функция B. В этот момент стек уже содержит кадр функции A, поэтому новый кадр функции B размещается поверх него. Соответственно, переменная y получает другой адрес, отличный от предыдущего случая.</a:t>
+            </a:r>
+          </a:p>
+          <a:p>
+            <a:endParaRPr lang="ru-RU" dirty="0"/>
+          </a:p>
+          <a:p>
+            <a:r>
+              <a:rPr lang="ru-RU" dirty="0"/>
+              <a:t>После завершения функции A стек снова возвращается в состояние, соответствующее функции </a:t>
             </a:r>
             <a:r>
               <a:rPr lang="ru-RU" dirty="0" err="1"/>
@@ -1000,33 +954,8 @@
             </a:r>
             <a:r>
               <a:rPr lang="ru-RU" dirty="0"/>
-              <a:t> выполняется инструкция </a:t>
-            </a:r>
-            <a:r>
-              <a:rPr lang="ru-RU" dirty="0" err="1"/>
-              <a:t>push</a:t>
-            </a:r>
-            <a:r>
-              <a:rPr lang="ru-RU" dirty="0"/>
-              <a:t> </a:t>
-            </a:r>
-            <a:r>
-              <a:rPr lang="ru-RU" dirty="0" err="1"/>
-              <a:t>rax</a:t>
-            </a:r>
-            <a:r>
-              <a:rPr lang="ru-RU" dirty="0"/>
-              <a:t>. На первый взгляд может показаться, что она не имеет смысла, так как значение регистра </a:t>
-            </a:r>
-            <a:r>
-              <a:rPr lang="ru-RU" dirty="0" err="1"/>
-              <a:t>rax</a:t>
-            </a:r>
-            <a:r>
-              <a:rPr lang="ru-RU" dirty="0"/>
-              <a:t> далее не используется. Однако её основная цель — не сохранить значение, а скорректировать выравнивание стека.</a:t>
-            </a:r>
-            <a:endParaRPr lang="en-US" dirty="0"/>
+              <a:t>. Когда мы повторно вызываем B, её кадр снова размещается в той же области памяти, что и при первом вызове, и адрес переменной y совпадает с первоначальным.</a:t>
+            </a:r>
           </a:p>
           <a:p>
             <a:endParaRPr lang="ru-RU" dirty="0"/>
@@ -1034,481 +963,7 @@
           <a:p>
             <a:r>
               <a:rPr lang="ru-RU" dirty="0"/>
-              <a:t>Согласно соглашению о вызовах System V, перед выполнением инструкции </a:t>
-            </a:r>
-            <a:r>
-              <a:rPr lang="ru-RU" dirty="0" err="1"/>
-              <a:t>call</a:t>
-            </a:r>
-            <a:r>
-              <a:rPr lang="ru-RU" dirty="0"/>
-              <a:t> указатель стека должен быть выровнен по границе 16 байт. Это требование связано, в частности, с корректной работой инструкций SSE.</a:t>
-            </a:r>
-            <a:endParaRPr lang="en-US" dirty="0"/>
-          </a:p>
-          <a:p>
-            <a:endParaRPr lang="ru-RU" dirty="0"/>
-          </a:p>
-          <a:p>
-            <a:r>
-              <a:rPr lang="ru-RU" dirty="0"/>
-              <a:t>Важно понимать, что функция </a:t>
-            </a:r>
-            <a:r>
-              <a:rPr lang="ru-RU" dirty="0" err="1"/>
-              <a:t>main</a:t>
-            </a:r>
-            <a:r>
-              <a:rPr lang="ru-RU" dirty="0"/>
-              <a:t> сама была вызвана до этого, и при её вызове в стек уже был помещён адрес возврата. Это автоматически сместило указатель стека на 8 байт, нарушив выравнивание по 16 байтам.</a:t>
-            </a:r>
-          </a:p>
-          <a:p>
-            <a:r>
-              <a:rPr lang="ru-RU" dirty="0"/>
-              <a:t>Инструкция </a:t>
-            </a:r>
-            <a:r>
-              <a:rPr lang="ru-RU" dirty="0" err="1"/>
-              <a:t>push</a:t>
-            </a:r>
-            <a:r>
-              <a:rPr lang="ru-RU" dirty="0"/>
-              <a:t> </a:t>
-            </a:r>
-            <a:r>
-              <a:rPr lang="ru-RU" dirty="0" err="1"/>
-              <a:t>rax</a:t>
-            </a:r>
-            <a:r>
-              <a:rPr lang="ru-RU" dirty="0"/>
-              <a:t> уменьшает указатель стека ещё на 8 байт, тем самым восстанавливая выравнивание. После этого стек снова становится выровненным по 16 байтам, и можно безопасно вызывать другие функции.</a:t>
-            </a:r>
-          </a:p>
-          <a:p>
-            <a:endParaRPr lang="ru-RU" dirty="0"/>
-          </a:p>
-          <a:p>
-            <a:r>
-              <a:rPr lang="ru-RU" dirty="0"/>
-              <a:t>Далее значение 42 помещается в регистр </a:t>
-            </a:r>
-            <a:r>
-              <a:rPr lang="ru-RU" dirty="0" err="1"/>
-              <a:t>edi</a:t>
-            </a:r>
-            <a:r>
-              <a:rPr lang="ru-RU" dirty="0"/>
-              <a:t>. В используемом соглашении о вызовах первый целочисленный аргумент функции передаётся именно через этот регистр.</a:t>
-            </a:r>
-            <a:endParaRPr lang="en-US" dirty="0"/>
-          </a:p>
-          <a:p>
-            <a:endParaRPr lang="ru-RU" dirty="0"/>
-          </a:p>
-          <a:p>
-            <a:r>
-              <a:rPr lang="ru-RU" dirty="0"/>
-              <a:t>После этого выполняется инструкция </a:t>
-            </a:r>
-            <a:r>
-              <a:rPr lang="ru-RU" dirty="0" err="1"/>
-              <a:t>call</a:t>
-            </a:r>
-            <a:r>
-              <a:rPr lang="ru-RU" dirty="0"/>
-              <a:t> </a:t>
-            </a:r>
-            <a:r>
-              <a:rPr lang="ru-RU" dirty="0" err="1"/>
-              <a:t>Fn</a:t>
-            </a:r>
-            <a:r>
-              <a:rPr lang="ru-RU" dirty="0"/>
-              <a:t>. Эта инструкция делает две вещи: сохраняет адрес возврата в стеке и передаёт управление функции </a:t>
-            </a:r>
-            <a:r>
-              <a:rPr lang="ru-RU" dirty="0" err="1"/>
-              <a:t>Fn</a:t>
-            </a:r>
-            <a:r>
-              <a:rPr lang="ru-RU" dirty="0"/>
-              <a:t>.</a:t>
-            </a:r>
-            <a:endParaRPr lang="en-US" dirty="0"/>
-          </a:p>
-          <a:p>
-            <a:endParaRPr lang="ru-RU" dirty="0"/>
-          </a:p>
-          <a:p>
-            <a:r>
-              <a:rPr lang="ru-RU" dirty="0"/>
-              <a:t>Переходим к функции </a:t>
-            </a:r>
-            <a:r>
-              <a:rPr lang="ru-RU" dirty="0" err="1"/>
-              <a:t>Fn</a:t>
-            </a:r>
-            <a:r>
-              <a:rPr lang="ru-RU" dirty="0"/>
-              <a:t>. На входе значение параметра x уже находится в регистре </a:t>
-            </a:r>
-            <a:r>
-              <a:rPr lang="ru-RU" dirty="0" err="1"/>
-              <a:t>edi</a:t>
-            </a:r>
-            <a:r>
-              <a:rPr lang="ru-RU" dirty="0"/>
-              <a:t>, согласно соглашению о вызовах.</a:t>
-            </a:r>
-          </a:p>
-          <a:p>
-            <a:r>
-              <a:rPr lang="ru-RU" dirty="0"/>
-              <a:t>Первая инструкция </a:t>
-            </a:r>
-            <a:r>
-              <a:rPr lang="ru-RU" dirty="0" err="1"/>
-              <a:t>sub</a:t>
-            </a:r>
-            <a:r>
-              <a:rPr lang="ru-RU" dirty="0"/>
-              <a:t> </a:t>
-            </a:r>
-            <a:r>
-              <a:rPr lang="ru-RU" dirty="0" err="1"/>
-              <a:t>rsp</a:t>
-            </a:r>
-            <a:r>
-              <a:rPr lang="ru-RU" dirty="0"/>
-              <a:t>, 24 уменьшает указатель стека на 24 байта. Это делается по двум причинам.</a:t>
-            </a:r>
-          </a:p>
-          <a:p>
-            <a:pPr marL="171450" indent="-171450">
-              <a:buFont typeface="Arial" panose="020B0604020202020204" pitchFamily="34" charset="0"/>
-              <a:buChar char="•"/>
-            </a:pPr>
-            <a:r>
-              <a:rPr lang="ru-RU" dirty="0"/>
-              <a:t>Во-первых, после выполнения инструкции </a:t>
-            </a:r>
-            <a:r>
-              <a:rPr lang="ru-RU" dirty="0" err="1"/>
-              <a:t>call</a:t>
-            </a:r>
-            <a:r>
-              <a:rPr lang="ru-RU" dirty="0"/>
-              <a:t> указатель стека уже был смещён на 8 байт из-за сохранённого адреса возврата. Это нарушает выравнивание по 16 байтам.</a:t>
-            </a:r>
-          </a:p>
-          <a:p>
-            <a:pPr marL="171450" indent="-171450">
-              <a:buFont typeface="Arial" panose="020B0604020202020204" pitchFamily="34" charset="0"/>
-              <a:buChar char="•"/>
-            </a:pPr>
-            <a:r>
-              <a:rPr lang="ru-RU" dirty="0"/>
-              <a:t>Во-вторых, функции необходимо выделить место под локальные данные. В данном случае требуется как минимум 4 байта для хранения переменной x, однако с учётом требований выравнивания стек обычно резервируется с запасом, кратным 16 байтам.</a:t>
-            </a:r>
-          </a:p>
-          <a:p>
-            <a:r>
-              <a:rPr lang="ru-RU" dirty="0"/>
-              <a:t>Таким образом, выделение 24 байт позволяет одновременно и разместить локальные данные, и обеспечить корректное выравнивание стека перед вызовом функции </a:t>
-            </a:r>
-            <a:r>
-              <a:rPr lang="ru-RU" dirty="0" err="1"/>
-              <a:t>printf</a:t>
-            </a:r>
-            <a:r>
-              <a:rPr lang="ru-RU" dirty="0"/>
-              <a:t>.</a:t>
-            </a:r>
-          </a:p>
-          <a:p>
-            <a:endParaRPr lang="ru-RU" dirty="0"/>
-          </a:p>
-          <a:p>
-            <a:r>
-              <a:rPr lang="ru-RU" dirty="0"/>
-              <a:t>Далее значение регистра </a:t>
-            </a:r>
-            <a:r>
-              <a:rPr lang="ru-RU" dirty="0" err="1"/>
-              <a:t>edi</a:t>
-            </a:r>
-            <a:r>
-              <a:rPr lang="ru-RU" dirty="0"/>
-              <a:t> сохраняется в память по адресу [rsp+12]. Это создаёт копию переменной x в стеке.</a:t>
-            </a:r>
-            <a:endParaRPr lang="en-US" dirty="0"/>
-          </a:p>
-          <a:p>
-            <a:endParaRPr lang="ru-RU" dirty="0"/>
-          </a:p>
-          <a:p>
-            <a:r>
-              <a:rPr lang="ru-RU" dirty="0"/>
-              <a:t>Это необходимо потому, что функция </a:t>
-            </a:r>
-            <a:r>
-              <a:rPr lang="ru-RU" dirty="0" err="1"/>
-              <a:t>printf</a:t>
-            </a:r>
-            <a:r>
-              <a:rPr lang="ru-RU" dirty="0"/>
-              <a:t> ожидает получить адрес переменной, а не просто её значение. Поскольку исходно x находится только в регистре, его приходится явно сохранить в память, чтобы затем можно было взять его адрес.</a:t>
-            </a:r>
-            <a:endParaRPr lang="en-US" dirty="0"/>
-          </a:p>
-          <a:p>
-            <a:endParaRPr lang="ru-RU" dirty="0"/>
-          </a:p>
-          <a:p>
-            <a:r>
-              <a:rPr lang="ru-RU" dirty="0"/>
-              <a:t>Инструкция </a:t>
-            </a:r>
-            <a:r>
-              <a:rPr lang="ru-RU" dirty="0" err="1"/>
-              <a:t>lea</a:t>
-            </a:r>
-            <a:r>
-              <a:rPr lang="ru-RU" dirty="0"/>
-              <a:t> </a:t>
-            </a:r>
-            <a:r>
-              <a:rPr lang="ru-RU" dirty="0" err="1"/>
-              <a:t>rsi</a:t>
-            </a:r>
-            <a:r>
-              <a:rPr lang="ru-RU" dirty="0"/>
-              <a:t>, [rsp+12] вычисляет адрес этой переменной и передаёт его в качестве второго аргумента функции </a:t>
-            </a:r>
-            <a:r>
-              <a:rPr lang="ru-RU" dirty="0" err="1"/>
-              <a:t>printf</a:t>
-            </a:r>
-            <a:r>
-              <a:rPr lang="ru-RU" dirty="0"/>
-              <a:t>.</a:t>
-            </a:r>
-          </a:p>
-          <a:p>
-            <a:r>
-              <a:rPr lang="ru-RU" dirty="0"/>
-              <a:t>В регистр </a:t>
-            </a:r>
-            <a:r>
-              <a:rPr lang="ru-RU" dirty="0" err="1"/>
-              <a:t>edi</a:t>
-            </a:r>
-            <a:r>
-              <a:rPr lang="ru-RU" dirty="0"/>
-              <a:t> загружается адрес строки формата, после чего выполняется вызов </a:t>
-            </a:r>
-            <a:r>
-              <a:rPr lang="ru-RU" dirty="0" err="1"/>
-              <a:t>printf</a:t>
-            </a:r>
-            <a:r>
-              <a:rPr lang="ru-RU" dirty="0"/>
-              <a:t>.</a:t>
-            </a:r>
-            <a:endParaRPr lang="en-US" dirty="0"/>
-          </a:p>
-          <a:p>
-            <a:endParaRPr lang="ru-RU" dirty="0"/>
-          </a:p>
-          <a:p>
-            <a:r>
-              <a:rPr lang="ru-RU" dirty="0"/>
-              <a:t>После возврата из </a:t>
-            </a:r>
-            <a:r>
-              <a:rPr lang="ru-RU" dirty="0" err="1"/>
-              <a:t>printf</a:t>
-            </a:r>
-            <a:r>
-              <a:rPr lang="ru-RU" dirty="0"/>
-              <a:t> выполняется инструкция </a:t>
-            </a:r>
-            <a:r>
-              <a:rPr lang="ru-RU" dirty="0" err="1"/>
-              <a:t>add</a:t>
-            </a:r>
-            <a:r>
-              <a:rPr lang="ru-RU" dirty="0"/>
-              <a:t> </a:t>
-            </a:r>
-            <a:r>
-              <a:rPr lang="ru-RU" dirty="0" err="1"/>
-              <a:t>rsp</a:t>
-            </a:r>
-            <a:r>
-              <a:rPr lang="ru-RU" dirty="0"/>
-              <a:t>, 24, которая освобождает ранее выделенное место в стеке и восстанавливает указатель стека.</a:t>
-            </a:r>
-            <a:endParaRPr lang="en-US" dirty="0"/>
-          </a:p>
-          <a:p>
-            <a:endParaRPr lang="ru-RU" dirty="0"/>
-          </a:p>
-          <a:p>
-            <a:r>
-              <a:rPr lang="ru-RU" dirty="0"/>
-              <a:t>Таким образом, мы видим, что даже для такой простой операции, как передача адреса переменной, компилятор вынужден явно управлять стеком, размещать данные в памяти и следить за соблюдением требований соглашения о вызовах.</a:t>
-            </a:r>
-          </a:p>
-          <a:p>
-            <a:endParaRPr lang="ru-RU" dirty="0"/>
-          </a:p>
-          <a:p>
-            <a:r>
-              <a:rPr lang="ru-RU" dirty="0"/>
-              <a:t>Затем выполняется </a:t>
-            </a:r>
-            <a:r>
-              <a:rPr lang="ru-RU" dirty="0" err="1"/>
-              <a:t>ret</a:t>
-            </a:r>
-            <a:r>
-              <a:rPr lang="ru-RU" dirty="0"/>
-              <a:t>. Эта инструкция извлекает из стека адрес возврата и передаёт управление обратно в функцию </a:t>
-            </a:r>
-            <a:r>
-              <a:rPr lang="ru-RU" dirty="0" err="1"/>
-              <a:t>main</a:t>
-            </a:r>
-            <a:r>
-              <a:rPr lang="ru-RU" dirty="0"/>
-              <a:t>.</a:t>
-            </a:r>
-            <a:endParaRPr lang="en-US" dirty="0"/>
-          </a:p>
-          <a:p>
-            <a:endParaRPr lang="ru-RU" dirty="0"/>
-          </a:p>
-          <a:p>
-            <a:r>
-              <a:rPr lang="ru-RU" dirty="0"/>
-              <a:t>Возвращаясь в </a:t>
-            </a:r>
-            <a:r>
-              <a:rPr lang="ru-RU" dirty="0" err="1"/>
-              <a:t>main</a:t>
-            </a:r>
-            <a:r>
-              <a:rPr lang="ru-RU" dirty="0"/>
-              <a:t>, выполняется инструкция </a:t>
-            </a:r>
-            <a:r>
-              <a:rPr lang="ru-RU" dirty="0" err="1"/>
-              <a:t>xor</a:t>
-            </a:r>
-            <a:r>
-              <a:rPr lang="ru-RU" dirty="0"/>
-              <a:t> </a:t>
-            </a:r>
-            <a:r>
-              <a:rPr lang="ru-RU" dirty="0" err="1"/>
-              <a:t>eax</a:t>
-            </a:r>
-            <a:r>
-              <a:rPr lang="ru-RU" dirty="0"/>
-              <a:t>, </a:t>
-            </a:r>
-            <a:r>
-              <a:rPr lang="ru-RU" dirty="0" err="1"/>
-              <a:t>eax</a:t>
-            </a:r>
-            <a:r>
-              <a:rPr lang="ru-RU" dirty="0"/>
-              <a:t>, которая подготавливает возвращаемое значение 0.</a:t>
-            </a:r>
-            <a:endParaRPr lang="en-US" dirty="0"/>
-          </a:p>
-          <a:p>
-            <a:endParaRPr lang="ru-RU" dirty="0"/>
-          </a:p>
-          <a:p>
-            <a:r>
-              <a:rPr lang="ru-RU" dirty="0"/>
-              <a:t>Затем выполняется инструкция </a:t>
-            </a:r>
-            <a:r>
-              <a:rPr lang="ru-RU" dirty="0" err="1"/>
-              <a:t>pop</a:t>
-            </a:r>
-            <a:r>
-              <a:rPr lang="ru-RU" dirty="0"/>
-              <a:t> </a:t>
-            </a:r>
-            <a:r>
-              <a:rPr lang="ru-RU" dirty="0" err="1"/>
-              <a:t>rdx</a:t>
-            </a:r>
-            <a:r>
-              <a:rPr lang="ru-RU" dirty="0"/>
-              <a:t>. Она симметрична ранее выполненному </a:t>
-            </a:r>
-            <a:r>
-              <a:rPr lang="ru-RU" dirty="0" err="1"/>
-              <a:t>push</a:t>
-            </a:r>
-            <a:r>
-              <a:rPr lang="ru-RU" dirty="0"/>
-              <a:t> и используется для восстановления указателя стека в исходное состояние. При этом конкретный регистр, в который извлекается значение, не имеет значения, так как само значение нам не нужно — важно лишь корректно сдвинуть указатель стека обратно.</a:t>
-            </a:r>
-          </a:p>
-          <a:p>
-            <a:r>
-              <a:rPr lang="ru-RU" dirty="0"/>
-              <a:t>Таким образом, инструкции </a:t>
-            </a:r>
-            <a:r>
-              <a:rPr lang="ru-RU" dirty="0" err="1"/>
-              <a:t>push</a:t>
-            </a:r>
-            <a:r>
-              <a:rPr lang="ru-RU" dirty="0"/>
-              <a:t> и </a:t>
-            </a:r>
-            <a:r>
-              <a:rPr lang="ru-RU" dirty="0" err="1"/>
-              <a:t>pop</a:t>
-            </a:r>
-            <a:r>
-              <a:rPr lang="ru-RU" dirty="0"/>
-              <a:t> в данном случае используются не для сохранения данных, а для соблюдения требований соглашения о вызовах и корректного выравнивания стека.</a:t>
-            </a:r>
-          </a:p>
-          <a:p>
-            <a:endParaRPr lang="ru-RU" dirty="0"/>
-          </a:p>
-          <a:p>
-            <a:r>
-              <a:rPr lang="ru-RU" dirty="0"/>
-              <a:t>И, наконец, инструкция </a:t>
-            </a:r>
-            <a:r>
-              <a:rPr lang="ru-RU" dirty="0" err="1"/>
-              <a:t>ret</a:t>
-            </a:r>
-            <a:r>
-              <a:rPr lang="ru-RU" dirty="0"/>
-              <a:t> завершает выполнение программы и возвращает управление операционной системе.</a:t>
-            </a:r>
-            <a:endParaRPr lang="en-US" dirty="0"/>
-          </a:p>
-          <a:p>
-            <a:endParaRPr lang="ru-RU" dirty="0"/>
-          </a:p>
-          <a:p>
-            <a:r>
-              <a:rPr lang="ru-RU" dirty="0"/>
-              <a:t>Таким образом, мы видим, что вызов функции на уровне ассемблера — это последовательность операций по передаче аргументов через регистры, работе со стеком и переходу по адресу, сохранённому в стеке.</a:t>
+              <a:t>Таким образом, мы видим, что адрес локальной переменной определяется не только самой функцией, но и текущим состоянием стека, то есть тем, какие функции вызваны в данный момент времени.</a:t>
             </a:r>
           </a:p>
           <a:p>
@@ -1533,7 +988,7 @@
           <a:p>
             <a:fld id="{87259E61-CD8F-4EDB-89B2-A2524EC5B40A}" type="slidenum">
               <a:rPr lang="en-US" smtClean="0"/>
-              <a:t>13</a:t>
+              <a:t>12</a:t>
             </a:fld>
             <a:endParaRPr lang="en-US"/>
           </a:p>
@@ -1542,7 +997,7 @@
     </p:spTree>
     <p:extLst>
       <p:ext uri="{BB962C8B-B14F-4D97-AF65-F5344CB8AC3E}">
-        <p14:creationId xmlns:p14="http://schemas.microsoft.com/office/powerpoint/2010/main" val="2445816648"/>
+        <p14:creationId xmlns:p14="http://schemas.microsoft.com/office/powerpoint/2010/main" val="3726991437"/>
       </p:ext>
     </p:extLst>
   </p:cSld>
@@ -1598,7 +1053,15 @@
           <a:p>
             <a:r>
               <a:rPr lang="ru-RU" dirty="0"/>
-              <a:t>До этого момента мы обсуждали, где находятся данные в памяти. Теперь важно понять, как долго они там находятся.</a:t>
+              <a:t>Рассмотрим, как работает эта программа на уровне ассемблера, начиная с функции </a:t>
+            </a:r>
+            <a:r>
+              <a:rPr lang="ru-RU" dirty="0" err="1"/>
+              <a:t>main</a:t>
+            </a:r>
+            <a:r>
+              <a:rPr lang="ru-RU" dirty="0"/>
+              <a:t>.</a:t>
             </a:r>
             <a:endParaRPr lang="en-US" dirty="0"/>
           </a:p>
@@ -1608,7 +1071,39 @@
           <a:p>
             <a:r>
               <a:rPr lang="ru-RU" dirty="0"/>
-              <a:t>Любой объект в программе имеет время жизни. Это период, в течение которого объект существует и может быть корректно использован.</a:t>
+              <a:t>В начале функции </a:t>
+            </a:r>
+            <a:r>
+              <a:rPr lang="ru-RU" dirty="0" err="1"/>
+              <a:t>main</a:t>
+            </a:r>
+            <a:r>
+              <a:rPr lang="ru-RU" dirty="0"/>
+              <a:t> выполняется инструкция </a:t>
+            </a:r>
+            <a:r>
+              <a:rPr lang="ru-RU" dirty="0" err="1"/>
+              <a:t>push</a:t>
+            </a:r>
+            <a:r>
+              <a:rPr lang="ru-RU" dirty="0"/>
+              <a:t> </a:t>
+            </a:r>
+            <a:r>
+              <a:rPr lang="ru-RU" dirty="0" err="1"/>
+              <a:t>rax</a:t>
+            </a:r>
+            <a:r>
+              <a:rPr lang="ru-RU" dirty="0"/>
+              <a:t>. На первый взгляд может показаться, что она не имеет смысла, так как значение регистра </a:t>
+            </a:r>
+            <a:r>
+              <a:rPr lang="ru-RU" dirty="0" err="1"/>
+              <a:t>rax</a:t>
+            </a:r>
+            <a:r>
+              <a:rPr lang="ru-RU" dirty="0"/>
+              <a:t> далее не используется. Однако её основная цель — не сохранить значение, а скорректировать выравнивание стека.</a:t>
             </a:r>
             <a:endParaRPr lang="en-US" dirty="0"/>
           </a:p>
@@ -1618,7 +1113,15 @@
           <a:p>
             <a:r>
               <a:rPr lang="ru-RU" dirty="0"/>
-              <a:t>Объект создаётся, затем используется в программе, а после этого его время жизни заканчивается, и память может быть использована повторно.</a:t>
+              <a:t>Согласно соглашению о вызовах System V, перед выполнением инструкции </a:t>
+            </a:r>
+            <a:r>
+              <a:rPr lang="ru-RU" dirty="0" err="1"/>
+              <a:t>call</a:t>
+            </a:r>
+            <a:r>
+              <a:rPr lang="ru-RU" dirty="0"/>
+              <a:t> указатель стека должен быть выровнен по границе 16 байт. Это требование связано, в частности, с корректной работой инструкций SSE.</a:t>
             </a:r>
             <a:endParaRPr lang="en-US" dirty="0"/>
           </a:p>
@@ -1628,7 +1131,54 @@
           <a:p>
             <a:r>
               <a:rPr lang="ru-RU" dirty="0"/>
-              <a:t>Ключевой момент заключается в том, что после завершения времени жизни объекта доступ к нему становится некорректным, даже если физически данные ещё остаются в памяти.</a:t>
+              <a:t>Важно понимать, что функция </a:t>
+            </a:r>
+            <a:r>
+              <a:rPr lang="ru-RU" dirty="0" err="1"/>
+              <a:t>main</a:t>
+            </a:r>
+            <a:r>
+              <a:rPr lang="ru-RU" dirty="0"/>
+              <a:t> сама была вызвана до этого, и при её вызове в стек уже был помещён адрес возврата. Это автоматически сместило указатель стека на 8 байт, нарушив выравнивание по 16 байтам.</a:t>
+            </a:r>
+          </a:p>
+          <a:p>
+            <a:r>
+              <a:rPr lang="ru-RU" dirty="0"/>
+              <a:t>Инструкция </a:t>
+            </a:r>
+            <a:r>
+              <a:rPr lang="ru-RU" dirty="0" err="1"/>
+              <a:t>push</a:t>
+            </a:r>
+            <a:r>
+              <a:rPr lang="ru-RU" dirty="0"/>
+              <a:t> </a:t>
+            </a:r>
+            <a:r>
+              <a:rPr lang="ru-RU" dirty="0" err="1"/>
+              <a:t>rax</a:t>
+            </a:r>
+            <a:r>
+              <a:rPr lang="ru-RU" dirty="0"/>
+              <a:t> уменьшает указатель стека ещё на 8 байт, тем самым восстанавливая выравнивание. После этого стек снова становится выровненным по 16 байтам, и можно безопасно вызывать другие функции.</a:t>
+            </a:r>
+          </a:p>
+          <a:p>
+            <a:endParaRPr lang="ru-RU" dirty="0"/>
+          </a:p>
+          <a:p>
+            <a:r>
+              <a:rPr lang="ru-RU" dirty="0"/>
+              <a:t>Далее значение 42 помещается в регистр </a:t>
+            </a:r>
+            <a:r>
+              <a:rPr lang="ru-RU" dirty="0" err="1"/>
+              <a:t>edi</a:t>
+            </a:r>
+            <a:r>
+              <a:rPr lang="ru-RU" dirty="0"/>
+              <a:t>. В используемом соглашении о вызовах первый целочисленный аргумент функции передаётся именно через этот регистр.</a:t>
             </a:r>
             <a:endParaRPr lang="en-US" dirty="0"/>
           </a:p>
@@ -1638,7 +1188,493 @@
           <a:p>
             <a:r>
               <a:rPr lang="ru-RU" dirty="0"/>
-              <a:t>Это одна из наиболее распространённых причин ошибок в программах на языке C.</a:t>
+              <a:t>После этого выполняется инструкция </a:t>
+            </a:r>
+            <a:r>
+              <a:rPr lang="ru-RU" dirty="0" err="1"/>
+              <a:t>call</a:t>
+            </a:r>
+            <a:r>
+              <a:rPr lang="ru-RU" dirty="0"/>
+              <a:t> </a:t>
+            </a:r>
+            <a:r>
+              <a:rPr lang="ru-RU" dirty="0" err="1"/>
+              <a:t>Fn</a:t>
+            </a:r>
+            <a:r>
+              <a:rPr lang="ru-RU" dirty="0"/>
+              <a:t>. Эта инструкция делает две вещи: сохраняет адрес возврата в стеке и передаёт управление функции </a:t>
+            </a:r>
+            <a:r>
+              <a:rPr lang="ru-RU" dirty="0" err="1"/>
+              <a:t>Fn</a:t>
+            </a:r>
+            <a:r>
+              <a:rPr lang="ru-RU" dirty="0"/>
+              <a:t>.</a:t>
+            </a:r>
+            <a:endParaRPr lang="en-US" dirty="0"/>
+          </a:p>
+          <a:p>
+            <a:endParaRPr lang="ru-RU" dirty="0"/>
+          </a:p>
+          <a:p>
+            <a:r>
+              <a:rPr lang="ru-RU" dirty="0"/>
+              <a:t>Переходим к функции </a:t>
+            </a:r>
+            <a:r>
+              <a:rPr lang="ru-RU" dirty="0" err="1"/>
+              <a:t>Fn</a:t>
+            </a:r>
+            <a:r>
+              <a:rPr lang="ru-RU" dirty="0"/>
+              <a:t>. На входе значение параметра x уже находится в регистре </a:t>
+            </a:r>
+            <a:r>
+              <a:rPr lang="ru-RU" dirty="0" err="1"/>
+              <a:t>edi</a:t>
+            </a:r>
+            <a:r>
+              <a:rPr lang="ru-RU" dirty="0"/>
+              <a:t>, согласно соглашению о вызовах.</a:t>
+            </a:r>
+          </a:p>
+          <a:p>
+            <a:r>
+              <a:rPr lang="ru-RU" dirty="0"/>
+              <a:t>Первая инструкция </a:t>
+            </a:r>
+            <a:r>
+              <a:rPr lang="ru-RU" dirty="0" err="1"/>
+              <a:t>sub</a:t>
+            </a:r>
+            <a:r>
+              <a:rPr lang="ru-RU" dirty="0"/>
+              <a:t> </a:t>
+            </a:r>
+            <a:r>
+              <a:rPr lang="ru-RU" dirty="0" err="1"/>
+              <a:t>rsp</a:t>
+            </a:r>
+            <a:r>
+              <a:rPr lang="ru-RU" dirty="0"/>
+              <a:t>, 24 уменьшает указатель стека на 24 байта. Это делается по двум причинам.</a:t>
+            </a:r>
+          </a:p>
+          <a:p>
+            <a:pPr marL="171450" indent="-171450">
+              <a:buFont typeface="Arial" panose="020B0604020202020204" pitchFamily="34" charset="0"/>
+              <a:buChar char="•"/>
+            </a:pPr>
+            <a:r>
+              <a:rPr lang="ru-RU" dirty="0"/>
+              <a:t>Во-первых, после выполнения инструкции </a:t>
+            </a:r>
+            <a:r>
+              <a:rPr lang="ru-RU" dirty="0" err="1"/>
+              <a:t>call</a:t>
+            </a:r>
+            <a:r>
+              <a:rPr lang="ru-RU" dirty="0"/>
+              <a:t> указатель стека уже был смещён на 8 байт из-за сохранённого адреса возврата. Это нарушает выравнивание по 16 байтам.</a:t>
+            </a:r>
+          </a:p>
+          <a:p>
+            <a:pPr marL="171450" indent="-171450">
+              <a:buFont typeface="Arial" panose="020B0604020202020204" pitchFamily="34" charset="0"/>
+              <a:buChar char="•"/>
+            </a:pPr>
+            <a:r>
+              <a:rPr lang="ru-RU" dirty="0"/>
+              <a:t>Во-вторых, функции необходимо выделить место под локальные данные. В данном случае требуется как минимум 4 байта для хранения переменной x, однако с учётом требований выравнивания стек обычно резервируется с запасом, кратным 16 байтам.</a:t>
+            </a:r>
+          </a:p>
+          <a:p>
+            <a:r>
+              <a:rPr lang="ru-RU" dirty="0"/>
+              <a:t>Таким образом, выделение 24 байт позволяет одновременно и разместить локальные данные, и обеспечить корректное выравнивание стека перед вызовом функции </a:t>
+            </a:r>
+            <a:r>
+              <a:rPr lang="ru-RU" dirty="0" err="1"/>
+              <a:t>printf</a:t>
+            </a:r>
+            <a:r>
+              <a:rPr lang="ru-RU" dirty="0"/>
+              <a:t>.</a:t>
+            </a:r>
+          </a:p>
+          <a:p>
+            <a:endParaRPr lang="en-US" dirty="0"/>
+          </a:p>
+          <a:p>
+            <a:r>
+              <a:rPr lang="en-US" dirty="0" err="1"/>
+              <a:t>Xor</a:t>
+            </a:r>
+            <a:r>
+              <a:rPr lang="en-US" dirty="0"/>
+              <a:t> </a:t>
+            </a:r>
+            <a:r>
+              <a:rPr lang="en-US" dirty="0" err="1"/>
+              <a:t>eax</a:t>
+            </a:r>
+            <a:r>
+              <a:rPr lang="en-US" dirty="0"/>
+              <a:t>, </a:t>
+            </a:r>
+            <a:r>
+              <a:rPr lang="en-US" dirty="0" err="1"/>
+              <a:t>eax</a:t>
+            </a:r>
+            <a:r>
+              <a:rPr lang="en-US" dirty="0"/>
+              <a:t> </a:t>
+            </a:r>
+            <a:r>
+              <a:rPr lang="ru-RU" dirty="0"/>
+              <a:t>обнуляет регистр </a:t>
+            </a:r>
+            <a:r>
+              <a:rPr lang="en-US" dirty="0"/>
+              <a:t>EAX</a:t>
+            </a:r>
+            <a:r>
+              <a:rPr lang="ru-RU" dirty="0"/>
+              <a:t> – это быстрый и компактный способ на платформе </a:t>
+            </a:r>
+            <a:r>
+              <a:rPr lang="en-US" dirty="0"/>
+              <a:t>x86-64</a:t>
+            </a:r>
+            <a:r>
+              <a:rPr lang="ru-RU" dirty="0"/>
+              <a:t>.</a:t>
+            </a:r>
+            <a:endParaRPr lang="en-US" dirty="0"/>
+          </a:p>
+          <a:p>
+            <a:r>
+              <a:rPr lang="ru-RU" dirty="0"/>
+              <a:t>Функции с переменным числом аргументов вроде </a:t>
+            </a:r>
+            <a:r>
+              <a:rPr lang="en-US" dirty="0" err="1"/>
+              <a:t>printf</a:t>
+            </a:r>
+            <a:r>
+              <a:rPr lang="ru-RU" dirty="0"/>
+              <a:t> принимают в </a:t>
+            </a:r>
+            <a:r>
+              <a:rPr lang="en-US" dirty="0"/>
+              <a:t>RAX</a:t>
+            </a:r>
+            <a:r>
+              <a:rPr lang="ru-RU" dirty="0"/>
+              <a:t> количество параметров, переданных в </a:t>
+            </a:r>
+            <a:r>
+              <a:rPr lang="en-US" dirty="0"/>
+              <a:t>SSE-</a:t>
+            </a:r>
+            <a:r>
+              <a:rPr lang="ru-RU" dirty="0"/>
+              <a:t>регистрах (например, так передаются аргументы с плавающей запятой).</a:t>
+            </a:r>
+          </a:p>
+          <a:p>
+            <a:r>
+              <a:rPr lang="ru-RU" dirty="0"/>
+              <a:t>В нашем случае – это 0.</a:t>
+            </a:r>
+            <a:endParaRPr lang="en-US" dirty="0"/>
+          </a:p>
+          <a:p>
+            <a:endParaRPr lang="ru-RU" dirty="0"/>
+          </a:p>
+          <a:p>
+            <a:r>
+              <a:rPr lang="ru-RU" dirty="0"/>
+              <a:t>Далее значение регистра </a:t>
+            </a:r>
+            <a:r>
+              <a:rPr lang="ru-RU" dirty="0" err="1"/>
+              <a:t>edi</a:t>
+            </a:r>
+            <a:r>
+              <a:rPr lang="ru-RU" dirty="0"/>
+              <a:t> сохраняется в память по адресу [rsp+12]. Это создаёт копию переменной x в стеке.</a:t>
+            </a:r>
+            <a:endParaRPr lang="en-US" dirty="0"/>
+          </a:p>
+          <a:p>
+            <a:endParaRPr lang="ru-RU" dirty="0"/>
+          </a:p>
+          <a:p>
+            <a:r>
+              <a:rPr lang="ru-RU" dirty="0"/>
+              <a:t>Это необходимо потому, что функция </a:t>
+            </a:r>
+            <a:r>
+              <a:rPr lang="ru-RU" dirty="0" err="1"/>
+              <a:t>printf</a:t>
+            </a:r>
+            <a:r>
+              <a:rPr lang="ru-RU" dirty="0"/>
+              <a:t> ожидает получить адрес переменной, а не просто её значение. Поскольку исходно x находится только в регистре, его приходится явно сохранить в память, чтобы затем можно было взять его адрес.</a:t>
+            </a:r>
+            <a:endParaRPr lang="en-US" dirty="0"/>
+          </a:p>
+          <a:p>
+            <a:endParaRPr lang="ru-RU" dirty="0"/>
+          </a:p>
+          <a:p>
+            <a:r>
+              <a:rPr lang="ru-RU" dirty="0"/>
+              <a:t>Инструкция </a:t>
+            </a:r>
+            <a:r>
+              <a:rPr lang="ru-RU" dirty="0" err="1"/>
+              <a:t>lea</a:t>
+            </a:r>
+            <a:r>
+              <a:rPr lang="ru-RU" dirty="0"/>
+              <a:t> </a:t>
+            </a:r>
+            <a:r>
+              <a:rPr lang="ru-RU" dirty="0" err="1"/>
+              <a:t>rsi</a:t>
+            </a:r>
+            <a:r>
+              <a:rPr lang="ru-RU" dirty="0"/>
+              <a:t>, [rsp+12] вычисляет адрес этой переменной и передаёт его в качестве второго аргумента функции </a:t>
+            </a:r>
+            <a:r>
+              <a:rPr lang="ru-RU" dirty="0" err="1"/>
+              <a:t>printf</a:t>
+            </a:r>
+            <a:r>
+              <a:rPr lang="ru-RU" dirty="0"/>
+              <a:t>.</a:t>
+            </a:r>
+          </a:p>
+          <a:p>
+            <a:r>
+              <a:rPr lang="ru-RU" dirty="0"/>
+              <a:t>В регистр </a:t>
+            </a:r>
+            <a:r>
+              <a:rPr lang="ru-RU" dirty="0" err="1"/>
+              <a:t>edi</a:t>
+            </a:r>
+            <a:r>
+              <a:rPr lang="ru-RU" dirty="0"/>
+              <a:t> загружается адрес строки формата, после чего выполняется вызов </a:t>
+            </a:r>
+            <a:r>
+              <a:rPr lang="ru-RU" dirty="0" err="1"/>
+              <a:t>printf</a:t>
+            </a:r>
+            <a:r>
+              <a:rPr lang="ru-RU" dirty="0"/>
+              <a:t>.</a:t>
+            </a:r>
+            <a:endParaRPr lang="en-US" dirty="0"/>
+          </a:p>
+          <a:p>
+            <a:endParaRPr lang="ru-RU" dirty="0"/>
+          </a:p>
+          <a:p>
+            <a:r>
+              <a:rPr lang="ru-RU" dirty="0"/>
+              <a:t>После возврата из </a:t>
+            </a:r>
+            <a:r>
+              <a:rPr lang="ru-RU" dirty="0" err="1"/>
+              <a:t>printf</a:t>
+            </a:r>
+            <a:r>
+              <a:rPr lang="ru-RU" dirty="0"/>
+              <a:t> выполняется инструкция </a:t>
+            </a:r>
+            <a:r>
+              <a:rPr lang="ru-RU" dirty="0" err="1"/>
+              <a:t>add</a:t>
+            </a:r>
+            <a:r>
+              <a:rPr lang="ru-RU" dirty="0"/>
+              <a:t> </a:t>
+            </a:r>
+            <a:r>
+              <a:rPr lang="ru-RU" dirty="0" err="1"/>
+              <a:t>rsp</a:t>
+            </a:r>
+            <a:r>
+              <a:rPr lang="ru-RU" dirty="0"/>
+              <a:t>, 24, которая освобождает ранее выделенное место в стеке и восстанавливает указатель стека.</a:t>
+            </a:r>
+            <a:endParaRPr lang="en-US" dirty="0"/>
+          </a:p>
+          <a:p>
+            <a:endParaRPr lang="ru-RU" dirty="0"/>
+          </a:p>
+          <a:p>
+            <a:r>
+              <a:rPr lang="ru-RU" dirty="0"/>
+              <a:t>Таким образом, мы видим, что даже для такой простой операции, как передача адреса переменной, компилятор вынужден явно управлять стеком, размещать данные в памяти и следить за соблюдением требований соглашения о вызовах.</a:t>
+            </a:r>
+          </a:p>
+          <a:p>
+            <a:endParaRPr lang="ru-RU" dirty="0"/>
+          </a:p>
+          <a:p>
+            <a:r>
+              <a:rPr lang="ru-RU" dirty="0"/>
+              <a:t>Затем выполняется </a:t>
+            </a:r>
+            <a:r>
+              <a:rPr lang="ru-RU" dirty="0" err="1"/>
+              <a:t>ret</a:t>
+            </a:r>
+            <a:r>
+              <a:rPr lang="ru-RU" dirty="0"/>
+              <a:t>. Эта инструкция извлекает из стека адрес возврата и передаёт управление обратно в функцию </a:t>
+            </a:r>
+            <a:r>
+              <a:rPr lang="ru-RU" dirty="0" err="1"/>
+              <a:t>main</a:t>
+            </a:r>
+            <a:r>
+              <a:rPr lang="ru-RU" dirty="0"/>
+              <a:t>.</a:t>
+            </a:r>
+            <a:endParaRPr lang="en-US" dirty="0"/>
+          </a:p>
+          <a:p>
+            <a:endParaRPr lang="ru-RU" dirty="0"/>
+          </a:p>
+          <a:p>
+            <a:r>
+              <a:rPr lang="ru-RU" dirty="0"/>
+              <a:t>Возвращаясь в </a:t>
+            </a:r>
+            <a:r>
+              <a:rPr lang="ru-RU" dirty="0" err="1"/>
+              <a:t>main</a:t>
+            </a:r>
+            <a:r>
+              <a:rPr lang="ru-RU" dirty="0"/>
+              <a:t>, выполняется инструкция </a:t>
+            </a:r>
+            <a:r>
+              <a:rPr lang="ru-RU" dirty="0" err="1"/>
+              <a:t>xor</a:t>
+            </a:r>
+            <a:r>
+              <a:rPr lang="ru-RU" dirty="0"/>
+              <a:t> </a:t>
+            </a:r>
+            <a:r>
+              <a:rPr lang="ru-RU" dirty="0" err="1"/>
+              <a:t>eax</a:t>
+            </a:r>
+            <a:r>
+              <a:rPr lang="ru-RU" dirty="0"/>
+              <a:t>, </a:t>
+            </a:r>
+            <a:r>
+              <a:rPr lang="ru-RU" dirty="0" err="1"/>
+              <a:t>eax</a:t>
+            </a:r>
+            <a:r>
+              <a:rPr lang="ru-RU" dirty="0"/>
+              <a:t>, которая подготавливает возвращаемое значение 0.</a:t>
+            </a:r>
+            <a:endParaRPr lang="en-US" dirty="0"/>
+          </a:p>
+          <a:p>
+            <a:endParaRPr lang="ru-RU" dirty="0"/>
+          </a:p>
+          <a:p>
+            <a:r>
+              <a:rPr lang="ru-RU" dirty="0"/>
+              <a:t>Затем выполняется инструкция </a:t>
+            </a:r>
+            <a:r>
+              <a:rPr lang="ru-RU" dirty="0" err="1"/>
+              <a:t>pop</a:t>
+            </a:r>
+            <a:r>
+              <a:rPr lang="ru-RU" dirty="0"/>
+              <a:t> </a:t>
+            </a:r>
+            <a:r>
+              <a:rPr lang="ru-RU" dirty="0" err="1"/>
+              <a:t>rdx</a:t>
+            </a:r>
+            <a:r>
+              <a:rPr lang="ru-RU" dirty="0"/>
+              <a:t>. Она симметрична ранее выполненному </a:t>
+            </a:r>
+            <a:r>
+              <a:rPr lang="ru-RU" dirty="0" err="1"/>
+              <a:t>push</a:t>
+            </a:r>
+            <a:r>
+              <a:rPr lang="ru-RU" dirty="0"/>
+              <a:t> и используется для восстановления указателя стека в исходное состояние. При этом конкретный регистр, в который извлекается значение, не имеет значения, так как само значение нам не нужно — важно лишь корректно сдвинуть указатель стека обратно.</a:t>
+            </a:r>
+          </a:p>
+          <a:p>
+            <a:r>
+              <a:rPr lang="ru-RU" dirty="0"/>
+              <a:t>Таким образом, инструкции </a:t>
+            </a:r>
+            <a:r>
+              <a:rPr lang="ru-RU" dirty="0" err="1"/>
+              <a:t>push</a:t>
+            </a:r>
+            <a:r>
+              <a:rPr lang="ru-RU" dirty="0"/>
+              <a:t> и </a:t>
+            </a:r>
+            <a:r>
+              <a:rPr lang="ru-RU" dirty="0" err="1"/>
+              <a:t>pop</a:t>
+            </a:r>
+            <a:r>
+              <a:rPr lang="ru-RU" dirty="0"/>
+              <a:t> в данном случае используются не для сохранения данных, а для соблюдения требований соглашения о вызовах и корректного выравнивания стека.</a:t>
+            </a:r>
+          </a:p>
+          <a:p>
+            <a:endParaRPr lang="ru-RU" dirty="0"/>
+          </a:p>
+          <a:p>
+            <a:r>
+              <a:rPr lang="ru-RU" dirty="0"/>
+              <a:t>И, наконец, инструкция </a:t>
+            </a:r>
+            <a:r>
+              <a:rPr lang="ru-RU" dirty="0" err="1"/>
+              <a:t>ret</a:t>
+            </a:r>
+            <a:r>
+              <a:rPr lang="ru-RU" dirty="0"/>
+              <a:t> завершает выполнение программы и возвращает управление операционной системе.</a:t>
+            </a:r>
+            <a:endParaRPr lang="en-US" dirty="0"/>
+          </a:p>
+          <a:p>
+            <a:endParaRPr lang="ru-RU" dirty="0"/>
+          </a:p>
+          <a:p>
+            <a:r>
+              <a:rPr lang="ru-RU" dirty="0"/>
+              <a:t>Таким образом, мы видим, что вызов функции на уровне ассемблера — это последовательность операций по передаче аргументов через регистры, работе со стеком и переходу по адресу, сохранённому в стеке.</a:t>
             </a:r>
           </a:p>
           <a:p>
@@ -1663,7 +1699,7 @@
           <a:p>
             <a:fld id="{87259E61-CD8F-4EDB-89B2-A2524EC5B40A}" type="slidenum">
               <a:rPr lang="en-US" smtClean="0"/>
-              <a:t>14</a:t>
+              <a:t>13</a:t>
             </a:fld>
             <a:endParaRPr lang="en-US"/>
           </a:p>
@@ -1672,7 +1708,7 @@
     </p:spTree>
     <p:extLst>
       <p:ext uri="{BB962C8B-B14F-4D97-AF65-F5344CB8AC3E}">
-        <p14:creationId xmlns:p14="http://schemas.microsoft.com/office/powerpoint/2010/main" val="4269750151"/>
+        <p14:creationId xmlns:p14="http://schemas.microsoft.com/office/powerpoint/2010/main" val="2445816648"/>
       </p:ext>
     </p:extLst>
   </p:cSld>
@@ -1728,8 +1764,9 @@
           <a:p>
             <a:r>
               <a:rPr lang="ru-RU" dirty="0"/>
-              <a:t>Время жизни объекта напрямую связано с тем, в какой области памяти он размещён.</a:t>
-            </a:r>
+              <a:t>До этого момента мы обсуждали, где находятся данные в памяти. Теперь важно понять, как долго они там находятся.</a:t>
+            </a:r>
+            <a:endParaRPr lang="en-US" dirty="0"/>
           </a:p>
           <a:p>
             <a:endParaRPr lang="ru-RU" dirty="0"/>
@@ -1737,7 +1774,7 @@
           <a:p>
             <a:r>
               <a:rPr lang="ru-RU" dirty="0"/>
-              <a:t>Локальные переменные логически относятся к стеку, так как их время жизни ограничено выполнением функции. Однако важно понимать, что физически они не всегда располагаются именно в памяти стека.</a:t>
+              <a:t>Любой объект в программе имеет время жизни. Это период, в течение которого объект существует и может быть корректно использован.</a:t>
             </a:r>
             <a:endParaRPr lang="en-US" dirty="0"/>
           </a:p>
@@ -1747,8 +1784,9 @@
           <a:p>
             <a:r>
               <a:rPr lang="ru-RU" dirty="0"/>
-              <a:t>Современные компиляторы могут размещать локальные переменные в регистрах процессора, если это возможно. Это делается для повышения производительности. Тем не менее, их время жизни по-прежнему определяется временем выполнения функции.</a:t>
-            </a:r>
+              <a:t>Объект создаётся, затем используется в программе, а после этого его время жизни заканчивается, и память может быть использована повторно.</a:t>
+            </a:r>
+            <a:endParaRPr lang="en-US" dirty="0"/>
           </a:p>
           <a:p>
             <a:endParaRPr lang="ru-RU" dirty="0"/>
@@ -1756,16 +1794,9 @@
           <a:p>
             <a:r>
               <a:rPr lang="ru-RU" dirty="0"/>
-              <a:t>Динамическая память размещается в куче. В этом случае время жизни объекта определяется программистом. Объект существует до тех пор, пока не будет явно освобождён с помощью функции </a:t>
-            </a:r>
-            <a:r>
-              <a:rPr lang="ru-RU" dirty="0" err="1"/>
-              <a:t>free</a:t>
-            </a:r>
-            <a:r>
-              <a:rPr lang="ru-RU" dirty="0"/>
-              <a:t>.</a:t>
-            </a:r>
+              <a:t>Ключевой момент заключается в том, что после завершения времени жизни объекта доступ к нему становится некорректным, даже если физически данные ещё остаются в памяти.</a:t>
+            </a:r>
+            <a:endParaRPr lang="en-US" dirty="0"/>
           </a:p>
           <a:p>
             <a:endParaRPr lang="ru-RU" dirty="0"/>
@@ -1773,33 +1804,7 @@
           <a:p>
             <a:r>
               <a:rPr lang="ru-RU" dirty="0"/>
-              <a:t>Глобальные и статические переменные размещаются в сегментах </a:t>
-            </a:r>
-            <a:r>
-              <a:rPr lang="ru-RU" dirty="0" err="1"/>
-              <a:t>data</a:t>
-            </a:r>
-            <a:r>
-              <a:rPr lang="ru-RU" dirty="0"/>
-              <a:t> и BSS. Их время жизни совпадает со временем работы всей программы.</a:t>
-            </a:r>
-          </a:p>
-          <a:p>
-            <a:endParaRPr lang="ru-RU" dirty="0"/>
-          </a:p>
-          <a:p>
-            <a:r>
-              <a:rPr lang="ru-RU" dirty="0"/>
-              <a:t>Очень важно понимать, что наличие адреса не означает, что объект всё ещё существует. Указатель может указывать на область памяти, в которой объект уже уничтожен.</a:t>
-            </a:r>
-          </a:p>
-          <a:p>
-            <a:endParaRPr lang="ru-RU" dirty="0"/>
-          </a:p>
-          <a:p>
-            <a:r>
-              <a:rPr lang="ru-RU" dirty="0"/>
-              <a:t>Именно это различие между адресом и временем жизни лежит в основе многих ошибок, таких как использование освобождённой памяти или возврат указателя на локальную переменную.</a:t>
+              <a:t>Это одна из наиболее распространённых причин ошибок в программах на языке C.</a:t>
             </a:r>
           </a:p>
           <a:p>
@@ -1824,7 +1829,7 @@
           <a:p>
             <a:fld id="{87259E61-CD8F-4EDB-89B2-A2524EC5B40A}" type="slidenum">
               <a:rPr lang="en-US" smtClean="0"/>
-              <a:t>15</a:t>
+              <a:t>14</a:t>
             </a:fld>
             <a:endParaRPr lang="en-US"/>
           </a:p>
@@ -1833,7 +1838,7 @@
     </p:spTree>
     <p:extLst>
       <p:ext uri="{BB962C8B-B14F-4D97-AF65-F5344CB8AC3E}">
-        <p14:creationId xmlns:p14="http://schemas.microsoft.com/office/powerpoint/2010/main" val="2622918678"/>
+        <p14:creationId xmlns:p14="http://schemas.microsoft.com/office/powerpoint/2010/main" val="4269750151"/>
       </p:ext>
     </p:extLst>
   </p:cSld>
@@ -1889,7 +1894,7 @@
           <a:p>
             <a:r>
               <a:rPr lang="ru-RU" dirty="0"/>
-              <a:t>Рассмотрим пример, который демонстрирует одну из классических ошибок, связанных с временем жизни объектов.</a:t>
+              <a:t>Время жизни объекта напрямую связано с тем, в какой области памяти он размещён.</a:t>
             </a:r>
           </a:p>
           <a:p>
@@ -1898,29 +1903,51 @@
           <a:p>
             <a:r>
               <a:rPr lang="ru-RU" dirty="0"/>
-              <a:t>Функция </a:t>
+              <a:t>Локальные переменные логически относятся к стеку, так как их время жизни ограничено выполнением функции. Однако важно понимать, что физически они не всегда располагаются именно в памяти стека.</a:t>
+            </a:r>
+            <a:endParaRPr lang="en-US" dirty="0"/>
+          </a:p>
+          <a:p>
+            <a:endParaRPr lang="ru-RU" dirty="0"/>
+          </a:p>
+          <a:p>
+            <a:r>
+              <a:rPr lang="ru-RU" dirty="0"/>
+              <a:t>Современные компиляторы могут размещать локальные переменные в регистрах процессора, если это возможно. Это делается для повышения производительности. Тем не менее, их время жизни по-прежнему определяется временем выполнения функции.</a:t>
+            </a:r>
+          </a:p>
+          <a:p>
+            <a:endParaRPr lang="ru-RU" dirty="0"/>
+          </a:p>
+          <a:p>
+            <a:r>
+              <a:rPr lang="ru-RU" dirty="0"/>
+              <a:t>Динамическая память размещается в куче. В этом случае время жизни объекта определяется программистом. Объект существует до тех пор, пока не будет явно освобождён с помощью функции </a:t>
             </a:r>
             <a:r>
               <a:rPr lang="ru-RU" dirty="0" err="1"/>
-              <a:t>get_ptr</a:t>
-            </a:r>
-            <a:r>
-              <a:rPr lang="ru-RU" dirty="0"/>
-              <a:t> создаёт локальную переменную x и возвращает указатель на неё. На первый взгляд это может выглядеть корректно, так как мы действительно возвращаем адрес переменной.</a:t>
-            </a:r>
-          </a:p>
-          <a:p>
-            <a:r>
-              <a:rPr lang="ru-RU" dirty="0"/>
-              <a:t>Однако переменная x размещена в стеке и её время жизни ограничено выполнением функции </a:t>
+              <a:t>free</a:t>
+            </a:r>
+            <a:r>
+              <a:rPr lang="ru-RU" dirty="0"/>
+              <a:t>.</a:t>
+            </a:r>
+          </a:p>
+          <a:p>
+            <a:endParaRPr lang="ru-RU" dirty="0"/>
+          </a:p>
+          <a:p>
+            <a:r>
+              <a:rPr lang="ru-RU" dirty="0"/>
+              <a:t>Глобальные и статические переменные размещаются в сегментах </a:t>
             </a:r>
             <a:r>
               <a:rPr lang="ru-RU" dirty="0" err="1"/>
-              <a:t>get_ptr</a:t>
-            </a:r>
-            <a:r>
-              <a:rPr lang="ru-RU" dirty="0"/>
-              <a:t>. Как только функция завершает работу, её стековый кадр удаляется, и переменная перестаёт существовать.</a:t>
+              <a:t>data</a:t>
+            </a:r>
+            <a:r>
+              <a:rPr lang="ru-RU" dirty="0"/>
+              <a:t> и BSS. Их время жизни совпадает со временем работы всей программы.</a:t>
             </a:r>
           </a:p>
           <a:p>
@@ -1929,59 +1956,7 @@
           <a:p>
             <a:r>
               <a:rPr lang="ru-RU" dirty="0"/>
-              <a:t>Тем не менее, возвращаемый указатель продолжает указывать на ту же область памяти. Такой указатель называется висячим, или </a:t>
-            </a:r>
-            <a:r>
-              <a:rPr lang="ru-RU" dirty="0" err="1"/>
-              <a:t>dangling</a:t>
-            </a:r>
-            <a:r>
-              <a:rPr lang="ru-RU" dirty="0"/>
-              <a:t> </a:t>
-            </a:r>
-            <a:r>
-              <a:rPr lang="ru-RU" dirty="0" err="1"/>
-              <a:t>pointer</a:t>
-            </a:r>
-            <a:r>
-              <a:rPr lang="ru-RU" dirty="0"/>
-              <a:t>.</a:t>
-            </a:r>
-          </a:p>
-          <a:p>
-            <a:r>
-              <a:rPr lang="ru-RU" dirty="0"/>
-              <a:t>В функции </a:t>
-            </a:r>
-            <a:r>
-              <a:rPr lang="ru-RU" dirty="0" err="1"/>
-              <a:t>main</a:t>
-            </a:r>
-            <a:r>
-              <a:rPr lang="ru-RU" dirty="0"/>
-              <a:t> мы пытаемся </a:t>
-            </a:r>
-            <a:r>
-              <a:rPr lang="ru-RU" dirty="0" err="1"/>
-              <a:t>разыменовать</a:t>
-            </a:r>
-            <a:r>
-              <a:rPr lang="ru-RU" dirty="0"/>
-              <a:t> этот указатель. С точки зрения языка C это является неопределённым поведением.</a:t>
-            </a:r>
-          </a:p>
-          <a:p>
-            <a:r>
-              <a:rPr lang="ru-RU" dirty="0"/>
-              <a:t>Это означает, что программа может вывести какое-то значение, может вывести мусор, может </a:t>
-            </a:r>
-            <a:r>
-              <a:rPr lang="ru-RU" dirty="0" err="1"/>
-              <a:t>аварийно</a:t>
-            </a:r>
-            <a:r>
-              <a:rPr lang="ru-RU" dirty="0"/>
-              <a:t> завершиться, а может, на первый взгляд, «работать правильно». Никаких гарантий стандарт языка не даёт.</a:t>
+              <a:t>Очень важно понимать, что наличие адреса не означает, что объект всё ещё существует. Указатель может указывать на область памяти, в которой объект уже уничтожен.</a:t>
             </a:r>
           </a:p>
           <a:p>
@@ -1990,16 +1965,7 @@
           <a:p>
             <a:r>
               <a:rPr lang="ru-RU" dirty="0"/>
-              <a:t>Причина в том, что мы обращаемся к объекту, время жизни которого уже завершилось. Несмотря на то, что данные физически могут оставаться в памяти, с точки зрения модели языка этот объект больше не существует.</a:t>
-            </a:r>
-          </a:p>
-          <a:p>
-            <a:endParaRPr lang="ru-RU" dirty="0"/>
-          </a:p>
-          <a:p>
-            <a:r>
-              <a:rPr lang="ru-RU" dirty="0"/>
-              <a:t>Это один из фундаментальных примеров, показывающих, почему необходимо учитывать время жизни объектов при работе с указателями.</a:t>
+              <a:t>Именно это различие между адресом и временем жизни лежит в основе многих ошибок, таких как использование освобождённой памяти или возврат указателя на локальную переменную.</a:t>
             </a:r>
           </a:p>
           <a:p>
@@ -2024,7 +1990,7 @@
           <a:p>
             <a:fld id="{87259E61-CD8F-4EDB-89B2-A2524EC5B40A}" type="slidenum">
               <a:rPr lang="en-US" smtClean="0"/>
-              <a:t>16</a:t>
+              <a:t>15</a:t>
             </a:fld>
             <a:endParaRPr lang="en-US"/>
           </a:p>
@@ -2033,7 +1999,7 @@
     </p:spTree>
     <p:extLst>
       <p:ext uri="{BB962C8B-B14F-4D97-AF65-F5344CB8AC3E}">
-        <p14:creationId xmlns:p14="http://schemas.microsoft.com/office/powerpoint/2010/main" val="3025644700"/>
+        <p14:creationId xmlns:p14="http://schemas.microsoft.com/office/powerpoint/2010/main" val="2622918678"/>
       </p:ext>
     </p:extLst>
   </p:cSld>
@@ -2089,9 +2055,8 @@
           <a:p>
             <a:r>
               <a:rPr lang="ru-RU" dirty="0"/>
-              <a:t>До этого момента мы рассматривали в основном объекты, время жизни которых ограничено выполнением функции или всей программы.</a:t>
-            </a:r>
-            <a:endParaRPr lang="en-US" dirty="0"/>
+              <a:t>Рассмотрим пример, который демонстрирует одну из классических ошибок, связанных с временем жизни объектов.</a:t>
+            </a:r>
           </a:p>
           <a:p>
             <a:endParaRPr lang="ru-RU" dirty="0"/>
@@ -2099,9 +2064,30 @@
           <a:p>
             <a:r>
               <a:rPr lang="ru-RU" dirty="0"/>
-              <a:t>Однако в реальных программах часто требуется создавать объекты, которые должны существовать дольше, чем текущий вызов функции. Для этого используется динамическая память, или куча.</a:t>
-            </a:r>
-            <a:endParaRPr lang="en-US" dirty="0"/>
+              <a:t>Функция </a:t>
+            </a:r>
+            <a:r>
+              <a:rPr lang="ru-RU" dirty="0" err="1"/>
+              <a:t>get_ptr</a:t>
+            </a:r>
+            <a:r>
+              <a:rPr lang="ru-RU" dirty="0"/>
+              <a:t> создаёт локальную переменную x и возвращает указатель на неё. На первый взгляд это может выглядеть корректно, так как мы действительно возвращаем адрес переменной.</a:t>
+            </a:r>
+          </a:p>
+          <a:p>
+            <a:r>
+              <a:rPr lang="ru-RU" dirty="0"/>
+              <a:t>Однако переменная x размещена в стеке и её время жизни ограничено выполнением функции </a:t>
+            </a:r>
+            <a:r>
+              <a:rPr lang="ru-RU" dirty="0" err="1"/>
+              <a:t>get_ptr</a:t>
+            </a:r>
+            <a:r>
+              <a:rPr lang="ru-RU" dirty="0"/>
+              <a:t>. Как только функция завершает работу, её стековый кадр удаляется, и переменная перестаёт существовать.</a:t>
+            </a:r>
           </a:p>
           <a:p>
             <a:endParaRPr lang="ru-RU" dirty="0"/>
@@ -2109,33 +2095,60 @@
           <a:p>
             <a:r>
               <a:rPr lang="ru-RU" dirty="0"/>
-              <a:t>Куча представляет собой область памяти, управление которой осуществляется вручную. Программист явно запрашивает память с помощью функций </a:t>
+              <a:t>Тем не менее, возвращаемый указатель продолжает указывать на ту же область памяти. Такой указатель называется висячим, или </a:t>
             </a:r>
             <a:r>
               <a:rPr lang="ru-RU" dirty="0" err="1"/>
-              <a:t>malloc</a:t>
-            </a:r>
-            <a:r>
-              <a:rPr lang="ru-RU" dirty="0"/>
-              <a:t> или </a:t>
+              <a:t>dangling</a:t>
+            </a:r>
+            <a:r>
+              <a:rPr lang="ru-RU" dirty="0"/>
+              <a:t> </a:t>
             </a:r>
             <a:r>
               <a:rPr lang="ru-RU" dirty="0" err="1"/>
-              <a:t>calloc</a:t>
-            </a:r>
-            <a:r>
-              <a:rPr lang="ru-RU" dirty="0"/>
-              <a:t> и так же явно освобождает её с помощью функции </a:t>
+              <a:t>pointer</a:t>
+            </a:r>
+            <a:r>
+              <a:rPr lang="ru-RU" dirty="0"/>
+              <a:t>.</a:t>
+            </a:r>
+          </a:p>
+          <a:p>
+            <a:r>
+              <a:rPr lang="ru-RU" dirty="0"/>
+              <a:t>В функции </a:t>
             </a:r>
             <a:r>
               <a:rPr lang="ru-RU" dirty="0" err="1"/>
-              <a:t>free</a:t>
-            </a:r>
-            <a:r>
-              <a:rPr lang="ru-RU" dirty="0"/>
-              <a:t>.</a:t>
-            </a:r>
-            <a:endParaRPr lang="en-US" dirty="0"/>
+              <a:t>main</a:t>
+            </a:r>
+            <a:r>
+              <a:rPr lang="ru-RU" dirty="0"/>
+              <a:t> мы пытаемся </a:t>
+            </a:r>
+            <a:r>
+              <a:rPr lang="ru-RU" dirty="0" err="1"/>
+              <a:t>разыменовать</a:t>
+            </a:r>
+            <a:r>
+              <a:rPr lang="ru-RU" dirty="0"/>
+              <a:t> этот указатель. С точки зрения языка C это является неопределённым поведением.</a:t>
+            </a:r>
+          </a:p>
+          <a:p>
+            <a:r>
+              <a:rPr lang="ru-RU" dirty="0"/>
+              <a:t>Это означает, что программа может вывести какое-то значение, может вывести мусор, может </a:t>
+            </a:r>
+            <a:r>
+              <a:rPr lang="ru-RU" dirty="0" err="1"/>
+              <a:t>аварийно</a:t>
+            </a:r>
+            <a:r>
+              <a:rPr lang="ru-RU" dirty="0"/>
+              <a:t> завершиться, а может, на первый взгляд, «работать правильно». Никаких гарантий стандарт языка не даёт.</a:t>
+            </a:r>
           </a:p>
           <a:p>
             <a:endParaRPr lang="ru-RU" dirty="0"/>
@@ -2143,13 +2156,16 @@
           <a:p>
             <a:r>
               <a:rPr lang="ru-RU" dirty="0"/>
-              <a:t>В отличие от стека, время жизни объектов в куче не привязано к области видимости или времени выполнения функции. Объект существует до тех пор, пока программист не освободит память.</a:t>
-            </a:r>
-          </a:p>
-          <a:p>
-            <a:r>
-              <a:rPr lang="ru-RU" dirty="0"/>
-              <a:t>Это даёт гибкость, но одновременно накладывает ответственность за корректное управление памятью.</a:t>
+              <a:t>Причина в том, что мы обращаемся к объекту, время жизни которого уже завершилось. Несмотря на то, что данные физически могут оставаться в памяти, с точки зрения модели языка этот объект больше не существует.</a:t>
+            </a:r>
+          </a:p>
+          <a:p>
+            <a:endParaRPr lang="ru-RU" dirty="0"/>
+          </a:p>
+          <a:p>
+            <a:r>
+              <a:rPr lang="ru-RU" dirty="0"/>
+              <a:t>Это один из фундаментальных примеров, показывающих, почему необходимо учитывать время жизни объектов при работе с указателями.</a:t>
             </a:r>
           </a:p>
           <a:p>
@@ -2174,7 +2190,7 @@
           <a:p>
             <a:fld id="{87259E61-CD8F-4EDB-89B2-A2524EC5B40A}" type="slidenum">
               <a:rPr lang="en-US" smtClean="0"/>
-              <a:t>17</a:t>
+              <a:t>16</a:t>
             </a:fld>
             <a:endParaRPr lang="en-US"/>
           </a:p>
@@ -2183,7 +2199,7 @@
     </p:spTree>
     <p:extLst>
       <p:ext uri="{BB962C8B-B14F-4D97-AF65-F5344CB8AC3E}">
-        <p14:creationId xmlns:p14="http://schemas.microsoft.com/office/powerpoint/2010/main" val="4069647413"/>
+        <p14:creationId xmlns:p14="http://schemas.microsoft.com/office/powerpoint/2010/main" val="3025644700"/>
       </p:ext>
     </p:extLst>
   </p:cSld>
@@ -2239,7 +2255,7 @@
           <a:p>
             <a:r>
               <a:rPr lang="ru-RU" dirty="0"/>
-              <a:t>Работа с динамической памятью связана с рядом типичных ошибок.</a:t>
+              <a:t>До этого момента мы рассматривали в основном объекты, время жизни которых ограничено выполнением функции или всей программы.</a:t>
             </a:r>
             <a:endParaRPr lang="en-US" dirty="0"/>
           </a:p>
@@ -2249,7 +2265,7 @@
           <a:p>
             <a:r>
               <a:rPr lang="ru-RU" dirty="0"/>
-              <a:t>Если программист выделяет память, но забывает её освободить, возникает утечка памяти. Со временем такие утечки могут привести к исчерпанию доступной памяти.</a:t>
+              <a:t>Однако в реальных программах часто требуется создавать объекты, которые должны существовать дольше, чем текущий вызов функции. Для этого используется динамическая память, или куча.</a:t>
             </a:r>
             <a:endParaRPr lang="en-US" dirty="0"/>
           </a:p>
@@ -2259,35 +2275,7 @@
           <a:p>
             <a:r>
               <a:rPr lang="ru-RU" dirty="0"/>
-              <a:t>Если память освобождена, но указатель на неё продолжает использоваться, возникает ошибка </a:t>
-            </a:r>
-            <a:r>
-              <a:rPr lang="ru-RU" dirty="0" err="1"/>
-              <a:t>use-after-free</a:t>
-            </a:r>
-            <a:r>
-              <a:rPr lang="ru-RU" dirty="0"/>
-              <a:t>. Это приводит к неопределённому поведению и может быть причиной серьёзных уязвимостей.</a:t>
-            </a:r>
-            <a:endParaRPr lang="en-US" dirty="0"/>
-          </a:p>
-          <a:p>
-            <a:endParaRPr lang="ru-RU" dirty="0"/>
-          </a:p>
-          <a:p>
-            <a:r>
-              <a:rPr lang="ru-RU" dirty="0"/>
-              <a:t>Освобождение одной и той же области памяти более одного раза также является ошибкой и может привести к повреждению внутреннего состояния менеджера памяти.</a:t>
-            </a:r>
-            <a:endParaRPr lang="en-US" dirty="0"/>
-          </a:p>
-          <a:p>
-            <a:endParaRPr lang="ru-RU" dirty="0"/>
-          </a:p>
-          <a:p>
-            <a:r>
-              <a:rPr lang="ru-RU" dirty="0"/>
-              <a:t>Кроме того, память, выделяемая с помощью </a:t>
+              <a:t>Куча представляет собой область памяти, управление которой осуществляется вручную. Программист явно запрашивает память с помощью функций </a:t>
             </a:r>
             <a:r>
               <a:rPr lang="ru-RU" dirty="0" err="1"/>
@@ -2295,7 +2283,23 @@
             </a:r>
             <a:r>
               <a:rPr lang="ru-RU" dirty="0"/>
-              <a:t>, не инициализируется, и её содержимое является неопределённым.</a:t>
+              <a:t> или </a:t>
+            </a:r>
+            <a:r>
+              <a:rPr lang="ru-RU" dirty="0" err="1"/>
+              <a:t>calloc</a:t>
+            </a:r>
+            <a:r>
+              <a:rPr lang="ru-RU" dirty="0"/>
+              <a:t> и так же явно освобождает её с помощью функции </a:t>
+            </a:r>
+            <a:r>
+              <a:rPr lang="ru-RU" dirty="0" err="1"/>
+              <a:t>free</a:t>
+            </a:r>
+            <a:r>
+              <a:rPr lang="ru-RU" dirty="0"/>
+              <a:t>.</a:t>
             </a:r>
             <a:endParaRPr lang="en-US" dirty="0"/>
           </a:p>
@@ -2305,17 +2309,13 @@
           <a:p>
             <a:r>
               <a:rPr lang="ru-RU" dirty="0"/>
-              <a:t>Важно понимать, что операции с кучей обычно медленнее, чем работа со стеком, так как требуют участия системы управления памятью.</a:t>
-            </a:r>
-            <a:endParaRPr lang="en-US" dirty="0"/>
-          </a:p>
-          <a:p>
-            <a:endParaRPr lang="ru-RU" dirty="0"/>
-          </a:p>
-          <a:p>
-            <a:r>
-              <a:rPr lang="ru-RU" dirty="0"/>
-              <a:t>Таким образом, использование динамической памяти требует аккуратности и дисциплины, но является необходимым инструментом при разработке сложных программ.</a:t>
+              <a:t>В отличие от стека, время жизни объектов в куче не привязано к области видимости или времени выполнения функции. Объект существует до тех пор, пока программист не освободит память.</a:t>
+            </a:r>
+          </a:p>
+          <a:p>
+            <a:r>
+              <a:rPr lang="ru-RU" dirty="0"/>
+              <a:t>Это даёт гибкость, но одновременно накладывает ответственность за корректное управление памятью.</a:t>
             </a:r>
           </a:p>
           <a:p>
@@ -2340,7 +2340,7 @@
           <a:p>
             <a:fld id="{87259E61-CD8F-4EDB-89B2-A2524EC5B40A}" type="slidenum">
               <a:rPr lang="en-US" smtClean="0"/>
-              <a:t>18</a:t>
+              <a:t>17</a:t>
             </a:fld>
             <a:endParaRPr lang="en-US"/>
           </a:p>
@@ -2349,7 +2349,7 @@
     </p:spTree>
     <p:extLst>
       <p:ext uri="{BB962C8B-B14F-4D97-AF65-F5344CB8AC3E}">
-        <p14:creationId xmlns:p14="http://schemas.microsoft.com/office/powerpoint/2010/main" val="2352778236"/>
+        <p14:creationId xmlns:p14="http://schemas.microsoft.com/office/powerpoint/2010/main" val="4069647413"/>
       </p:ext>
     </p:extLst>
   </p:cSld>
@@ -2405,8 +2405,9 @@
           <a:p>
             <a:r>
               <a:rPr lang="ru-RU" dirty="0"/>
-              <a:t>До этого момента мы рассматривали локальные переменные, которые создаются при входе в функцию и уничтожаются при выходе из неё.</a:t>
-            </a:r>
+              <a:t>Работа с динамической памятью связана с рядом типичных ошибок.</a:t>
+            </a:r>
+            <a:endParaRPr lang="en-US" dirty="0"/>
           </a:p>
           <a:p>
             <a:endParaRPr lang="ru-RU" dirty="0"/>
@@ -2414,8 +2415,9 @@
           <a:p>
             <a:r>
               <a:rPr lang="ru-RU" dirty="0"/>
-              <a:t>Теперь рассмотрим особый вид переменных — статические переменные функций.</a:t>
-            </a:r>
+              <a:t>Если программист выделяет память, но забывает её освободить, возникает утечка памяти. Со временем такие утечки могут привести к исчерпанию доступной памяти.</a:t>
+            </a:r>
+            <a:endParaRPr lang="en-US" dirty="0"/>
           </a:p>
           <a:p>
             <a:endParaRPr lang="ru-RU" dirty="0"/>
@@ -2423,22 +2425,17 @@
           <a:p>
             <a:r>
               <a:rPr lang="ru-RU" dirty="0"/>
-              <a:t>Такие переменные объявляются с использованием ключевого слова </a:t>
+              <a:t>Если память освобождена, но указатель на неё продолжает использоваться, возникает ошибка </a:t>
             </a:r>
             <a:r>
               <a:rPr lang="ru-RU" dirty="0" err="1"/>
-              <a:t>static</a:t>
-            </a:r>
-            <a:r>
-              <a:rPr lang="ru-RU" dirty="0"/>
-              <a:t> внутри функции. Несмотря на то, что они находятся внутри функции, они не размещаются в стеке.</a:t>
-            </a:r>
-          </a:p>
-          <a:p>
-            <a:r>
-              <a:rPr lang="ru-RU" dirty="0"/>
-              <a:t>Вместо этого они располагаются в сегменте данных программы, аналогично глобальным переменным.</a:t>
-            </a:r>
+              <a:t>use-after-free</a:t>
+            </a:r>
+            <a:r>
+              <a:rPr lang="ru-RU" dirty="0"/>
+              <a:t>. Это приводит к неопределённому поведению и может быть причиной серьёзных уязвимостей.</a:t>
+            </a:r>
+            <a:endParaRPr lang="en-US" dirty="0"/>
           </a:p>
           <a:p>
             <a:endParaRPr lang="ru-RU" dirty="0"/>
@@ -2446,8 +2443,9 @@
           <a:p>
             <a:r>
               <a:rPr lang="ru-RU" dirty="0"/>
-              <a:t>Статическая переменная создаётся один раз за всё время работы программы и не уничтожается при выходе из функции. Это означает, что она сохраняет своё значение между вызовами.</a:t>
-            </a:r>
+              <a:t>Освобождение одной и той же области памяти более одного раза также является ошибкой и может привести к повреждению внутреннего состояния менеджера памяти.</a:t>
+            </a:r>
+            <a:endParaRPr lang="en-US" dirty="0"/>
           </a:p>
           <a:p>
             <a:endParaRPr lang="ru-RU" dirty="0"/>
@@ -2455,8 +2453,17 @@
           <a:p>
             <a:r>
               <a:rPr lang="ru-RU" dirty="0"/>
-              <a:t>Кроме того, поскольку существует только один экземпляр такой переменной, её адрес остаётся постоянным независимо от того, сколько раз и откуда вызывается функция.</a:t>
-            </a:r>
+              <a:t>Кроме того, память, выделяемая с помощью </a:t>
+            </a:r>
+            <a:r>
+              <a:rPr lang="ru-RU" dirty="0" err="1"/>
+              <a:t>malloc</a:t>
+            </a:r>
+            <a:r>
+              <a:rPr lang="ru-RU" dirty="0"/>
+              <a:t>, не инициализируется, и её содержимое является неопределённым.</a:t>
+            </a:r>
+            <a:endParaRPr lang="en-US" dirty="0"/>
           </a:p>
           <a:p>
             <a:endParaRPr lang="ru-RU" dirty="0"/>
@@ -2464,7 +2471,17 @@
           <a:p>
             <a:r>
               <a:rPr lang="ru-RU" dirty="0"/>
-              <a:t>Таким образом, статические переменные позволяют хранить состояние между вызовами функции, при этом ограничивая область видимости этой переменной рамками самой функции.</a:t>
+              <a:t>Важно понимать, что операции с кучей обычно медленнее, чем работа со стеком, так как требуют участия системы управления памятью.</a:t>
+            </a:r>
+            <a:endParaRPr lang="en-US" dirty="0"/>
+          </a:p>
+          <a:p>
+            <a:endParaRPr lang="ru-RU" dirty="0"/>
+          </a:p>
+          <a:p>
+            <a:r>
+              <a:rPr lang="ru-RU" dirty="0"/>
+              <a:t>Таким образом, использование динамической памяти требует аккуратности и дисциплины, но является необходимым инструментом при разработке сложных программ.</a:t>
             </a:r>
           </a:p>
           <a:p>
@@ -2489,7 +2506,7 @@
           <a:p>
             <a:fld id="{87259E61-CD8F-4EDB-89B2-A2524EC5B40A}" type="slidenum">
               <a:rPr lang="en-US" smtClean="0"/>
-              <a:t>19</a:t>
+              <a:t>18</a:t>
             </a:fld>
             <a:endParaRPr lang="en-US"/>
           </a:p>
@@ -2498,7 +2515,7 @@
     </p:spTree>
     <p:extLst>
       <p:ext uri="{BB962C8B-B14F-4D97-AF65-F5344CB8AC3E}">
-        <p14:creationId xmlns:p14="http://schemas.microsoft.com/office/powerpoint/2010/main" val="1761008558"/>
+        <p14:creationId xmlns:p14="http://schemas.microsoft.com/office/powerpoint/2010/main" val="2352778236"/>
       </p:ext>
     </p:extLst>
   </p:cSld>
@@ -2554,7 +2571,7 @@
           <a:p>
             <a:r>
               <a:rPr lang="ru-RU" dirty="0"/>
-              <a:t>Рассмотрим пример, демонстрирующий поведение статической переменной внутри функции.</a:t>
+              <a:t>До этого момента мы рассматривали локальные переменные, которые создаются при входе в функцию и уничтожаются при выходе из неё.</a:t>
             </a:r>
           </a:p>
           <a:p>
@@ -2563,7 +2580,16 @@
           <a:p>
             <a:r>
               <a:rPr lang="ru-RU" dirty="0"/>
-              <a:t>В функции B объявлена переменная x с модификатором </a:t>
+              <a:t>Теперь рассмотрим особый вид переменных — статические переменные функций.</a:t>
+            </a:r>
+          </a:p>
+          <a:p>
+            <a:endParaRPr lang="ru-RU" dirty="0"/>
+          </a:p>
+          <a:p>
+            <a:r>
+              <a:rPr lang="ru-RU" dirty="0"/>
+              <a:t>Такие переменные объявляются с использованием ключевого слова </a:t>
             </a:r>
             <a:r>
               <a:rPr lang="ru-RU" dirty="0" err="1"/>
@@ -2571,7 +2597,13 @@
             </a:r>
             <a:r>
               <a:rPr lang="ru-RU" dirty="0"/>
-              <a:t> и начальным значением 0. При каждом вызове функции значение x увеличивается на единицу.</a:t>
+              <a:t> внутри функции. Несмотря на то, что они находятся внутри функции, они не размещаются в стеке.</a:t>
+            </a:r>
+          </a:p>
+          <a:p>
+            <a:r>
+              <a:rPr lang="ru-RU" dirty="0"/>
+              <a:t>Вместо этого они располагаются в сегменте данных программы, аналогично глобальным переменным.</a:t>
             </a:r>
           </a:p>
           <a:p>
@@ -2580,21 +2612,7 @@
           <a:p>
             <a:r>
               <a:rPr lang="ru-RU" dirty="0"/>
-              <a:t>Важно обратить внимание на результат работы программы. При первом вызове функции B из </a:t>
-            </a:r>
-            <a:r>
-              <a:rPr lang="ru-RU" dirty="0" err="1"/>
-              <a:t>main</a:t>
-            </a:r>
-            <a:r>
-              <a:rPr lang="ru-RU" dirty="0"/>
-              <a:t> переменная x принимает значение 1.</a:t>
-            </a:r>
-          </a:p>
-          <a:p>
-            <a:r>
-              <a:rPr lang="ru-RU" dirty="0"/>
-              <a:t>При следующем вызове, уже из функции A, значение становится равным 2. При третьем вызове — 3.</a:t>
+              <a:t>Статическая переменная создаётся один раз за всё время работы программы и не уничтожается при выходе из функции. Это означает, что она сохраняет своё значение между вызовами.</a:t>
             </a:r>
           </a:p>
           <a:p>
@@ -2603,7 +2621,7 @@
           <a:p>
             <a:r>
               <a:rPr lang="ru-RU" dirty="0"/>
-              <a:t>Это означает, что переменная x не создаётся заново при каждом вызове функции. Вместо этого используется один и тот же экземпляр переменной, который сохраняет своё значение между вызовами.</a:t>
+              <a:t>Кроме того, поскольку существует только один экземпляр такой переменной, её адрес остаётся постоянным независимо от того, сколько раз и откуда вызывается функция.</a:t>
             </a:r>
           </a:p>
           <a:p>
@@ -2612,26 +2630,7 @@
           <a:p>
             <a:r>
               <a:rPr lang="ru-RU" dirty="0"/>
-              <a:t>Также обратите внимание на адрес переменной x. Во всех трёх вызовах он совпадает. Это подтверждает, что переменная размещена в фиксированной области памяти и не зависит от текущего состояния стека.</a:t>
-            </a:r>
-          </a:p>
-          <a:p>
-            <a:endParaRPr lang="ru-RU" dirty="0"/>
-          </a:p>
-          <a:p>
-            <a:r>
-              <a:rPr lang="ru-RU" dirty="0"/>
-              <a:t>Таким образом, статическая переменная ведёт себя иначе, чем обычная локальная переменная. Она имеет область видимости внутри функции, но время жизни — на протяжении всей программы.</a:t>
-            </a:r>
-            <a:endParaRPr lang="en-US" dirty="0"/>
-          </a:p>
-          <a:p>
-            <a:endParaRPr lang="ru-RU" dirty="0"/>
-          </a:p>
-          <a:p>
-            <a:r>
-              <a:rPr lang="ru-RU" dirty="0"/>
-              <a:t>Этот пример хорошо иллюстрирует различие между временем жизни объекта и его областью видимости.</a:t>
+              <a:t>Таким образом, статические переменные позволяют хранить состояние между вызовами функции, при этом ограничивая область видимости этой переменной рамками самой функции.</a:t>
             </a:r>
           </a:p>
           <a:p>
@@ -2656,7 +2655,7 @@
           <a:p>
             <a:fld id="{87259E61-CD8F-4EDB-89B2-A2524EC5B40A}" type="slidenum">
               <a:rPr lang="en-US" smtClean="0"/>
-              <a:t>20</a:t>
+              <a:t>19</a:t>
             </a:fld>
             <a:endParaRPr lang="en-US"/>
           </a:p>
@@ -2665,7 +2664,7 @@
     </p:spTree>
     <p:extLst>
       <p:ext uri="{BB962C8B-B14F-4D97-AF65-F5344CB8AC3E}">
-        <p14:creationId xmlns:p14="http://schemas.microsoft.com/office/powerpoint/2010/main" val="98596537"/>
+        <p14:creationId xmlns:p14="http://schemas.microsoft.com/office/powerpoint/2010/main" val="1761008558"/>
       </p:ext>
     </p:extLst>
   </p:cSld>
@@ -2721,7 +2720,7 @@
           <a:p>
             <a:r>
               <a:rPr lang="ru-RU" dirty="0"/>
-              <a:t>До этого момента мы уже сталкивались с адресами в памяти. Мы выводили адреса переменных, работали с указателями и даже смотрели дампы памяти.</a:t>
+              <a:t>Процессор представляет собой устройство, которое непрерывно взаимодействует с памятью. Он извлекает из памяти инструкции программы и обрабатывает данные, которые в этой памяти находятся.</a:t>
             </a:r>
           </a:p>
           <a:p>
@@ -2730,7 +2729,7 @@
           <a:p>
             <a:r>
               <a:rPr lang="ru-RU" dirty="0"/>
-              <a:t>Однако, как правило, мы воспринимали адрес просто как некоторое число, не придавая ему особого смысла. Адреса казались абстрактными значениями, которые используются для доступа к данным, но не несут дополнительной информации.</a:t>
+              <a:t>Таким образом, память является не просто хранилищем, а ключевым элементом выполнения программы. В ней одновременно располагаются как код программы, так и данные, с которыми этот код работает.</a:t>
             </a:r>
           </a:p>
           <a:p>
@@ -2739,15 +2738,13 @@
           <a:p>
             <a:r>
               <a:rPr lang="ru-RU" dirty="0"/>
-              <a:t>На самом деле это не так. В современных операционных системах память программы организована строго определённым образом.</a:t>
-            </a:r>
-            <a:r>
-              <a:rPr lang="en-US" dirty="0"/>
-              <a:t>  </a:t>
-            </a:r>
-            <a:r>
-              <a:rPr lang="ru-RU" dirty="0"/>
-              <a:t>Адрес в памяти указывает не просто на произвольный байт, а на конкретную область памяти с определённым назначением.</a:t>
+              <a:t>При этом память не является хаотичным набором байтов. Она организована определённым образом. Различные области памяти используются для разных целей, и каждая из них играет свою роль в процессе выполнения программы.</a:t>
+            </a:r>
+          </a:p>
+          <a:p>
+            <a:r>
+              <a:rPr lang="ru-RU" dirty="0"/>
+              <a:t>Способ организации памяти определяется как архитектурой процессора, так и операционной системой. Именно они задают правила размещения кода, данных, стека и динамической памяти.</a:t>
             </a:r>
           </a:p>
           <a:p>
@@ -2756,7 +2753,7 @@
           <a:p>
             <a:r>
               <a:rPr lang="ru-RU" dirty="0"/>
-              <a:t>Чтобы понимать, как выполняется программа, необходимо понимать, как устроено адресное пространство процесса.</a:t>
+              <a:t>В рамках этой лекции мы подробно рассмотрим, как устроена память программы и как в ней размещаются различные объекты.</a:t>
             </a:r>
           </a:p>
           <a:p>
@@ -2765,8 +2762,9 @@
           <a:p>
             <a:r>
               <a:rPr lang="ru-RU" dirty="0"/>
-              <a:t>В современных операционных системах процесс получает собственное адресное пространство, которое разбито на несколько областей.</a:t>
-            </a:r>
+              <a:t>Кроме того, важно понимать, что память неоднородна с точки зрения производительности. Разные уровни памяти имеют различную скорость доступа, и это напрямую влияет на время выполнения программы.</a:t>
+            </a:r>
+            <a:endParaRPr lang="en-US" dirty="0"/>
           </a:p>
           <a:p>
             <a:endParaRPr lang="ru-RU" dirty="0"/>
@@ -2774,140 +2772,7 @@
           <a:p>
             <a:r>
               <a:rPr lang="ru-RU" dirty="0"/>
-              <a:t>В нижней части располагается сегмент кода, или </a:t>
-            </a:r>
-            <a:r>
-              <a:rPr lang="ru-RU" dirty="0" err="1"/>
-              <a:t>text</a:t>
-            </a:r>
-            <a:r>
-              <a:rPr lang="ru-RU" dirty="0"/>
-              <a:t> </a:t>
-            </a:r>
-            <a:r>
-              <a:rPr lang="ru-RU" dirty="0" err="1"/>
-              <a:t>segment</a:t>
-            </a:r>
-            <a:r>
-              <a:rPr lang="ru-RU" dirty="0"/>
-              <a:t>. Здесь хранится исполняемый код программы.</a:t>
-            </a:r>
-          </a:p>
-          <a:p>
-            <a:r>
-              <a:rPr lang="ru-RU" dirty="0"/>
-              <a:t>Выше находятся сегменты данных. В сегменте </a:t>
-            </a:r>
-            <a:r>
-              <a:rPr lang="ru-RU" dirty="0" err="1"/>
-              <a:t>data</a:t>
-            </a:r>
-            <a:r>
-              <a:rPr lang="ru-RU" dirty="0"/>
-              <a:t> размещаются инициализированные глобальные и статические переменные. В сегменте BSS — неинициализированные.</a:t>
-            </a:r>
-          </a:p>
-          <a:p>
-            <a:endParaRPr lang="ru-RU" dirty="0"/>
-          </a:p>
-          <a:p>
-            <a:r>
-              <a:rPr lang="ru-RU" dirty="0"/>
-              <a:t>Такое расположение не случайно. В исполняемом файле программы уже содержатся машинный код и инициализированные глобальные переменные, поэтому при загрузке программы в память операционной системе удобно размещать их рядом.</a:t>
-            </a:r>
-          </a:p>
-          <a:p>
-            <a:endParaRPr lang="ru-RU" dirty="0"/>
-          </a:p>
-          <a:p>
-            <a:r>
-              <a:rPr lang="ru-RU" dirty="0"/>
-              <a:t>На практике область данных часто дополнительно разделяется на части с разными правами доступа. В </a:t>
-            </a:r>
-            <a:r>
-              <a:rPr lang="ru-RU" dirty="0" err="1"/>
-              <a:t>read-only</a:t>
-            </a:r>
-            <a:r>
-              <a:rPr lang="ru-RU" dirty="0"/>
-              <a:t> области располагаются константы, а в </a:t>
-            </a:r>
-            <a:r>
-              <a:rPr lang="ru-RU" dirty="0" err="1"/>
-              <a:t>read</a:t>
-            </a:r>
-            <a:r>
-              <a:rPr lang="ru-RU" dirty="0"/>
-              <a:t>/</a:t>
-            </a:r>
-            <a:r>
-              <a:rPr lang="ru-RU" dirty="0" err="1"/>
-              <a:t>write</a:t>
-            </a:r>
-            <a:r>
-              <a:rPr lang="ru-RU" dirty="0"/>
-              <a:t> — обычные глобальные переменные, которые могут изменяться во время выполнения программы.</a:t>
-            </a:r>
-          </a:p>
-          <a:p>
-            <a:endParaRPr lang="ru-RU" dirty="0"/>
-          </a:p>
-          <a:p>
-            <a:r>
-              <a:rPr lang="ru-RU" dirty="0"/>
-              <a:t>Кроме того, операционная система обычно защищает область кода и область неизменяемых данных от модификации. Это означает, что программа не может случайно или намеренно изменить собственный код или константы, что обеспечивает дополнительный уровень безопасности.</a:t>
-            </a:r>
-          </a:p>
-          <a:p>
-            <a:endParaRPr lang="ru-RU" dirty="0"/>
-          </a:p>
-          <a:p>
-            <a:r>
-              <a:rPr lang="ru-RU" dirty="0"/>
-              <a:t>Далее располагается куча, или </a:t>
-            </a:r>
-            <a:r>
-              <a:rPr lang="ru-RU" dirty="0" err="1"/>
-              <a:t>heap</a:t>
-            </a:r>
-            <a:r>
-              <a:rPr lang="ru-RU" dirty="0"/>
-              <a:t>. Эта область используется для динамического выделения памяти во время выполнения программы.</a:t>
-            </a:r>
-          </a:p>
-          <a:p>
-            <a:endParaRPr lang="ru-RU" dirty="0"/>
-          </a:p>
-          <a:p>
-            <a:r>
-              <a:rPr lang="ru-RU" dirty="0"/>
-              <a:t>В верхней части находится стек, или </a:t>
-            </a:r>
-            <a:r>
-              <a:rPr lang="ru-RU" dirty="0" err="1"/>
-              <a:t>stack</a:t>
-            </a:r>
-            <a:r>
-              <a:rPr lang="ru-RU" dirty="0"/>
-              <a:t>. Он используется для хранения информации о вызовах функций, локальных переменных и параметров.</a:t>
-            </a:r>
-          </a:p>
-          <a:p>
-            <a:endParaRPr lang="ru-RU" dirty="0"/>
-          </a:p>
-          <a:p>
-            <a:r>
-              <a:rPr lang="ru-RU" dirty="0"/>
-              <a:t>Важно понимать, что это не просто абстрактная схема. Именно так программа существует в памяти во время выполнения.</a:t>
-            </a:r>
-          </a:p>
-          <a:p>
-            <a:endParaRPr lang="ru-RU" dirty="0"/>
-          </a:p>
-          <a:p>
-            <a:r>
-              <a:rPr lang="ru-RU" dirty="0"/>
-              <a:t>Дальнейшее изучение стека, кучи и вызовов функций будет опираться на это представление.</a:t>
+              <a:t>Понимание этих принципов позволяет глубже осознать, как именно работает программа на уровне выполнения и взаимодействия с аппаратным обеспечением.</a:t>
             </a:r>
           </a:p>
           <a:p>
@@ -2932,7 +2797,7 @@
           <a:p>
             <a:fld id="{87259E61-CD8F-4EDB-89B2-A2524EC5B40A}" type="slidenum">
               <a:rPr lang="en-US" smtClean="0"/>
-              <a:t>3</a:t>
+              <a:t>2</a:t>
             </a:fld>
             <a:endParaRPr lang="en-US"/>
           </a:p>
@@ -2941,7 +2806,7 @@
     </p:spTree>
     <p:extLst>
       <p:ext uri="{BB962C8B-B14F-4D97-AF65-F5344CB8AC3E}">
-        <p14:creationId xmlns:p14="http://schemas.microsoft.com/office/powerpoint/2010/main" val="3790410141"/>
+        <p14:creationId xmlns:p14="http://schemas.microsoft.com/office/powerpoint/2010/main" val="1850448865"/>
       </p:ext>
     </p:extLst>
   </p:cSld>
@@ -2997,7 +2862,7 @@
           <a:p>
             <a:r>
               <a:rPr lang="ru-RU" dirty="0"/>
-              <a:t>Рассмотрим результат работы этой программы и попробуем его проанализировать.</a:t>
+              <a:t>Рассмотрим пример, демонстрирующий поведение статической переменной внутри функции.</a:t>
             </a:r>
           </a:p>
           <a:p>
@@ -3006,7 +2871,15 @@
           <a:p>
             <a:r>
               <a:rPr lang="ru-RU" dirty="0"/>
-              <a:t>На первый взгляд может показаться, что переменные, объявленные рядом в исходном коде, должны располагаться в памяти также рядом. Однако на практике это не так.</a:t>
+              <a:t>В функции B объявлена переменная x с модификатором </a:t>
+            </a:r>
+            <a:r>
+              <a:rPr lang="ru-RU" dirty="0" err="1"/>
+              <a:t>static</a:t>
+            </a:r>
+            <a:r>
+              <a:rPr lang="ru-RU" dirty="0"/>
+              <a:t> и начальным значением 0. При каждом вызове функции значение x увеличивается на единицу.</a:t>
             </a:r>
           </a:p>
           <a:p>
@@ -3015,76 +2888,7 @@
           <a:p>
             <a:r>
               <a:rPr lang="ru-RU" dirty="0"/>
-              <a:t>Глобальные переменные могут находиться на значительном расстоянии друг от друга. Это связано с тем, что они размещаются не просто «в порядке объявления», а в разных сегментах памяти. Например, неинициализированные переменные попадают в сегмент BSS, инициализированные — в сегмент </a:t>
-            </a:r>
-            <a:r>
-              <a:rPr lang="ru-RU" dirty="0" err="1"/>
-              <a:t>data</a:t>
-            </a:r>
-            <a:r>
-              <a:rPr lang="ru-RU" dirty="0"/>
-              <a:t>, а константы — в область только для чтения.</a:t>
-            </a:r>
-          </a:p>
-          <a:p>
-            <a:endParaRPr lang="ru-RU" dirty="0"/>
-          </a:p>
-          <a:p>
-            <a:r>
-              <a:rPr lang="ru-RU" dirty="0"/>
-              <a:t>Эти сегменты могут быть разнесены в адресном пространстве процесса, выровнены по границам страниц памяти и организованы в соответствии с требованиями загрузчика и операционной системы. Поэтому даже переменные, стоящие рядом в коде, могут оказаться далеко друг от друга в памяти.</a:t>
-            </a:r>
-          </a:p>
-          <a:p>
-            <a:endParaRPr lang="ru-RU" dirty="0"/>
-          </a:p>
-          <a:p>
-            <a:r>
-              <a:rPr lang="ru-RU" dirty="0"/>
-              <a:t>Теперь обратим внимание на адреса локальных переменных и объектов в куче. Если запустить программу несколько раз, можно заметить, что эти адреса меняются.</a:t>
-            </a:r>
-          </a:p>
-          <a:p>
-            <a:r>
-              <a:rPr lang="ru-RU" dirty="0"/>
-              <a:t>Для стека это связано с механизмом ASLR — Address Space </a:t>
-            </a:r>
-            <a:r>
-              <a:rPr lang="ru-RU" dirty="0" err="1"/>
-              <a:t>Layout</a:t>
-            </a:r>
-            <a:r>
-              <a:rPr lang="ru-RU" dirty="0"/>
-              <a:t> </a:t>
-            </a:r>
-            <a:r>
-              <a:rPr lang="ru-RU" dirty="0" err="1"/>
-              <a:t>Randomization</a:t>
-            </a:r>
-            <a:r>
-              <a:rPr lang="ru-RU" dirty="0"/>
-              <a:t>. Это технология, используемая операционной системой для повышения безопасности. При каждом запуске программы расположение основных областей памяти, таких как стек, куча и сегменты данных, случайным образом смещается.</a:t>
-            </a:r>
-          </a:p>
-          <a:p>
-            <a:r>
-              <a:rPr lang="ru-RU" dirty="0"/>
-              <a:t>Это делает более сложной эксплуатацию уязвимостей, поскольку злоумышленник не может заранее знать точные адреса в памяти.</a:t>
-            </a:r>
-          </a:p>
-          <a:p>
-            <a:endParaRPr lang="ru-RU" dirty="0"/>
-          </a:p>
-          <a:p>
-            <a:r>
-              <a:rPr lang="ru-RU" dirty="0"/>
-              <a:t>Куча также подвержена влиянию ASLR, однако на её расположение влияет не только это. Во время запуска программы и её инициализации могут выполняться различные действия, включая вызовы функций стандартной библиотеки и других подключённых библиотек.</a:t>
-            </a:r>
-          </a:p>
-          <a:p>
-            <a:r>
-              <a:rPr lang="ru-RU" dirty="0"/>
-              <a:t>Эти компоненты могут выделять память ещё до входа в функцию </a:t>
+              <a:t>Важно обратить внимание на результат работы программы. При первом вызове функции B из </a:t>
             </a:r>
             <a:r>
               <a:rPr lang="ru-RU" dirty="0" err="1"/>
@@ -3092,29 +2896,13 @@
             </a:r>
             <a:r>
               <a:rPr lang="ru-RU" dirty="0"/>
-              <a:t>. Кроме того, менеджер памяти внутри </a:t>
-            </a:r>
-            <a:r>
-              <a:rPr lang="ru-RU" dirty="0" err="1"/>
-              <a:t>runtime</a:t>
-            </a:r>
-            <a:r>
-              <a:rPr lang="ru-RU" dirty="0"/>
-              <a:t>-библиотеки может принимать разные решения о размещении блоков памяти в зависимости от текущего состояния кучи.</a:t>
-            </a:r>
-          </a:p>
-          <a:p>
-            <a:r>
-              <a:rPr lang="ru-RU" dirty="0"/>
-              <a:t>В результате адреса, возвращаемые </a:t>
-            </a:r>
-            <a:r>
-              <a:rPr lang="ru-RU" dirty="0" err="1"/>
-              <a:t>malloc</a:t>
-            </a:r>
-            <a:r>
-              <a:rPr lang="ru-RU" dirty="0"/>
-              <a:t>, могут отличаться от запуска к запуску даже для одной и той же программы.</a:t>
+              <a:t> переменная x принимает значение 1.</a:t>
+            </a:r>
+          </a:p>
+          <a:p>
+            <a:r>
+              <a:rPr lang="ru-RU" dirty="0"/>
+              <a:t>При следующем вызове, уже из функции A, значение становится равным 2. При третьем вызове — 3.</a:t>
             </a:r>
           </a:p>
           <a:p>
@@ -3123,7 +2911,35 @@
           <a:p>
             <a:r>
               <a:rPr lang="ru-RU" dirty="0"/>
-              <a:t>Таким образом, расположение объектов в памяти определяется не только исходным кодом, но и механизмами операционной системы, загрузчика и библиотек времени выполнения.</a:t>
+              <a:t>Это означает, что переменная x не создаётся заново при каждом вызове функции. Вместо этого используется один и тот же экземпляр переменной, который сохраняет своё значение между вызовами.</a:t>
+            </a:r>
+          </a:p>
+          <a:p>
+            <a:endParaRPr lang="ru-RU" dirty="0"/>
+          </a:p>
+          <a:p>
+            <a:r>
+              <a:rPr lang="ru-RU" dirty="0"/>
+              <a:t>Также обратите внимание на адрес переменной x. Во всех трёх вызовах он совпадает. Это подтверждает, что переменная размещена в фиксированной области памяти и не зависит от текущего состояния стека.</a:t>
+            </a:r>
+          </a:p>
+          <a:p>
+            <a:endParaRPr lang="ru-RU" dirty="0"/>
+          </a:p>
+          <a:p>
+            <a:r>
+              <a:rPr lang="ru-RU" dirty="0"/>
+              <a:t>Таким образом, статическая переменная ведёт себя иначе, чем обычная локальная переменная. Она имеет область видимости внутри функции, но время жизни — на протяжении всей программы.</a:t>
+            </a:r>
+            <a:endParaRPr lang="en-US" dirty="0"/>
+          </a:p>
+          <a:p>
+            <a:endParaRPr lang="ru-RU" dirty="0"/>
+          </a:p>
+          <a:p>
+            <a:r>
+              <a:rPr lang="ru-RU" dirty="0"/>
+              <a:t>Этот пример хорошо иллюстрирует различие между временем жизни объекта и его областью видимости.</a:t>
             </a:r>
           </a:p>
           <a:p>
@@ -3148,7 +2964,7 @@
           <a:p>
             <a:fld id="{87259E61-CD8F-4EDB-89B2-A2524EC5B40A}" type="slidenum">
               <a:rPr lang="en-US" smtClean="0"/>
-              <a:t>21</a:t>
+              <a:t>20</a:t>
             </a:fld>
             <a:endParaRPr lang="en-US"/>
           </a:p>
@@ -3157,7 +2973,7 @@
     </p:spTree>
     <p:extLst>
       <p:ext uri="{BB962C8B-B14F-4D97-AF65-F5344CB8AC3E}">
-        <p14:creationId xmlns:p14="http://schemas.microsoft.com/office/powerpoint/2010/main" val="3076627225"/>
+        <p14:creationId xmlns:p14="http://schemas.microsoft.com/office/powerpoint/2010/main" val="98596537"/>
       </p:ext>
     </p:extLst>
   </p:cSld>
@@ -3213,114 +3029,137 @@
           <a:p>
             <a:r>
               <a:rPr lang="ru-RU" dirty="0"/>
-              <a:t>Современные процессоры работают значительно быстрее, чем оперативная память. Разница в скорости может составлять десятки и даже сотни раз.</a:t>
-            </a:r>
+              <a:t>Рассмотрим результат работы этой программы и попробуем его проанализировать.</a:t>
+            </a:r>
+          </a:p>
+          <a:p>
+            <a:endParaRPr lang="ru-RU" dirty="0"/>
+          </a:p>
+          <a:p>
+            <a:r>
+              <a:rPr lang="ru-RU" dirty="0"/>
+              <a:t>На первый взгляд может показаться, что переменные, объявленные рядом в исходном коде, должны располагаться в памяти также рядом. Однако на практике это не так.</a:t>
+            </a:r>
+          </a:p>
+          <a:p>
+            <a:endParaRPr lang="ru-RU" dirty="0"/>
+          </a:p>
+          <a:p>
+            <a:r>
+              <a:rPr lang="ru-RU" dirty="0"/>
+              <a:t>Глобальные переменные могут находиться на значительном расстоянии друг от друга. Это связано с тем, что они размещаются не просто «в порядке объявления», а в разных сегментах памяти. Например, неинициализированные переменные попадают в сегмент BSS, инициализированные — в сегмент </a:t>
+            </a:r>
+            <a:r>
+              <a:rPr lang="ru-RU" dirty="0" err="1"/>
+              <a:t>data</a:t>
+            </a:r>
+            <a:r>
+              <a:rPr lang="ru-RU" dirty="0"/>
+              <a:t>, а константы — в область только для чтения.</a:t>
+            </a:r>
+          </a:p>
+          <a:p>
+            <a:endParaRPr lang="ru-RU" dirty="0"/>
+          </a:p>
+          <a:p>
+            <a:r>
+              <a:rPr lang="ru-RU" dirty="0"/>
+              <a:t>Эти сегменты могут быть разнесены в адресном пространстве процесса, выровнены по границам страниц памяти и организованы в соответствии с требованиями загрузчика и операционной системы. Поэтому даже переменные, стоящие рядом в коде, могут оказаться далеко друг от друга в памяти.</a:t>
+            </a:r>
+          </a:p>
+          <a:p>
+            <a:endParaRPr lang="ru-RU" dirty="0"/>
+          </a:p>
+          <a:p>
+            <a:r>
+              <a:rPr lang="ru-RU" dirty="0"/>
+              <a:t>Теперь обратим внимание на адреса локальных переменных и объектов в куче. Если запустить программу несколько раз, можно заметить, что эти адреса меняются.</a:t>
+            </a:r>
+          </a:p>
+          <a:p>
+            <a:r>
+              <a:rPr lang="ru-RU" dirty="0"/>
+              <a:t>Для стека это связано с механизмом ASLR — Address Space </a:t>
+            </a:r>
+            <a:r>
+              <a:rPr lang="ru-RU" dirty="0" err="1"/>
+              <a:t>Layout</a:t>
+            </a:r>
+            <a:r>
+              <a:rPr lang="ru-RU" dirty="0"/>
+              <a:t> </a:t>
+            </a:r>
+            <a:r>
+              <a:rPr lang="ru-RU" dirty="0" err="1"/>
+              <a:t>Randomization</a:t>
+            </a:r>
+            <a:r>
+              <a:rPr lang="ru-RU" dirty="0"/>
+              <a:t>. Это технология, используемая операционной системой для повышения безопасности. При каждом запуске программы расположение основных областей памяти, таких как стек, куча и сегменты данных, случайным образом смещается.</a:t>
+            </a:r>
+          </a:p>
+          <a:p>
+            <a:r>
+              <a:rPr lang="ru-RU" dirty="0"/>
+              <a:t>Это делает более сложной эксплуатацию уязвимостей, поскольку злоумышленник не может заранее знать точные адреса в памяти.</a:t>
+            </a:r>
+          </a:p>
+          <a:p>
+            <a:endParaRPr lang="ru-RU" dirty="0"/>
+          </a:p>
+          <a:p>
+            <a:r>
+              <a:rPr lang="ru-RU" dirty="0"/>
+              <a:t>Куча также подвержена влиянию ASLR, однако на её расположение влияет не только это. Во время запуска программы и её инициализации могут выполняться различные действия, включая вызовы функций стандартной библиотеки и других подключённых библиотек.</a:t>
+            </a:r>
+          </a:p>
+          <a:p>
+            <a:r>
+              <a:rPr lang="ru-RU" dirty="0"/>
+              <a:t>Эти компоненты могут выделять память ещё до входа в функцию </a:t>
+            </a:r>
+            <a:r>
+              <a:rPr lang="ru-RU" dirty="0" err="1"/>
+              <a:t>main</a:t>
+            </a:r>
+            <a:r>
+              <a:rPr lang="ru-RU" dirty="0"/>
+              <a:t>. Кроме того, менеджер памяти внутри </a:t>
+            </a:r>
+            <a:r>
+              <a:rPr lang="ru-RU" dirty="0" err="1"/>
+              <a:t>runtime</a:t>
+            </a:r>
+            <a:r>
+              <a:rPr lang="ru-RU" dirty="0"/>
+              <a:t>-библиотеки может принимать разные решения о размещении блоков памяти в зависимости от текущего состояния кучи.</a:t>
+            </a:r>
+          </a:p>
+          <a:p>
+            <a:r>
+              <a:rPr lang="ru-RU" dirty="0"/>
+              <a:t>В результате адреса, возвращаемые </a:t>
+            </a:r>
+            <a:r>
+              <a:rPr lang="ru-RU" dirty="0" err="1"/>
+              <a:t>malloc</a:t>
+            </a:r>
+            <a:r>
+              <a:rPr lang="ru-RU" dirty="0"/>
+              <a:t>, могут отличаться от запуска к запуску даже для одной и той же программы.</a:t>
+            </a:r>
+          </a:p>
+          <a:p>
+            <a:endParaRPr lang="ru-RU" dirty="0"/>
+          </a:p>
+          <a:p>
+            <a:r>
+              <a:rPr lang="ru-RU" dirty="0"/>
+              <a:t>Таким образом, расположение объектов в памяти определяется не только исходным кодом, но и механизмами операционной системы, загрузчика и библиотек времени выполнения.</a:t>
+            </a:r>
+          </a:p>
+          <a:p>
             <a:endParaRPr lang="en-US" dirty="0"/>
-          </a:p>
-          <a:p>
-            <a:endParaRPr lang="ru-RU" dirty="0"/>
-          </a:p>
-          <a:p>
-            <a:r>
-              <a:rPr lang="ru-RU" dirty="0"/>
-              <a:t>Это означает, что если бы процессор при каждом обращении к данным ждал ответ от оперативной памяти, большая часть времени уходила бы на ожидание, а не на выполнение инструкций.</a:t>
-            </a:r>
-          </a:p>
-          <a:p>
-            <a:endParaRPr lang="ru-RU" dirty="0"/>
-          </a:p>
-          <a:p>
-            <a:r>
-              <a:rPr lang="ru-RU" dirty="0"/>
-              <a:t>Чтобы уменьшить эту разницу, используется иерархия памяти.</a:t>
-            </a:r>
-          </a:p>
-          <a:p>
-            <a:endParaRPr lang="ru-RU" dirty="0"/>
-          </a:p>
-          <a:p>
-            <a:r>
-              <a:rPr lang="ru-RU" dirty="0"/>
-              <a:t>Суть этой идеи заключается в том, что между процессором и оперативной памятью добавляются промежуточные уровни памяти, которые работают быстрее, но имеют меньший объём.</a:t>
-            </a:r>
-          </a:p>
-          <a:p>
-            <a:r>
-              <a:rPr lang="ru-RU" dirty="0"/>
-              <a:t>Самый быстрый уровень — это регистры процессора. Они находятся непосредственно внутри процессора и используются для хранения текущих данных и промежуточных результатов.</a:t>
-            </a:r>
-          </a:p>
-          <a:p>
-            <a:r>
-              <a:rPr lang="ru-RU" dirty="0"/>
-              <a:t>Далее идут уровни кеш-памяти: L1, L2 и L3. Кеши расположены ближе к процессору, чем оперативная память, и обеспечивают значительно более быстрый доступ к данным.</a:t>
-            </a:r>
-          </a:p>
-          <a:p>
-            <a:endParaRPr lang="ru-RU" dirty="0"/>
-          </a:p>
-          <a:p>
-            <a:r>
-              <a:rPr lang="ru-RU" dirty="0"/>
-              <a:t>Однако за эту скорость приходится платить размером. Чем быстрее память, тем она меньше. Например, объём регистров измеряется десятками или сотнями байт, кеш L1 — десятками килобайт, тогда как оперативная память — гигабайтами.</a:t>
-            </a:r>
-          </a:p>
-          <a:p>
-            <a:endParaRPr lang="ru-RU" dirty="0"/>
-          </a:p>
-          <a:p>
-            <a:r>
-              <a:rPr lang="ru-RU" dirty="0"/>
-              <a:t>Ключевая идея заключается в следующем: если нужные данные уже находятся в кеше, процессор может получить к ним доступ очень быстро, практически без задержек.</a:t>
-            </a:r>
-          </a:p>
-          <a:p>
-            <a:r>
-              <a:rPr lang="ru-RU" dirty="0"/>
-              <a:t>Если же данных в кеше нет, происходит так называемый </a:t>
-            </a:r>
-            <a:r>
-              <a:rPr lang="ru-RU" dirty="0" err="1"/>
-              <a:t>cache</a:t>
-            </a:r>
-            <a:r>
-              <a:rPr lang="ru-RU" dirty="0"/>
-              <a:t> </a:t>
-            </a:r>
-            <a:r>
-              <a:rPr lang="ru-RU" dirty="0" err="1"/>
-              <a:t>miss</a:t>
-            </a:r>
-            <a:r>
-              <a:rPr lang="ru-RU" dirty="0"/>
-              <a:t>, и процессор вынужден обращаться к более медленной памяти, вплоть до оперативной. В этом случае задержка доступа может увеличиться в десятки или сотни раз.</a:t>
-            </a:r>
-          </a:p>
-          <a:p>
-            <a:endParaRPr lang="ru-RU" dirty="0"/>
-          </a:p>
-          <a:p>
-            <a:r>
-              <a:rPr lang="ru-RU" dirty="0"/>
-              <a:t>Важно понимать, что вся эта иерархия полностью прозрачна для программиста на уровне языка </a:t>
-            </a:r>
-            <a:r>
-              <a:rPr lang="en-US" dirty="0"/>
-              <a:t>C</a:t>
-            </a:r>
-            <a:r>
-              <a:rPr lang="ru-RU" dirty="0"/>
-              <a:t>. Мы не управляем кешами напрямую, но структура наших данных и характер доступа к ним напрямую влияют на то, насколько эффективно используется кеш.</a:t>
-            </a:r>
-          </a:p>
-          <a:p>
-            <a:endParaRPr lang="ru-RU" dirty="0"/>
-          </a:p>
-          <a:p>
-            <a:r>
-              <a:rPr lang="ru-RU" dirty="0"/>
-              <a:t>Таким образом, производительность программы во многом определяется не только алгоритмами, но и тем, насколько эффективно программа взаимодействует с иерархией памяти.</a:t>
-            </a:r>
           </a:p>
         </p:txBody>
       </p:sp>
@@ -3339,9 +3178,9 @@
           <a:bodyPr/>
           <a:lstStyle/>
           <a:p>
-            <a:fld id="{8740D86D-1409-43B0-8811-9A559436DAB5}" type="slidenum">
+            <a:fld id="{87259E61-CD8F-4EDB-89B2-A2524EC5B40A}" type="slidenum">
               <a:rPr lang="en-US" smtClean="0"/>
-              <a:t>23</a:t>
+              <a:t>21</a:t>
             </a:fld>
             <a:endParaRPr lang="en-US"/>
           </a:p>
@@ -3350,7 +3189,7 @@
     </p:spTree>
     <p:extLst>
       <p:ext uri="{BB962C8B-B14F-4D97-AF65-F5344CB8AC3E}">
-        <p14:creationId xmlns:p14="http://schemas.microsoft.com/office/powerpoint/2010/main" val="1463726707"/>
+        <p14:creationId xmlns:p14="http://schemas.microsoft.com/office/powerpoint/2010/main" val="3076627225"/>
       </p:ext>
     </p:extLst>
   </p:cSld>
@@ -3404,195 +3243,7 @@
           <a:bodyPr/>
           <a:lstStyle/>
           <a:p>
-            <a:r>
-              <a:rPr lang="ru-RU" dirty="0"/>
-              <a:t>Когда процессор обращается к данным в памяти, он не сразу идёт в оперативную память. Сначала проверяется, находятся ли нужные данные в кеше.</a:t>
-            </a:r>
-          </a:p>
-          <a:p>
-            <a:endParaRPr lang="ru-RU" dirty="0"/>
-          </a:p>
-          <a:p>
-            <a:r>
-              <a:rPr lang="ru-RU" dirty="0"/>
-              <a:t>Если данные уже есть в кеше, происходит так называемый </a:t>
-            </a:r>
-            <a:r>
-              <a:rPr lang="ru-RU" dirty="0" err="1"/>
-              <a:t>cache</a:t>
-            </a:r>
-            <a:r>
-              <a:rPr lang="ru-RU" dirty="0"/>
-              <a:t> </a:t>
-            </a:r>
-            <a:r>
-              <a:rPr lang="ru-RU" dirty="0" err="1"/>
-              <a:t>hit</a:t>
-            </a:r>
-            <a:r>
-              <a:rPr lang="ru-RU" dirty="0"/>
-              <a:t>. В этом случае доступ выполняется очень быстро, так как кеш находится близко к процессору и имеет малую задержку.</a:t>
-            </a:r>
-          </a:p>
-          <a:p>
-            <a:r>
-              <a:rPr lang="ru-RU" dirty="0"/>
-              <a:t>Если же данных в кеше нет, происходит </a:t>
-            </a:r>
-            <a:r>
-              <a:rPr lang="ru-RU" dirty="0" err="1"/>
-              <a:t>cache</a:t>
-            </a:r>
-            <a:r>
-              <a:rPr lang="ru-RU" dirty="0"/>
-              <a:t> </a:t>
-            </a:r>
-            <a:r>
-              <a:rPr lang="ru-RU" dirty="0" err="1"/>
-              <a:t>miss</a:t>
-            </a:r>
-            <a:r>
-              <a:rPr lang="ru-RU" dirty="0"/>
-              <a:t>. Это означает, что процессору необходимо загрузить данные из следующего уровня памяти, например из L2, L3 кеша или даже из оперативной памяти.</a:t>
-            </a:r>
-          </a:p>
-          <a:p>
-            <a:endParaRPr lang="ru-RU" dirty="0"/>
-          </a:p>
-          <a:p>
-            <a:r>
-              <a:rPr lang="ru-RU" dirty="0"/>
-              <a:t>Такая загрузка занимает значительно больше времени. Процессору приходится ждать, пока данные будут доставлены, и в этот момент выполнение может замедляться.</a:t>
-            </a:r>
-          </a:p>
-          <a:p>
-            <a:endParaRPr lang="ru-RU" dirty="0"/>
-          </a:p>
-          <a:p>
-            <a:r>
-              <a:rPr lang="ru-RU" dirty="0"/>
-              <a:t>Важно понимать, что при </a:t>
-            </a:r>
-            <a:r>
-              <a:rPr lang="ru-RU" dirty="0" err="1"/>
-              <a:t>cache</a:t>
-            </a:r>
-            <a:r>
-              <a:rPr lang="ru-RU" dirty="0"/>
-              <a:t> </a:t>
-            </a:r>
-            <a:r>
-              <a:rPr lang="ru-RU" dirty="0" err="1"/>
-              <a:t>miss</a:t>
-            </a:r>
-            <a:r>
-              <a:rPr lang="ru-RU" dirty="0"/>
-              <a:t> загружается не только один конкретный байт или переменная, а целый блок памяти, который называется </a:t>
-            </a:r>
-            <a:r>
-              <a:rPr lang="ru-RU" dirty="0" err="1"/>
-              <a:t>cache</a:t>
-            </a:r>
-            <a:r>
-              <a:rPr lang="ru-RU" dirty="0"/>
-              <a:t> </a:t>
-            </a:r>
-            <a:r>
-              <a:rPr lang="ru-RU" dirty="0" err="1"/>
-              <a:t>line</a:t>
-            </a:r>
-            <a:r>
-              <a:rPr lang="ru-RU" dirty="0"/>
-              <a:t>. Это делается для повышения вероятности того, что последующие обращения к памяти окажутся успешными.</a:t>
-            </a:r>
-          </a:p>
-          <a:p>
-            <a:endParaRPr lang="ru-RU" dirty="0"/>
-          </a:p>
-          <a:p>
-            <a:r>
-              <a:rPr lang="ru-RU" dirty="0"/>
-              <a:t>Стоимость </a:t>
-            </a:r>
-            <a:r>
-              <a:rPr lang="ru-RU" dirty="0" err="1"/>
-              <a:t>cache</a:t>
-            </a:r>
-            <a:r>
-              <a:rPr lang="ru-RU" dirty="0"/>
-              <a:t> </a:t>
-            </a:r>
-            <a:r>
-              <a:rPr lang="ru-RU" dirty="0" err="1"/>
-              <a:t>miss</a:t>
-            </a:r>
-            <a:r>
-              <a:rPr lang="ru-RU" dirty="0"/>
-              <a:t> может составлять десятки, а в случае обращения к оперативной памяти — даже сотни тактов процессора. В то время как </a:t>
-            </a:r>
-            <a:r>
-              <a:rPr lang="ru-RU" dirty="0" err="1"/>
-              <a:t>cache</a:t>
-            </a:r>
-            <a:r>
-              <a:rPr lang="ru-RU" dirty="0"/>
-              <a:t> </a:t>
-            </a:r>
-            <a:r>
-              <a:rPr lang="ru-RU" dirty="0" err="1"/>
-              <a:t>hit</a:t>
-            </a:r>
-            <a:r>
-              <a:rPr lang="ru-RU" dirty="0"/>
-              <a:t> может занимать всего несколько тактов.</a:t>
-            </a:r>
-          </a:p>
-          <a:p>
-            <a:r>
-              <a:rPr lang="ru-RU" dirty="0"/>
-              <a:t>Таким образом, разница между </a:t>
-            </a:r>
-            <a:r>
-              <a:rPr lang="ru-RU" dirty="0" err="1"/>
-              <a:t>cache</a:t>
-            </a:r>
-            <a:r>
-              <a:rPr lang="ru-RU" dirty="0"/>
-              <a:t> </a:t>
-            </a:r>
-            <a:r>
-              <a:rPr lang="ru-RU" dirty="0" err="1"/>
-              <a:t>hit</a:t>
-            </a:r>
-            <a:r>
-              <a:rPr lang="ru-RU" dirty="0"/>
-              <a:t> и </a:t>
-            </a:r>
-            <a:r>
-              <a:rPr lang="ru-RU" dirty="0" err="1"/>
-              <a:t>cache</a:t>
-            </a:r>
-            <a:r>
-              <a:rPr lang="ru-RU" dirty="0"/>
-              <a:t> </a:t>
-            </a:r>
-            <a:r>
-              <a:rPr lang="ru-RU" dirty="0" err="1"/>
-              <a:t>miss</a:t>
-            </a:r>
-            <a:r>
-              <a:rPr lang="ru-RU" dirty="0"/>
-              <a:t> может быть на порядок и более.</a:t>
-            </a:r>
-          </a:p>
-          <a:p>
-            <a:endParaRPr lang="ru-RU" dirty="0"/>
-          </a:p>
-          <a:p>
-            <a:r>
-              <a:rPr lang="ru-RU" dirty="0"/>
-              <a:t>Именно поэтому количество промахов кеша является одним из ключевых факторов, влияющих на производительность программы. Даже при хорошем алгоритме неэффективный доступ к памяти может существенно замедлить выполнение.</a:t>
-            </a:r>
+            <a:endParaRPr lang="en-US"/>
           </a:p>
         </p:txBody>
       </p:sp>
@@ -3611,9 +3262,9 @@
           <a:bodyPr/>
           <a:lstStyle/>
           <a:p>
-            <a:fld id="{8740D86D-1409-43B0-8811-9A559436DAB5}" type="slidenum">
+            <a:fld id="{87259E61-CD8F-4EDB-89B2-A2524EC5B40A}" type="slidenum">
               <a:rPr lang="en-US" smtClean="0"/>
-              <a:t>24</a:t>
+              <a:t>22</a:t>
             </a:fld>
             <a:endParaRPr lang="en-US"/>
           </a:p>
@@ -3622,7 +3273,7 @@
     </p:spTree>
     <p:extLst>
       <p:ext uri="{BB962C8B-B14F-4D97-AF65-F5344CB8AC3E}">
-        <p14:creationId xmlns:p14="http://schemas.microsoft.com/office/powerpoint/2010/main" val="3675253474"/>
+        <p14:creationId xmlns:p14="http://schemas.microsoft.com/office/powerpoint/2010/main" val="1184940834"/>
       </p:ext>
     </p:extLst>
   </p:cSld>
@@ -3678,8 +3329,9 @@
           <a:p>
             <a:r>
               <a:rPr lang="ru-RU" dirty="0"/>
-              <a:t>Производительность программ во многом зависит не только от того, какие операции выполняются, но и от того, как именно происходит доступ к данным в памяти.</a:t>
-            </a:r>
+              <a:t>Современные процессоры работают значительно быстрее, чем оперативная память. Разница в скорости может составлять десятки и даже сотни раз.</a:t>
+            </a:r>
+            <a:endParaRPr lang="en-US" dirty="0"/>
           </a:p>
           <a:p>
             <a:endParaRPr lang="ru-RU" dirty="0"/>
@@ -3687,7 +3339,7 @@
           <a:p>
             <a:r>
               <a:rPr lang="ru-RU" dirty="0"/>
-              <a:t>Кеш-память работает эффективно только в том случае, если программа обладает так называемой локальностью доступа к данным.</a:t>
+              <a:t>Это означает, что если бы процессор при каждом обращении к данным ждал ответ от оперативной памяти, большая часть времени уходила бы на ожидание, а не на выполнение инструкций.</a:t>
             </a:r>
           </a:p>
           <a:p>
@@ -3696,7 +3348,7 @@
           <a:p>
             <a:r>
               <a:rPr lang="ru-RU" dirty="0"/>
-              <a:t>Существует два основных типа локальности: пространственная и временная.</a:t>
+              <a:t>Чтобы уменьшить эту разницу, используется иерархия памяти.</a:t>
             </a:r>
           </a:p>
           <a:p>
@@ -3705,7 +3357,19 @@
           <a:p>
             <a:r>
               <a:rPr lang="ru-RU" dirty="0"/>
-              <a:t>Пространственная локальность означает, что если программа обратилась к некоторому элементу памяти, то с высокой вероятностью в ближайшее время ей понадобятся соседние элементы. Это связано с тем, что данные часто располагаются последовательно, например, элементы массива.</a:t>
+              <a:t>Суть этой идеи заключается в том, что между процессором и оперативной памятью добавляются промежуточные уровни памяти, которые работают быстрее, но имеют меньший объём.</a:t>
+            </a:r>
+          </a:p>
+          <a:p>
+            <a:r>
+              <a:rPr lang="ru-RU" dirty="0"/>
+              <a:t>Самый быстрый уровень — это регистры процессора. Они находятся непосредственно внутри процессора и используются для хранения текущих данных и промежуточных результатов.</a:t>
+            </a:r>
+          </a:p>
+          <a:p>
+            <a:r>
+              <a:rPr lang="ru-RU" dirty="0"/>
+              <a:t>Далее идут уровни кеш-памяти: L1, L2 и L3. Кеши расположены ближе к процессору, чем оперативная память, и обеспечивают значительно более быстрый доступ к данным.</a:t>
             </a:r>
           </a:p>
           <a:p>
@@ -3714,7 +3378,22 @@
           <a:p>
             <a:r>
               <a:rPr lang="ru-RU" dirty="0"/>
-              <a:t>Именно поэтому последовательный обход массива работает эффективно. Когда процессор загружает один элемент, он фактически загружает в кеш целую </a:t>
+              <a:t>Однако за эту скорость приходится платить размером. Чем быстрее память, тем она меньше. Например, объём регистров измеряется десятками или сотнями байт, кеш L1 — десятками килобайт, тогда как оперативная память — гигабайтами.</a:t>
+            </a:r>
+          </a:p>
+          <a:p>
+            <a:endParaRPr lang="ru-RU" dirty="0"/>
+          </a:p>
+          <a:p>
+            <a:r>
+              <a:rPr lang="ru-RU" dirty="0"/>
+              <a:t>Ключевая идея заключается в следующем: если нужные данные уже находятся в кеше, процессор может получить к ним доступ очень быстро, практически без задержек.</a:t>
+            </a:r>
+          </a:p>
+          <a:p>
+            <a:r>
+              <a:rPr lang="ru-RU" dirty="0"/>
+              <a:t>Если же данных в кеше нет, происходит так называемый </a:t>
             </a:r>
             <a:r>
               <a:rPr lang="ru-RU" dirty="0" err="1"/>
@@ -3726,11 +3405,11 @@
             </a:r>
             <a:r>
               <a:rPr lang="ru-RU" dirty="0" err="1"/>
-              <a:t>line</a:t>
-            </a:r>
-            <a:r>
-              <a:rPr lang="ru-RU" dirty="0"/>
-              <a:t>, содержащую соседние элементы. Следующие обращения к этим данным будут происходить уже из кеша, то есть значительно быстрее.</a:t>
+              <a:t>miss</a:t>
+            </a:r>
+            <a:r>
+              <a:rPr lang="ru-RU" dirty="0"/>
+              <a:t>, и процессор вынужден обращаться к более медленной памяти, вплоть до оперативной. В этом случае задержка доступа может увеличиться в десятки или сотни раз.</a:t>
             </a:r>
           </a:p>
           <a:p>
@@ -3739,7 +3418,15 @@
           <a:p>
             <a:r>
               <a:rPr lang="ru-RU" dirty="0"/>
-              <a:t>Временная локальность означает, что если данные были использованы недавно, то, скорее всего, они будут использованы снова. Это характерно для переменных, которые участвуют в вычислениях внутри циклов или часто используемых структур данных.</a:t>
+              <a:t>Важно понимать, что вся эта иерархия полностью прозрачна для программиста на уровне языка </a:t>
+            </a:r>
+            <a:r>
+              <a:rPr lang="en-US" dirty="0"/>
+              <a:t>C</a:t>
+            </a:r>
+            <a:r>
+              <a:rPr lang="ru-RU" dirty="0"/>
+              <a:t>. Мы не управляем кешами напрямую, но структура наших данных и характер доступа к ним напрямую влияют на то, насколько эффективно используется кеш.</a:t>
             </a:r>
           </a:p>
           <a:p>
@@ -3748,66 +3435,7 @@
           <a:p>
             <a:r>
               <a:rPr lang="ru-RU" dirty="0"/>
-              <a:t>Кеш старается удерживать недавно использованные данные, предполагая, что к ним скоро снова обратятся.</a:t>
-            </a:r>
-          </a:p>
-          <a:p>
-            <a:endParaRPr lang="ru-RU" dirty="0"/>
-          </a:p>
-          <a:p>
-            <a:r>
-              <a:rPr lang="ru-RU" dirty="0"/>
-              <a:t>Если программа обладает хорошей пространственной и временной локальностью, то большинство обращений к памяти будет приводить к </a:t>
-            </a:r>
-            <a:r>
-              <a:rPr lang="ru-RU" dirty="0" err="1"/>
-              <a:t>cache</a:t>
-            </a:r>
-            <a:r>
-              <a:rPr lang="ru-RU" dirty="0"/>
-              <a:t> </a:t>
-            </a:r>
-            <a:r>
-              <a:rPr lang="ru-RU" dirty="0" err="1"/>
-              <a:t>hit</a:t>
-            </a:r>
-            <a:r>
-              <a:rPr lang="ru-RU" dirty="0"/>
-              <a:t>, и программа будет выполняться быстро.</a:t>
-            </a:r>
-          </a:p>
-          <a:p>
-            <a:endParaRPr lang="ru-RU" dirty="0"/>
-          </a:p>
-          <a:p>
-            <a:r>
-              <a:rPr lang="ru-RU" dirty="0"/>
-              <a:t>Если же доступ к данным происходит хаотично, без локальности, кеш становится менее эффективным, увеличивается количество </a:t>
-            </a:r>
-            <a:r>
-              <a:rPr lang="ru-RU" dirty="0" err="1"/>
-              <a:t>cache</a:t>
-            </a:r>
-            <a:r>
-              <a:rPr lang="ru-RU" dirty="0"/>
-              <a:t> </a:t>
-            </a:r>
-            <a:r>
-              <a:rPr lang="ru-RU" dirty="0" err="1"/>
-              <a:t>miss</a:t>
-            </a:r>
-            <a:r>
-              <a:rPr lang="ru-RU" dirty="0"/>
-              <a:t>, и производительность резко падает.</a:t>
-            </a:r>
-          </a:p>
-          <a:p>
-            <a:endParaRPr lang="ru-RU" dirty="0"/>
-          </a:p>
-          <a:p>
-            <a:r>
-              <a:rPr lang="ru-RU" dirty="0"/>
-              <a:t>Таким образом, организация доступа к данным может быть не менее важной, чем выбор самого алгоритма.</a:t>
+              <a:t>Таким образом, производительность программы во многом определяется не только алгоритмами, но и тем, насколько эффективно программа взаимодействует с иерархией памяти.</a:t>
             </a:r>
           </a:p>
         </p:txBody>
@@ -3829,7 +3457,7 @@
           <a:p>
             <a:fld id="{8740D86D-1409-43B0-8811-9A559436DAB5}" type="slidenum">
               <a:rPr lang="en-US" smtClean="0"/>
-              <a:t>25</a:t>
+              <a:t>23</a:t>
             </a:fld>
             <a:endParaRPr lang="en-US"/>
           </a:p>
@@ -3838,7 +3466,7 @@
     </p:spTree>
     <p:extLst>
       <p:ext uri="{BB962C8B-B14F-4D97-AF65-F5344CB8AC3E}">
-        <p14:creationId xmlns:p14="http://schemas.microsoft.com/office/powerpoint/2010/main" val="379340135"/>
+        <p14:creationId xmlns:p14="http://schemas.microsoft.com/office/powerpoint/2010/main" val="1463726707"/>
       </p:ext>
     </p:extLst>
   </p:cSld>
@@ -3894,7 +3522,7 @@
           <a:p>
             <a:r>
               <a:rPr lang="ru-RU" dirty="0"/>
-              <a:t>На этом слайде показан универсальный подход к измерению времени выполнения функций.</a:t>
+              <a:t>Когда процессор обращается к данным в памяти, он не сразу идёт в оперативную память. Сначала проверяется, находятся ли нужные данные в кеше.</a:t>
             </a:r>
           </a:p>
           <a:p>
@@ -3903,15 +3531,45 @@
           <a:p>
             <a:r>
               <a:rPr lang="ru-RU" dirty="0"/>
-              <a:t>Здесь мы используем уже знакомую нам идею — указатели на функции и передачу контекста через </a:t>
+              <a:t>Если данные уже есть в кеше, происходит так называемый </a:t>
             </a:r>
             <a:r>
               <a:rPr lang="ru-RU" dirty="0" err="1"/>
-              <a:t>void</a:t>
-            </a:r>
-            <a:r>
-              <a:rPr lang="ru-RU" dirty="0"/>
-              <a:t>*. На основе этого можно построить универсальный инструмент, который позволяет измерять время выполнения практически любых функций.</a:t>
+              <a:t>cache</a:t>
+            </a:r>
+            <a:r>
+              <a:rPr lang="ru-RU" dirty="0"/>
+              <a:t> </a:t>
+            </a:r>
+            <a:r>
+              <a:rPr lang="ru-RU" dirty="0" err="1"/>
+              <a:t>hit</a:t>
+            </a:r>
+            <a:r>
+              <a:rPr lang="ru-RU" dirty="0"/>
+              <a:t>. В этом случае доступ выполняется очень быстро, так как кеш находится близко к процессору и имеет малую задержку.</a:t>
+            </a:r>
+          </a:p>
+          <a:p>
+            <a:r>
+              <a:rPr lang="ru-RU" dirty="0"/>
+              <a:t>Если же данных в кеше нет, происходит </a:t>
+            </a:r>
+            <a:r>
+              <a:rPr lang="ru-RU" dirty="0" err="1"/>
+              <a:t>cache</a:t>
+            </a:r>
+            <a:r>
+              <a:rPr lang="ru-RU" dirty="0"/>
+              <a:t> </a:t>
+            </a:r>
+            <a:r>
+              <a:rPr lang="ru-RU" dirty="0" err="1"/>
+              <a:t>miss</a:t>
+            </a:r>
+            <a:r>
+              <a:rPr lang="ru-RU" dirty="0"/>
+              <a:t>. Это означает, что процессору необходимо загрузить данные из следующего уровня памяти, например из L2, L3 кеша или даже из оперативной памяти.</a:t>
             </a:r>
           </a:p>
           <a:p>
@@ -3920,15 +3578,48 @@
           <a:p>
             <a:r>
               <a:rPr lang="ru-RU" dirty="0"/>
-              <a:t>Сначала обратим внимание на функцию </a:t>
+              <a:t>Такая загрузка занимает значительно больше времени. Процессору приходится ждать, пока данные будут доставлены, и в этот момент выполнение может замедляться.</a:t>
+            </a:r>
+          </a:p>
+          <a:p>
+            <a:endParaRPr lang="ru-RU" dirty="0"/>
+          </a:p>
+          <a:p>
+            <a:r>
+              <a:rPr lang="ru-RU" dirty="0"/>
+              <a:t>Важно понимать, что при </a:t>
             </a:r>
             <a:r>
               <a:rPr lang="ru-RU" dirty="0" err="1"/>
-              <a:t>Now</a:t>
-            </a:r>
-            <a:r>
-              <a:rPr lang="ru-RU" dirty="0"/>
-              <a:t>. Она возвращает текущее время с высокой точностью. В зависимости от платформы используются разные механизмы: на Windows — высокоточный счётчик производительности, а на Unix-подобных системах — монотонные часы.</a:t>
+              <a:t>cache</a:t>
+            </a:r>
+            <a:r>
+              <a:rPr lang="ru-RU" dirty="0"/>
+              <a:t> </a:t>
+            </a:r>
+            <a:r>
+              <a:rPr lang="ru-RU" dirty="0" err="1"/>
+              <a:t>miss</a:t>
+            </a:r>
+            <a:r>
+              <a:rPr lang="ru-RU" dirty="0"/>
+              <a:t> загружается не только один конкретный байт или переменная, а целый блок памяти, который называется </a:t>
+            </a:r>
+            <a:r>
+              <a:rPr lang="ru-RU" dirty="0" err="1"/>
+              <a:t>cache</a:t>
+            </a:r>
+            <a:r>
+              <a:rPr lang="ru-RU" dirty="0"/>
+              <a:t> </a:t>
+            </a:r>
+            <a:r>
+              <a:rPr lang="ru-RU" dirty="0" err="1"/>
+              <a:t>line</a:t>
+            </a:r>
+            <a:r>
+              <a:rPr lang="ru-RU" dirty="0"/>
+              <a:t>. Это делается для повышения вероятности того, что последующие обращения к памяти окажутся успешными.</a:t>
             </a:r>
           </a:p>
           <a:p>
@@ -3937,37 +3628,77 @@
           <a:p>
             <a:r>
               <a:rPr lang="ru-RU" dirty="0"/>
-              <a:t>Далее вводится тип </a:t>
+              <a:t>Стоимость </a:t>
             </a:r>
             <a:r>
               <a:rPr lang="ru-RU" dirty="0" err="1"/>
-              <a:t>MeasuredFunc</a:t>
-            </a:r>
-            <a:r>
-              <a:rPr lang="ru-RU" dirty="0"/>
-              <a:t> — это указатель на функцию, которая принимает указатель на некоторый контекст типа </a:t>
+              <a:t>cache</a:t>
+            </a:r>
+            <a:r>
+              <a:rPr lang="ru-RU" dirty="0"/>
+              <a:t> </a:t>
             </a:r>
             <a:r>
               <a:rPr lang="ru-RU" dirty="0" err="1"/>
-              <a:t>void</a:t>
-            </a:r>
-            <a:r>
-              <a:rPr lang="ru-RU" dirty="0"/>
-              <a:t>* и ничего не возвращает.</a:t>
-            </a:r>
-          </a:p>
-          <a:p>
-            <a:r>
-              <a:rPr lang="ru-RU" dirty="0"/>
-              <a:t>Использование </a:t>
+              <a:t>miss</a:t>
+            </a:r>
+            <a:r>
+              <a:rPr lang="ru-RU" dirty="0"/>
+              <a:t> может составлять десятки, а в случае обращения к оперативной памяти — даже сотни тактов процессора. В то время как </a:t>
             </a:r>
             <a:r>
               <a:rPr lang="ru-RU" dirty="0" err="1"/>
-              <a:t>void</a:t>
-            </a:r>
-            <a:r>
-              <a:rPr lang="ru-RU" dirty="0"/>
-              <a:t>* позволяет передавать в такую функцию произвольные данные. Это делает интерфейс универсальным, поскольку он не зависит от конкретного типа параметров.</a:t>
+              <a:t>cache</a:t>
+            </a:r>
+            <a:r>
+              <a:rPr lang="ru-RU" dirty="0"/>
+              <a:t> </a:t>
+            </a:r>
+            <a:r>
+              <a:rPr lang="ru-RU" dirty="0" err="1"/>
+              <a:t>hit</a:t>
+            </a:r>
+            <a:r>
+              <a:rPr lang="ru-RU" dirty="0"/>
+              <a:t> может занимать всего несколько тактов.</a:t>
+            </a:r>
+          </a:p>
+          <a:p>
+            <a:r>
+              <a:rPr lang="ru-RU" dirty="0"/>
+              <a:t>Таким образом, разница между </a:t>
+            </a:r>
+            <a:r>
+              <a:rPr lang="ru-RU" dirty="0" err="1"/>
+              <a:t>cache</a:t>
+            </a:r>
+            <a:r>
+              <a:rPr lang="ru-RU" dirty="0"/>
+              <a:t> </a:t>
+            </a:r>
+            <a:r>
+              <a:rPr lang="ru-RU" dirty="0" err="1"/>
+              <a:t>hit</a:t>
+            </a:r>
+            <a:r>
+              <a:rPr lang="ru-RU" dirty="0"/>
+              <a:t> и </a:t>
+            </a:r>
+            <a:r>
+              <a:rPr lang="ru-RU" dirty="0" err="1"/>
+              <a:t>cache</a:t>
+            </a:r>
+            <a:r>
+              <a:rPr lang="ru-RU" dirty="0"/>
+              <a:t> </a:t>
+            </a:r>
+            <a:r>
+              <a:rPr lang="ru-RU" dirty="0" err="1"/>
+              <a:t>miss</a:t>
+            </a:r>
+            <a:r>
+              <a:rPr lang="ru-RU" dirty="0"/>
+              <a:t> может быть на порядок и более.</a:t>
             </a:r>
           </a:p>
           <a:p>
@@ -3976,34 +3707,8 @@
           <a:p>
             <a:r>
               <a:rPr lang="ru-RU" dirty="0"/>
-              <a:t>Функция </a:t>
-            </a:r>
-            <a:r>
-              <a:rPr lang="ru-RU" dirty="0" err="1"/>
-              <a:t>Measure</a:t>
-            </a:r>
-            <a:r>
-              <a:rPr lang="ru-RU" dirty="0"/>
-              <a:t> принимает имя измеряемого алгоритма, указатель на функцию и указатель на контекст. Она измеряет время до и после вызова функции и выводит разницу.</a:t>
-            </a:r>
-          </a:p>
-          <a:p>
-            <a:r>
-              <a:rPr lang="ru-RU" dirty="0"/>
-              <a:t>Таким образом, мы получаем универсальную функцию для измерения времени работы любых алгоритмов.</a:t>
-            </a:r>
-          </a:p>
-          <a:p>
-            <a:endParaRPr lang="ru-RU" dirty="0"/>
-          </a:p>
-          <a:p>
-            <a:r>
-              <a:rPr lang="ru-RU" dirty="0"/>
-              <a:t>Далее мы будем использовать этот механизм на следующих слайдах, чтобы сравнивать различные способы работы с памятью и наблюдать, как они влияют на производительность.</a:t>
-            </a:r>
-          </a:p>
-          <a:p>
-            <a:endParaRPr lang="en-US" dirty="0"/>
+              <a:t>Именно поэтому количество промахов кеша является одним из ключевых факторов, влияющих на производительность программы. Даже при хорошем алгоритме неэффективный доступ к памяти может существенно замедлить выполнение.</a:t>
+            </a:r>
           </a:p>
         </p:txBody>
       </p:sp>
@@ -4022,9 +3727,9 @@
           <a:bodyPr/>
           <a:lstStyle/>
           <a:p>
-            <a:fld id="{87259E61-CD8F-4EDB-89B2-A2524EC5B40A}" type="slidenum">
+            <a:fld id="{8740D86D-1409-43B0-8811-9A559436DAB5}" type="slidenum">
               <a:rPr lang="en-US" smtClean="0"/>
-              <a:t>26</a:t>
+              <a:t>24</a:t>
             </a:fld>
             <a:endParaRPr lang="en-US"/>
           </a:p>
@@ -4033,7 +3738,7 @@
     </p:spTree>
     <p:extLst>
       <p:ext uri="{BB962C8B-B14F-4D97-AF65-F5344CB8AC3E}">
-        <p14:creationId xmlns:p14="http://schemas.microsoft.com/office/powerpoint/2010/main" val="3237445916"/>
+        <p14:creationId xmlns:p14="http://schemas.microsoft.com/office/powerpoint/2010/main" val="3675253474"/>
       </p:ext>
     </p:extLst>
   </p:cSld>
@@ -4089,7 +3794,7 @@
           <a:p>
             <a:r>
               <a:rPr lang="ru-RU" dirty="0"/>
-              <a:t>На этом слайде показан очень показательный пример влияния локальности доступа к данным на производительность программы.</a:t>
+              <a:t>Производительность программ во многом зависит не только от того, какие операции выполняются, но и от того, как именно происходит доступ к данным в памяти.</a:t>
             </a:r>
           </a:p>
           <a:p>
@@ -4098,7 +3803,7 @@
           <a:p>
             <a:r>
               <a:rPr lang="ru-RU" dirty="0"/>
-              <a:t>Мы работаем с матрицей, которая хранится в памяти как один непрерывный массив. В языке C элементы матрицы располагаются построчно, то есть сначала идут элементы первой строки, затем второй и так далее.</a:t>
+              <a:t>Кеш-память работает эффективно только в том случае, если программа обладает так называемой локальностью доступа к данным.</a:t>
             </a:r>
           </a:p>
           <a:p>
@@ -4107,181 +3812,7 @@
           <a:p>
             <a:r>
               <a:rPr lang="ru-RU" dirty="0"/>
-              <a:t>Перед тем как обсуждать результаты, обратим внимание на организацию измерения времени. Наша функция </a:t>
-            </a:r>
-            <a:r>
-              <a:rPr lang="ru-RU" dirty="0" err="1"/>
-              <a:t>Measure</a:t>
-            </a:r>
-            <a:r>
-              <a:rPr lang="ru-RU" dirty="0"/>
-              <a:t> ожидает указатель на функцию с сигнатурой </a:t>
-            </a:r>
-            <a:r>
-              <a:rPr lang="ru-RU" sz="1200" kern="1200" dirty="0" err="1">
-                <a:solidFill>
-                  <a:schemeClr val="tx1"/>
-                </a:solidFill>
-                <a:latin typeface="+mn-lt"/>
-                <a:ea typeface="+mn-ea"/>
-                <a:cs typeface="+mn-cs"/>
-              </a:rPr>
-              <a:t>void</a:t>
-            </a:r>
-            <a:r>
-              <a:rPr lang="ru-RU" sz="1200" kern="1200" dirty="0">
-                <a:solidFill>
-                  <a:schemeClr val="tx1"/>
-                </a:solidFill>
-                <a:latin typeface="+mn-lt"/>
-                <a:ea typeface="+mn-ea"/>
-                <a:cs typeface="+mn-cs"/>
-              </a:rPr>
-              <a:t> (*)(</a:t>
-            </a:r>
-            <a:r>
-              <a:rPr lang="ru-RU" sz="1200" kern="1200" dirty="0" err="1">
-                <a:solidFill>
-                  <a:schemeClr val="tx1"/>
-                </a:solidFill>
-                <a:latin typeface="+mn-lt"/>
-                <a:ea typeface="+mn-ea"/>
-                <a:cs typeface="+mn-cs"/>
-              </a:rPr>
-              <a:t>void</a:t>
-            </a:r>
-            <a:r>
-              <a:rPr lang="ru-RU" sz="1200" kern="1200" dirty="0">
-                <a:solidFill>
-                  <a:schemeClr val="tx1"/>
-                </a:solidFill>
-                <a:latin typeface="+mn-lt"/>
-                <a:ea typeface="+mn-ea"/>
-                <a:cs typeface="+mn-cs"/>
-              </a:rPr>
-              <a:t>*)</a:t>
-            </a:r>
-            <a:r>
-              <a:rPr lang="ru-RU" dirty="0"/>
-              <a:t>. Однако функции </a:t>
-            </a:r>
-            <a:r>
-              <a:rPr lang="ru-RU" dirty="0" err="1"/>
-              <a:t>RowMajor</a:t>
-            </a:r>
-            <a:r>
-              <a:rPr lang="ru-RU" dirty="0"/>
-              <a:t> и </a:t>
-            </a:r>
-            <a:r>
-              <a:rPr lang="ru-RU" dirty="0" err="1"/>
-              <a:t>ColumnMajor</a:t>
-            </a:r>
-            <a:r>
-              <a:rPr lang="ru-RU" dirty="0"/>
-              <a:t> имеют другую сигнатуру — они принимают указатель на массив типа </a:t>
-            </a:r>
-            <a:r>
-              <a:rPr lang="ru-RU" sz="1200" kern="1200" dirty="0" err="1">
-                <a:solidFill>
-                  <a:schemeClr val="tx1"/>
-                </a:solidFill>
-                <a:latin typeface="+mn-lt"/>
-                <a:ea typeface="+mn-ea"/>
-                <a:cs typeface="+mn-cs"/>
-              </a:rPr>
-              <a:t>int</a:t>
-            </a:r>
-            <a:r>
-              <a:rPr lang="ru-RU" sz="1200" kern="1200" dirty="0">
-                <a:solidFill>
-                  <a:schemeClr val="tx1"/>
-                </a:solidFill>
-                <a:latin typeface="+mn-lt"/>
-                <a:ea typeface="+mn-ea"/>
-                <a:cs typeface="+mn-cs"/>
-              </a:rPr>
-              <a:t>*</a:t>
-            </a:r>
-            <a:r>
-              <a:rPr lang="ru-RU" dirty="0"/>
-              <a:t>.</a:t>
-            </a:r>
-          </a:p>
-          <a:p>
-            <a:r>
-              <a:rPr lang="ru-RU" dirty="0"/>
-              <a:t>Чтобы согласовать эти интерфейсы, мы вводим структуру </a:t>
-            </a:r>
-            <a:r>
-              <a:rPr lang="ru-RU" dirty="0" err="1"/>
-              <a:t>MatrixContext</a:t>
-            </a:r>
-            <a:r>
-              <a:rPr lang="ru-RU" dirty="0"/>
-              <a:t>. В ней мы храним два элемента: указатель на функцию, которую нужно вызвать, и указатель на данные, с которыми эта функция должна работать.</a:t>
-            </a:r>
-          </a:p>
-          <a:p>
-            <a:r>
-              <a:rPr lang="ru-RU" dirty="0"/>
-              <a:t>Далее вводится функция </a:t>
-            </a:r>
-            <a:r>
-              <a:rPr lang="ru-RU" dirty="0" err="1"/>
-              <a:t>MatrixMeasured</a:t>
-            </a:r>
-            <a:r>
-              <a:rPr lang="ru-RU" dirty="0"/>
-              <a:t>. Она принимает универсальный указатель </a:t>
-            </a:r>
-            <a:r>
-              <a:rPr lang="ru-RU" sz="1200" kern="1200" dirty="0" err="1">
-                <a:solidFill>
-                  <a:schemeClr val="tx1"/>
-                </a:solidFill>
-                <a:latin typeface="+mn-lt"/>
-                <a:ea typeface="+mn-ea"/>
-                <a:cs typeface="+mn-cs"/>
-              </a:rPr>
-              <a:t>void</a:t>
-            </a:r>
-            <a:r>
-              <a:rPr lang="ru-RU" sz="1200" kern="1200" dirty="0">
-                <a:solidFill>
-                  <a:schemeClr val="tx1"/>
-                </a:solidFill>
-                <a:latin typeface="+mn-lt"/>
-                <a:ea typeface="+mn-ea"/>
-                <a:cs typeface="+mn-cs"/>
-              </a:rPr>
-              <a:t>*</a:t>
-            </a:r>
-            <a:r>
-              <a:rPr lang="ru-RU" dirty="0"/>
-              <a:t>, приводит его к типу </a:t>
-            </a:r>
-            <a:r>
-              <a:rPr lang="ru-RU" dirty="0" err="1"/>
-              <a:t>MatrixContext</a:t>
-            </a:r>
-            <a:r>
-              <a:rPr lang="ru-RU" dirty="0"/>
-              <a:t> и затем вызывает нужную функцию, передавая ей данные.</a:t>
-            </a:r>
-          </a:p>
-          <a:p>
-            <a:r>
-              <a:rPr lang="ru-RU" dirty="0"/>
-              <a:t>Таким образом, мы применяем уже знакомый нам паттерн: функция плюс контекст. Это позволяет использовать универсальную функцию </a:t>
-            </a:r>
-            <a:r>
-              <a:rPr lang="ru-RU" dirty="0" err="1"/>
-              <a:t>Measure</a:t>
-            </a:r>
-            <a:r>
-              <a:rPr lang="ru-RU" dirty="0"/>
-              <a:t> для вызова алгоритмов с произвольными параметрами.</a:t>
+              <a:t>Существует два основных типа локальности: пространственная и временная.</a:t>
             </a:r>
           </a:p>
           <a:p>
@@ -4290,35 +3821,7 @@
           <a:p>
             <a:r>
               <a:rPr lang="ru-RU" dirty="0"/>
-              <a:t>Теперь вернёмся к сути примера.</a:t>
-            </a:r>
-          </a:p>
-          <a:p>
-            <a:r>
-              <a:rPr lang="ru-RU" dirty="0"/>
-              <a:t>В функции </a:t>
-            </a:r>
-            <a:r>
-              <a:rPr lang="ru-RU" dirty="0" err="1"/>
-              <a:t>RowMajor</a:t>
-            </a:r>
-            <a:r>
-              <a:rPr lang="ru-RU" dirty="0"/>
-              <a:t> мы обходим матрицу построчно. Это означает, что доступ к памяти происходит последовательно, по соседним адресам.</a:t>
-            </a:r>
-          </a:p>
-          <a:p>
-            <a:r>
-              <a:rPr lang="ru-RU" dirty="0"/>
-              <a:t>В функции </a:t>
-            </a:r>
-            <a:r>
-              <a:rPr lang="ru-RU" dirty="0" err="1"/>
-              <a:t>ColumnMajor</a:t>
-            </a:r>
-            <a:r>
-              <a:rPr lang="ru-RU" dirty="0"/>
-              <a:t> порядок обхода меняется. Мы фиксируем столбец и проходим по строкам. В результате обращения к памяти происходят с большим шагом, равным размеру строки.</a:t>
+              <a:t>Пространственная локальность означает, что если программа обратилась к некоторому элементу памяти, то с высокой вероятностью в ближайшее время ей понадобятся соседние элементы. Это связано с тем, что данные часто располагаются последовательно, например, элементы массива.</a:t>
             </a:r>
           </a:p>
           <a:p>
@@ -4327,38 +3830,7 @@
           <a:p>
             <a:r>
               <a:rPr lang="ru-RU" dirty="0"/>
-              <a:t>С точки зрения логики программы обе функции делают одно и то же. Однако время выполнения отличается на порядок.</a:t>
-            </a:r>
-          </a:p>
-          <a:p>
-            <a:endParaRPr lang="ru-RU" dirty="0"/>
-          </a:p>
-          <a:p>
-            <a:r>
-              <a:rPr lang="ru-RU" dirty="0"/>
-              <a:t>Причина заключается в работе кеш-памяти. В случае </a:t>
-            </a:r>
-            <a:r>
-              <a:rPr lang="ru-RU" dirty="0" err="1"/>
-              <a:t>RowMajor</a:t>
-            </a:r>
-            <a:r>
-              <a:rPr lang="ru-RU" dirty="0"/>
-              <a:t> доступ обладает хорошей пространственной локальностью. Когда процессор загружает данные в кеш, он подгружает сразу целый блок памяти, и последующие обращения попадают в кеш.</a:t>
-            </a:r>
-          </a:p>
-          <a:p>
-            <a:r>
-              <a:rPr lang="ru-RU" dirty="0"/>
-              <a:t>В случае </a:t>
-            </a:r>
-            <a:r>
-              <a:rPr lang="ru-RU" dirty="0" err="1"/>
-              <a:t>ColumnMajor</a:t>
-            </a:r>
-            <a:r>
-              <a:rPr lang="ru-RU" dirty="0"/>
-              <a:t> пространственная локальность нарушается. Мы обращаемся к элементам, которые находятся далеко друг от друга в памяти. Почти каждое обращение приводит к </a:t>
+              <a:t>Именно поэтому последовательный обход массива работает эффективно. Когда процессор загружает один элемент, он фактически загружает в кеш целую </a:t>
             </a:r>
             <a:r>
               <a:rPr lang="ru-RU" dirty="0" err="1"/>
@@ -4370,17 +3842,79 @@
             </a:r>
             <a:r>
               <a:rPr lang="ru-RU" dirty="0" err="1"/>
+              <a:t>line</a:t>
+            </a:r>
+            <a:r>
+              <a:rPr lang="ru-RU" dirty="0"/>
+              <a:t>, содержащую соседние элементы. Следующие обращения к этим данным будут происходить уже из кеша, то есть значительно быстрее.</a:t>
+            </a:r>
+          </a:p>
+          <a:p>
+            <a:endParaRPr lang="ru-RU" dirty="0"/>
+          </a:p>
+          <a:p>
+            <a:r>
+              <a:rPr lang="ru-RU" dirty="0"/>
+              <a:t>Временная локальность означает, что если данные были использованы недавно, то, скорее всего, они будут использованы снова. Это характерно для переменных, которые участвуют в вычислениях внутри циклов или часто используемых структур данных.</a:t>
+            </a:r>
+          </a:p>
+          <a:p>
+            <a:endParaRPr lang="ru-RU" dirty="0"/>
+          </a:p>
+          <a:p>
+            <a:r>
+              <a:rPr lang="ru-RU" dirty="0"/>
+              <a:t>Кеш старается удерживать недавно использованные данные, предполагая, что к ним скоро снова обратятся.</a:t>
+            </a:r>
+          </a:p>
+          <a:p>
+            <a:endParaRPr lang="ru-RU" dirty="0"/>
+          </a:p>
+          <a:p>
+            <a:r>
+              <a:rPr lang="ru-RU" dirty="0"/>
+              <a:t>Если программа обладает хорошей пространственной и временной локальностью, то большинство обращений к памяти будет приводить к </a:t>
+            </a:r>
+            <a:r>
+              <a:rPr lang="ru-RU" dirty="0" err="1"/>
+              <a:t>cache</a:t>
+            </a:r>
+            <a:r>
+              <a:rPr lang="ru-RU" dirty="0"/>
+              <a:t> </a:t>
+            </a:r>
+            <a:r>
+              <a:rPr lang="ru-RU" dirty="0" err="1"/>
+              <a:t>hit</a:t>
+            </a:r>
+            <a:r>
+              <a:rPr lang="ru-RU" dirty="0"/>
+              <a:t>, и программа будет выполняться быстро.</a:t>
+            </a:r>
+          </a:p>
+          <a:p>
+            <a:endParaRPr lang="ru-RU" dirty="0"/>
+          </a:p>
+          <a:p>
+            <a:r>
+              <a:rPr lang="ru-RU" dirty="0"/>
+              <a:t>Если же доступ к данным происходит хаотично, без локальности, кеш становится менее эффективным, увеличивается количество </a:t>
+            </a:r>
+            <a:r>
+              <a:rPr lang="ru-RU" dirty="0" err="1"/>
+              <a:t>cache</a:t>
+            </a:r>
+            <a:r>
+              <a:rPr lang="ru-RU" dirty="0"/>
+              <a:t> </a:t>
+            </a:r>
+            <a:r>
+              <a:rPr lang="ru-RU" dirty="0" err="1"/>
               <a:t>miss</a:t>
             </a:r>
             <a:r>
               <a:rPr lang="ru-RU" dirty="0"/>
-              <a:t>, и процессор вынужден снова и снова обращаться к более медленным уровням памяти.</a:t>
-            </a:r>
-          </a:p>
-          <a:p>
-            <a:r>
-              <a:rPr lang="ru-RU" dirty="0"/>
-              <a:t>В результате программа тратит большую часть времени не на вычисления, а на ожидание данных из памяти.</a:t>
+              <a:t>, и производительность резко падает.</a:t>
             </a:r>
           </a:p>
           <a:p>
@@ -4389,7 +3923,7 @@
           <a:p>
             <a:r>
               <a:rPr lang="ru-RU" dirty="0"/>
-              <a:t>Этот пример показывает, что даже при одинаковом количестве операций и одинаковом алгоритме порядок доступа к данным может кардинально изменить производительность программы.</a:t>
+              <a:t>Таким образом, организация доступа к данным может быть не менее важной, чем выбор самого алгоритма.</a:t>
             </a:r>
           </a:p>
         </p:txBody>
@@ -4411,7 +3945,7 @@
           <a:p>
             <a:fld id="{8740D86D-1409-43B0-8811-9A559436DAB5}" type="slidenum">
               <a:rPr lang="en-US" smtClean="0"/>
-              <a:t>27</a:t>
+              <a:t>25</a:t>
             </a:fld>
             <a:endParaRPr lang="en-US"/>
           </a:p>
@@ -4420,7 +3954,7 @@
     </p:spTree>
     <p:extLst>
       <p:ext uri="{BB962C8B-B14F-4D97-AF65-F5344CB8AC3E}">
-        <p14:creationId xmlns:p14="http://schemas.microsoft.com/office/powerpoint/2010/main" val="2752448003"/>
+        <p14:creationId xmlns:p14="http://schemas.microsoft.com/office/powerpoint/2010/main" val="379340135"/>
       </p:ext>
     </p:extLst>
   </p:cSld>
@@ -4476,29 +4010,41 @@
           <a:p>
             <a:r>
               <a:rPr lang="ru-RU" dirty="0"/>
-              <a:t>Важно понимать, что процессор работает с памятью не на уровне отдельных байтов или переменных, а на уровне блоков.</a:t>
-            </a:r>
-          </a:p>
-          <a:p>
-            <a:r>
-              <a:rPr lang="ru-RU" dirty="0"/>
-              <a:t>Когда происходит обращение к памяти, в кеш загружается не один конкретный элемент, а целый блок данных, который называется </a:t>
+              <a:t>На этом слайде показан универсальный подход к измерению времени выполнения функций.</a:t>
+            </a:r>
+          </a:p>
+          <a:p>
+            <a:endParaRPr lang="ru-RU" dirty="0"/>
+          </a:p>
+          <a:p>
+            <a:r>
+              <a:rPr lang="ru-RU" dirty="0"/>
+              <a:t>Здесь мы используем уже знакомую нам идею — указатели на функции и передачу контекста через </a:t>
             </a:r>
             <a:r>
               <a:rPr lang="ru-RU" dirty="0" err="1"/>
-              <a:t>cache</a:t>
-            </a:r>
-            <a:r>
-              <a:rPr lang="ru-RU" dirty="0"/>
-              <a:t> </a:t>
+              <a:t>void</a:t>
+            </a:r>
+            <a:r>
+              <a:rPr lang="ru-RU" dirty="0"/>
+              <a:t>*. На основе этого можно построить универсальный инструмент, который позволяет измерять время выполнения практически любых функций.</a:t>
+            </a:r>
+          </a:p>
+          <a:p>
+            <a:endParaRPr lang="ru-RU" dirty="0"/>
+          </a:p>
+          <a:p>
+            <a:r>
+              <a:rPr lang="ru-RU" dirty="0"/>
+              <a:t>Сначала обратим внимание на функцию </a:t>
             </a:r>
             <a:r>
               <a:rPr lang="ru-RU" dirty="0" err="1"/>
-              <a:t>line</a:t>
-            </a:r>
-            <a:r>
-              <a:rPr lang="ru-RU" dirty="0"/>
-              <a:t> (кеш-линия).</a:t>
+              <a:t>Now</a:t>
+            </a:r>
+            <a:r>
+              <a:rPr lang="ru-RU" dirty="0"/>
+              <a:t>. Она возвращает текущее время с высокой точностью. В зависимости от платформы используются разные механизмы: на Windows — высокоточный счётчик производительности, а на Unix-подобных системах — монотонные часы.</a:t>
             </a:r>
           </a:p>
           <a:p>
@@ -4507,23 +4053,37 @@
           <a:p>
             <a:r>
               <a:rPr lang="ru-RU" dirty="0"/>
-              <a:t>Типичный размер </a:t>
+              <a:t>Далее вводится тип </a:t>
             </a:r>
             <a:r>
               <a:rPr lang="ru-RU" dirty="0" err="1"/>
-              <a:t>cache</a:t>
-            </a:r>
-            <a:r>
-              <a:rPr lang="ru-RU" dirty="0"/>
-              <a:t> </a:t>
+              <a:t>MeasuredFunc</a:t>
+            </a:r>
+            <a:r>
+              <a:rPr lang="ru-RU" dirty="0"/>
+              <a:t> — это указатель на функцию, которая принимает указатель на некоторый контекст типа </a:t>
             </a:r>
             <a:r>
               <a:rPr lang="ru-RU" dirty="0" err="1"/>
-              <a:t>line</a:t>
-            </a:r>
-            <a:r>
-              <a:rPr lang="ru-RU" dirty="0"/>
-              <a:t> составляет 64 байт, хотя он может отличаться в зависимости от архитектуры процессора. Это означает, что при обращении, например, к одному элементу массива, процессор фактически загружает в кеш сразу несколько соседних элементов.</a:t>
+              <a:t>void</a:t>
+            </a:r>
+            <a:r>
+              <a:rPr lang="ru-RU" dirty="0"/>
+              <a:t>* и ничего не возвращает.</a:t>
+            </a:r>
+          </a:p>
+          <a:p>
+            <a:r>
+              <a:rPr lang="ru-RU" dirty="0"/>
+              <a:t>Использование </a:t>
+            </a:r>
+            <a:r>
+              <a:rPr lang="ru-RU" dirty="0" err="1"/>
+              <a:t>void</a:t>
+            </a:r>
+            <a:r>
+              <a:rPr lang="ru-RU" dirty="0"/>
+              <a:t>* позволяет передавать в такую функцию произвольные данные. Это делает интерфейс универсальным, поскольку он не зависит от конкретного типа параметров.</a:t>
             </a:r>
           </a:p>
           <a:p>
@@ -4532,29 +4092,21 @@
           <a:p>
             <a:r>
               <a:rPr lang="ru-RU" dirty="0"/>
-              <a:t>На иллюстрации это показано следующим образом. Справа изображена оперативная память, а слева — кеш. Цветные полосы соответствуют отдельным </a:t>
+              <a:t>Функция </a:t>
             </a:r>
             <a:r>
               <a:rPr lang="ru-RU" dirty="0" err="1"/>
-              <a:t>cache</a:t>
-            </a:r>
-            <a:r>
-              <a:rPr lang="ru-RU" dirty="0"/>
-              <a:t> </a:t>
-            </a:r>
-            <a:r>
-              <a:rPr lang="ru-RU" dirty="0" err="1"/>
-              <a:t>line</a:t>
-            </a:r>
-            <a:r>
-              <a:rPr lang="ru-RU" dirty="0"/>
-              <a:t>, которые были загружены из памяти в кеш.</a:t>
-            </a:r>
-          </a:p>
-          <a:p>
-            <a:r>
-              <a:rPr lang="ru-RU" dirty="0"/>
-              <a:t>Обратите внимание, что при загрузке одного блока из оперативной памяти в кеш переносится целая непрерывная область адресов. Это делается не случайно, а исходя из предположения о пространственной локальности.</a:t>
+              <a:t>Measure</a:t>
+            </a:r>
+            <a:r>
+              <a:rPr lang="ru-RU" dirty="0"/>
+              <a:t> принимает имя измеряемого алгоритма, указатель на функцию и указатель на контекст. Она измеряет время до и после вызова функции и выводит разницу.</a:t>
+            </a:r>
+          </a:p>
+          <a:p>
+            <a:r>
+              <a:rPr lang="ru-RU" dirty="0"/>
+              <a:t>Таким образом, мы получаем универсальную функцию для измерения времени работы любых алгоритмов.</a:t>
             </a:r>
           </a:p>
           <a:p>
@@ -4563,99 +4115,11 @@
           <a:p>
             <a:r>
               <a:rPr lang="ru-RU" dirty="0"/>
-              <a:t>Процессор предполагает, что если программа обратилась к некоторому адресу, то с высокой вероятностью она скоро обратится к соседним адресам. Поэтому выгоднее сразу загрузить их все.</a:t>
-            </a:r>
-          </a:p>
-          <a:p>
-            <a:endParaRPr lang="ru-RU" dirty="0"/>
-          </a:p>
-          <a:p>
-            <a:r>
-              <a:rPr lang="ru-RU" dirty="0"/>
-              <a:t>Именно поэтому последовательный обход массива работает очень эффективно. Когда мы читаем первый элемент, в кеш загружается вся </a:t>
-            </a:r>
-            <a:r>
-              <a:rPr lang="ru-RU" dirty="0" err="1"/>
-              <a:t>cache</a:t>
-            </a:r>
-            <a:r>
-              <a:rPr lang="ru-RU" dirty="0"/>
-              <a:t> </a:t>
-            </a:r>
-            <a:r>
-              <a:rPr lang="ru-RU" dirty="0" err="1"/>
-              <a:t>line</a:t>
-            </a:r>
-            <a:r>
-              <a:rPr lang="ru-RU" dirty="0"/>
-              <a:t>, содержащая и следующие элементы. Последующие обращения к этим данным происходят уже без дополнительных обращений к оперативной памяти.</a:t>
-            </a:r>
-          </a:p>
-          <a:p>
-            <a:endParaRPr lang="ru-RU" dirty="0"/>
-          </a:p>
-          <a:p>
-            <a:r>
-              <a:rPr lang="ru-RU" dirty="0"/>
-              <a:t>Если же доступ к данным происходит с большим шагом, например при обходе матрицы по столбцам, то каждый раз загружается новая </a:t>
-            </a:r>
-            <a:r>
-              <a:rPr lang="ru-RU" dirty="0" err="1"/>
-              <a:t>cache</a:t>
-            </a:r>
-            <a:r>
-              <a:rPr lang="ru-RU" dirty="0"/>
-              <a:t> </a:t>
-            </a:r>
-            <a:r>
-              <a:rPr lang="ru-RU" dirty="0" err="1"/>
-              <a:t>line</a:t>
-            </a:r>
-            <a:r>
-              <a:rPr lang="ru-RU" dirty="0"/>
-              <a:t>, а данные из предыдущих линий могут не использоваться. Это приводит к большому количеству </a:t>
-            </a:r>
-            <a:r>
-              <a:rPr lang="ru-RU" dirty="0" err="1"/>
-              <a:t>cache</a:t>
-            </a:r>
-            <a:r>
-              <a:rPr lang="ru-RU" dirty="0"/>
-              <a:t> </a:t>
-            </a:r>
-            <a:r>
-              <a:rPr lang="ru-RU" dirty="0" err="1"/>
-              <a:t>miss</a:t>
-            </a:r>
-            <a:r>
-              <a:rPr lang="ru-RU" dirty="0"/>
-              <a:t> и снижению производительности.</a:t>
-            </a:r>
-          </a:p>
-          <a:p>
-            <a:endParaRPr lang="ru-RU" dirty="0"/>
-          </a:p>
-          <a:p>
-            <a:r>
-              <a:rPr lang="ru-RU" dirty="0"/>
-              <a:t>Таким образом, </a:t>
-            </a:r>
-            <a:r>
-              <a:rPr lang="ru-RU" dirty="0" err="1"/>
-              <a:t>cache</a:t>
-            </a:r>
-            <a:r>
-              <a:rPr lang="ru-RU" dirty="0"/>
-              <a:t> </a:t>
-            </a:r>
-            <a:r>
-              <a:rPr lang="ru-RU" dirty="0" err="1"/>
-              <a:t>line</a:t>
-            </a:r>
-            <a:r>
-              <a:rPr lang="ru-RU" dirty="0"/>
-              <a:t> является ключевым элементом, объясняющим, почему последовательный доступ к памяти работает значительно быстрее, чем случайный или разреженный доступ.</a:t>
-            </a:r>
+              <a:t>Далее мы будем использовать этот механизм на следующих слайдах, чтобы сравнивать различные способы работы с памятью и наблюдать, как они влияют на производительность.</a:t>
+            </a:r>
+          </a:p>
+          <a:p>
+            <a:endParaRPr lang="en-US" dirty="0"/>
           </a:p>
         </p:txBody>
       </p:sp>
@@ -4674,9 +4138,9 @@
           <a:bodyPr/>
           <a:lstStyle/>
           <a:p>
-            <a:fld id="{8740D86D-1409-43B0-8811-9A559436DAB5}" type="slidenum">
+            <a:fld id="{87259E61-CD8F-4EDB-89B2-A2524EC5B40A}" type="slidenum">
               <a:rPr lang="en-US" smtClean="0"/>
-              <a:t>28</a:t>
+              <a:t>26</a:t>
             </a:fld>
             <a:endParaRPr lang="en-US"/>
           </a:p>
@@ -4685,7 +4149,7 @@
     </p:spTree>
     <p:extLst>
       <p:ext uri="{BB962C8B-B14F-4D97-AF65-F5344CB8AC3E}">
-        <p14:creationId xmlns:p14="http://schemas.microsoft.com/office/powerpoint/2010/main" val="1738147726"/>
+        <p14:creationId xmlns:p14="http://schemas.microsoft.com/office/powerpoint/2010/main" val="3237445916"/>
       </p:ext>
     </p:extLst>
   </p:cSld>
@@ -4741,7 +4205,7 @@
           <a:p>
             <a:r>
               <a:rPr lang="ru-RU" dirty="0"/>
-              <a:t>На этом слайде показан более тонкий эксперимент, чем пример с матрицей.</a:t>
+              <a:t>На этом слайде показан очень показательный пример влияния локальности доступа к данным на производительность программы.</a:t>
             </a:r>
           </a:p>
           <a:p>
@@ -4750,7 +4214,7 @@
           <a:p>
             <a:r>
               <a:rPr lang="ru-RU" dirty="0"/>
-              <a:t>Здесь мы работаем с массивом размером ровно 64 байта, то есть он целиком помещается в одну кеш-линию. Кроме того, массив явно выровнен по границе кеш-линии.</a:t>
+              <a:t>Мы работаем с матрицей, которая хранится в памяти как один непрерывный массив. В языке C элементы матрицы располагаются построчно, то есть сначала идут элементы первой строки, затем второй и так далее.</a:t>
             </a:r>
           </a:p>
           <a:p>
@@ -4759,7 +4223,258 @@
           <a:p>
             <a:r>
               <a:rPr lang="ru-RU" dirty="0"/>
-              <a:t>Это означает, что после первого обращения весь массив оказывается в кеше, и дальнейшие обращения не вызывают </a:t>
+              <a:t>Перед тем как обсуждать результаты, обратим внимание на организацию измерения времени. Наша функция </a:t>
+            </a:r>
+            <a:r>
+              <a:rPr lang="ru-RU" dirty="0" err="1"/>
+              <a:t>Measure</a:t>
+            </a:r>
+            <a:r>
+              <a:rPr lang="ru-RU" dirty="0"/>
+              <a:t> ожидает указатель на функцию с сигнатурой </a:t>
+            </a:r>
+            <a:r>
+              <a:rPr lang="ru-RU" sz="1200" kern="1200" dirty="0" err="1">
+                <a:solidFill>
+                  <a:schemeClr val="tx1"/>
+                </a:solidFill>
+                <a:latin typeface="+mn-lt"/>
+                <a:ea typeface="+mn-ea"/>
+                <a:cs typeface="+mn-cs"/>
+              </a:rPr>
+              <a:t>void</a:t>
+            </a:r>
+            <a:r>
+              <a:rPr lang="ru-RU" sz="1200" kern="1200" dirty="0">
+                <a:solidFill>
+                  <a:schemeClr val="tx1"/>
+                </a:solidFill>
+                <a:latin typeface="+mn-lt"/>
+                <a:ea typeface="+mn-ea"/>
+                <a:cs typeface="+mn-cs"/>
+              </a:rPr>
+              <a:t> (*)(</a:t>
+            </a:r>
+            <a:r>
+              <a:rPr lang="ru-RU" sz="1200" kern="1200" dirty="0" err="1">
+                <a:solidFill>
+                  <a:schemeClr val="tx1"/>
+                </a:solidFill>
+                <a:latin typeface="+mn-lt"/>
+                <a:ea typeface="+mn-ea"/>
+                <a:cs typeface="+mn-cs"/>
+              </a:rPr>
+              <a:t>void</a:t>
+            </a:r>
+            <a:r>
+              <a:rPr lang="ru-RU" sz="1200" kern="1200" dirty="0">
+                <a:solidFill>
+                  <a:schemeClr val="tx1"/>
+                </a:solidFill>
+                <a:latin typeface="+mn-lt"/>
+                <a:ea typeface="+mn-ea"/>
+                <a:cs typeface="+mn-cs"/>
+              </a:rPr>
+              <a:t>*)</a:t>
+            </a:r>
+            <a:r>
+              <a:rPr lang="ru-RU" dirty="0"/>
+              <a:t>. Однако функции </a:t>
+            </a:r>
+            <a:r>
+              <a:rPr lang="ru-RU" dirty="0" err="1"/>
+              <a:t>RowMajor</a:t>
+            </a:r>
+            <a:r>
+              <a:rPr lang="ru-RU" dirty="0"/>
+              <a:t> и </a:t>
+            </a:r>
+            <a:r>
+              <a:rPr lang="ru-RU" dirty="0" err="1"/>
+              <a:t>ColumnMajor</a:t>
+            </a:r>
+            <a:r>
+              <a:rPr lang="ru-RU" dirty="0"/>
+              <a:t> имеют другую сигнатуру — они принимают указатель на массив типа </a:t>
+            </a:r>
+            <a:r>
+              <a:rPr lang="ru-RU" sz="1200" kern="1200" dirty="0" err="1">
+                <a:solidFill>
+                  <a:schemeClr val="tx1"/>
+                </a:solidFill>
+                <a:latin typeface="+mn-lt"/>
+                <a:ea typeface="+mn-ea"/>
+                <a:cs typeface="+mn-cs"/>
+              </a:rPr>
+              <a:t>int</a:t>
+            </a:r>
+            <a:r>
+              <a:rPr lang="ru-RU" sz="1200" kern="1200" dirty="0">
+                <a:solidFill>
+                  <a:schemeClr val="tx1"/>
+                </a:solidFill>
+                <a:latin typeface="+mn-lt"/>
+                <a:ea typeface="+mn-ea"/>
+                <a:cs typeface="+mn-cs"/>
+              </a:rPr>
+              <a:t>*</a:t>
+            </a:r>
+            <a:r>
+              <a:rPr lang="ru-RU" dirty="0"/>
+              <a:t>.</a:t>
+            </a:r>
+          </a:p>
+          <a:p>
+            <a:r>
+              <a:rPr lang="ru-RU" dirty="0"/>
+              <a:t>Чтобы согласовать эти интерфейсы, мы вводим структуру </a:t>
+            </a:r>
+            <a:r>
+              <a:rPr lang="ru-RU" dirty="0" err="1"/>
+              <a:t>MatrixContext</a:t>
+            </a:r>
+            <a:r>
+              <a:rPr lang="ru-RU" dirty="0"/>
+              <a:t>. В ней мы храним два элемента: указатель на функцию, которую нужно вызвать, и указатель на данные, с которыми эта функция должна работать.</a:t>
+            </a:r>
+          </a:p>
+          <a:p>
+            <a:r>
+              <a:rPr lang="ru-RU" dirty="0"/>
+              <a:t>Далее вводится функция </a:t>
+            </a:r>
+            <a:r>
+              <a:rPr lang="ru-RU" dirty="0" err="1"/>
+              <a:t>MatrixMeasured</a:t>
+            </a:r>
+            <a:r>
+              <a:rPr lang="ru-RU" dirty="0"/>
+              <a:t>. Она принимает универсальный указатель </a:t>
+            </a:r>
+            <a:r>
+              <a:rPr lang="ru-RU" sz="1200" kern="1200" dirty="0" err="1">
+                <a:solidFill>
+                  <a:schemeClr val="tx1"/>
+                </a:solidFill>
+                <a:latin typeface="+mn-lt"/>
+                <a:ea typeface="+mn-ea"/>
+                <a:cs typeface="+mn-cs"/>
+              </a:rPr>
+              <a:t>void</a:t>
+            </a:r>
+            <a:r>
+              <a:rPr lang="ru-RU" sz="1200" kern="1200" dirty="0">
+                <a:solidFill>
+                  <a:schemeClr val="tx1"/>
+                </a:solidFill>
+                <a:latin typeface="+mn-lt"/>
+                <a:ea typeface="+mn-ea"/>
+                <a:cs typeface="+mn-cs"/>
+              </a:rPr>
+              <a:t>*</a:t>
+            </a:r>
+            <a:r>
+              <a:rPr lang="ru-RU" dirty="0"/>
+              <a:t>, приводит его к типу </a:t>
+            </a:r>
+            <a:r>
+              <a:rPr lang="ru-RU" dirty="0" err="1"/>
+              <a:t>MatrixContext</a:t>
+            </a:r>
+            <a:r>
+              <a:rPr lang="ru-RU" dirty="0"/>
+              <a:t> и затем вызывает нужную функцию, передавая ей данные.</a:t>
+            </a:r>
+          </a:p>
+          <a:p>
+            <a:r>
+              <a:rPr lang="ru-RU" dirty="0"/>
+              <a:t>Таким образом, мы применяем уже знакомый нам паттерн: функция плюс контекст. Это позволяет использовать универсальную функцию </a:t>
+            </a:r>
+            <a:r>
+              <a:rPr lang="ru-RU" dirty="0" err="1"/>
+              <a:t>Measure</a:t>
+            </a:r>
+            <a:r>
+              <a:rPr lang="ru-RU" dirty="0"/>
+              <a:t> для вызова алгоритмов с произвольными параметрами.</a:t>
+            </a:r>
+          </a:p>
+          <a:p>
+            <a:endParaRPr lang="ru-RU" dirty="0"/>
+          </a:p>
+          <a:p>
+            <a:r>
+              <a:rPr lang="ru-RU" dirty="0"/>
+              <a:t>Теперь вернёмся к сути примера.</a:t>
+            </a:r>
+          </a:p>
+          <a:p>
+            <a:r>
+              <a:rPr lang="ru-RU" dirty="0"/>
+              <a:t>В функции </a:t>
+            </a:r>
+            <a:r>
+              <a:rPr lang="ru-RU" dirty="0" err="1"/>
+              <a:t>RowMajor</a:t>
+            </a:r>
+            <a:r>
+              <a:rPr lang="ru-RU" dirty="0"/>
+              <a:t> мы обходим матрицу построчно. Это означает, что доступ к памяти происходит последовательно, по соседним адресам.</a:t>
+            </a:r>
+          </a:p>
+          <a:p>
+            <a:r>
+              <a:rPr lang="ru-RU" dirty="0"/>
+              <a:t>В функции </a:t>
+            </a:r>
+            <a:r>
+              <a:rPr lang="ru-RU" dirty="0" err="1"/>
+              <a:t>ColumnMajor</a:t>
+            </a:r>
+            <a:r>
+              <a:rPr lang="ru-RU" dirty="0"/>
+              <a:t> порядок обхода меняется. Мы фиксируем столбец и проходим по строкам. В результате обращения к памяти происходят с большим шагом, равным размеру строки.</a:t>
+            </a:r>
+          </a:p>
+          <a:p>
+            <a:endParaRPr lang="ru-RU" dirty="0"/>
+          </a:p>
+          <a:p>
+            <a:r>
+              <a:rPr lang="ru-RU" dirty="0"/>
+              <a:t>С точки зрения логики программы обе функции делают одно и то же. Однако время выполнения отличается на порядок.</a:t>
+            </a:r>
+          </a:p>
+          <a:p>
+            <a:endParaRPr lang="ru-RU" dirty="0"/>
+          </a:p>
+          <a:p>
+            <a:r>
+              <a:rPr lang="ru-RU" dirty="0"/>
+              <a:t>Причина заключается в работе кеш-памяти. В случае </a:t>
+            </a:r>
+            <a:r>
+              <a:rPr lang="ru-RU" dirty="0" err="1"/>
+              <a:t>RowMajor</a:t>
+            </a:r>
+            <a:r>
+              <a:rPr lang="ru-RU" dirty="0"/>
+              <a:t> доступ обладает хорошей пространственной локальностью. Когда процессор загружает данные в кеш, он подгружает сразу целый блок памяти, и последующие обращения попадают в кеш.</a:t>
+            </a:r>
+          </a:p>
+          <a:p>
+            <a:r>
+              <a:rPr lang="ru-RU" dirty="0"/>
+              <a:t>В случае </a:t>
+            </a:r>
+            <a:r>
+              <a:rPr lang="ru-RU" dirty="0" err="1"/>
+              <a:t>ColumnMajor</a:t>
+            </a:r>
+            <a:r>
+              <a:rPr lang="ru-RU" dirty="0"/>
+              <a:t> пространственная локальность нарушается. Мы обращаемся к элементам, которые находятся далеко друг от друга в памяти. Почти каждое обращение приводит к </a:t>
             </a:r>
             <a:r>
               <a:rPr lang="ru-RU" dirty="0" err="1"/>
@@ -4775,7 +4490,13 @@
             </a:r>
             <a:r>
               <a:rPr lang="ru-RU" dirty="0"/>
-              <a:t>. Таким образом, мы исключаем влияние медленной оперативной памяти и рассматриваем только доступ внутри кеша.</a:t>
+              <a:t>, и процессор вынужден снова и снова обращаться к более медленным уровням памяти.</a:t>
+            </a:r>
+          </a:p>
+          <a:p>
+            <a:r>
+              <a:rPr lang="ru-RU" dirty="0"/>
+              <a:t>В результате программа тратит большую часть времени не на вычисления, а на ожидание данных из памяти.</a:t>
             </a:r>
           </a:p>
           <a:p>
@@ -4784,141 +4505,7 @@
           <a:p>
             <a:r>
               <a:rPr lang="ru-RU" dirty="0"/>
-              <a:t>С точки зрения организации кода, здесь используется тот же универсальный механизм измерения. В качестве контекста передаётся структура </a:t>
-            </a:r>
-            <a:r>
-              <a:rPr lang="ru-RU" dirty="0" err="1"/>
-              <a:t>SumContext</a:t>
-            </a:r>
-            <a:r>
-              <a:rPr lang="ru-RU" dirty="0"/>
-              <a:t>, которая содержит параметры x и y, определяющие способ перехода между элементами массива.</a:t>
-            </a:r>
-          </a:p>
-          <a:p>
-            <a:endParaRPr lang="ru-RU" dirty="0"/>
-          </a:p>
-          <a:p>
-            <a:r>
-              <a:rPr lang="ru-RU" dirty="0"/>
-              <a:t>Функция </a:t>
-            </a:r>
-            <a:r>
-              <a:rPr lang="ru-RU" dirty="0" err="1"/>
-              <a:t>SumCacheLine</a:t>
-            </a:r>
-            <a:r>
-              <a:rPr lang="ru-RU" dirty="0"/>
-              <a:t> многократно обращается к элементам массива. Индекс следующего элемента вычисляется по формуле </a:t>
-            </a:r>
-            <a:r>
-              <a:rPr lang="ru-RU" dirty="0" err="1"/>
-              <a:t>pos</a:t>
-            </a:r>
-            <a:r>
-              <a:rPr lang="ru-RU" dirty="0"/>
-              <a:t> = (</a:t>
-            </a:r>
-            <a:r>
-              <a:rPr lang="ru-RU" dirty="0" err="1"/>
-              <a:t>pos</a:t>
-            </a:r>
-            <a:r>
-              <a:rPr lang="ru-RU" dirty="0"/>
-              <a:t> * x + y) </a:t>
-            </a:r>
-            <a:r>
-              <a:rPr lang="ru-RU" dirty="0" err="1"/>
-              <a:t>mod</a:t>
-            </a:r>
-            <a:r>
-              <a:rPr lang="ru-RU" dirty="0"/>
-              <a:t> </a:t>
-            </a:r>
-            <a:r>
-              <a:rPr lang="ru-RU" dirty="0" err="1"/>
-              <a:t>sizeof</a:t>
-            </a:r>
-            <a:r>
-              <a:rPr lang="ru-RU" dirty="0"/>
-              <a:t>(</a:t>
-            </a:r>
-            <a:r>
-              <a:rPr lang="ru-RU" dirty="0" err="1"/>
-              <a:t>gData</a:t>
-            </a:r>
-            <a:r>
-              <a:rPr lang="ru-RU" dirty="0"/>
-              <a:t>). В данном случае размер </a:t>
-            </a:r>
-            <a:r>
-              <a:rPr lang="ru-RU" dirty="0" err="1"/>
-              <a:t>gData</a:t>
-            </a:r>
-            <a:r>
-              <a:rPr lang="ru-RU" dirty="0"/>
-              <a:t> равен размеру одной кеш-линии.</a:t>
-            </a:r>
-          </a:p>
-          <a:p>
-            <a:r>
-              <a:rPr lang="ru-RU" dirty="0"/>
-              <a:t>В случае </a:t>
-            </a:r>
-            <a:r>
-              <a:rPr lang="ru-RU" dirty="0" err="1"/>
-              <a:t>sequential</a:t>
-            </a:r>
-            <a:r>
-              <a:rPr lang="ru-RU" dirty="0"/>
-              <a:t> доступ происходит последовательно, а в случае </a:t>
-            </a:r>
-            <a:r>
-              <a:rPr lang="ru-RU" dirty="0" err="1"/>
-              <a:t>pseudo-random</a:t>
-            </a:r>
-            <a:r>
-              <a:rPr lang="ru-RU" dirty="0"/>
-              <a:t> — в псевдослучайном порядке, но всё ещё в пределах одной кеш-линии.</a:t>
-            </a:r>
-          </a:p>
-          <a:p>
-            <a:endParaRPr lang="ru-RU" dirty="0"/>
-          </a:p>
-          <a:p>
-            <a:r>
-              <a:rPr lang="ru-RU" dirty="0"/>
-              <a:t>Обратите внимание на результаты. В отличие от предыдущего примера, здесь разница во времени небольшая и может даже меняться от запуска к запуску.</a:t>
-            </a:r>
-          </a:p>
-          <a:p>
-            <a:r>
-              <a:rPr lang="ru-RU" dirty="0"/>
-              <a:t>Это важный момент. Такие различия находятся на уровне шумов измерения. На результат влияют множество факторов: активность операционной системы, другие процессы, особенности планировщика, а также динамическое изменение частоты процессора.</a:t>
-            </a:r>
-          </a:p>
-          <a:p>
-            <a:r>
-              <a:rPr lang="ru-RU" dirty="0"/>
-              <a:t>Поэтому в данном эксперименте не стоит делать сильных выводов о том, что один способ доступа принципиально быстрее другого.</a:t>
-            </a:r>
-          </a:p>
-          <a:p>
-            <a:endParaRPr lang="ru-RU" dirty="0"/>
-          </a:p>
-          <a:p>
-            <a:r>
-              <a:rPr lang="ru-RU" dirty="0"/>
-              <a:t>Основная идея этого примера в другом. Он показывает, что если данные уже находятся в одной кеш-линии, то порядок доступа к ним оказывает гораздо меньшее влияние на производительность, чем в случае обращения к разным кеш-линиям или к оперативной памяти.</a:t>
-            </a:r>
-          </a:p>
-          <a:p>
-            <a:endParaRPr lang="ru-RU" dirty="0"/>
-          </a:p>
-          <a:p>
-            <a:r>
-              <a:rPr lang="ru-RU" dirty="0"/>
-              <a:t>Иными словами, основной выигрыш даёт попадание в кеш, а не тонкие различия в порядке обхода внутри него.</a:t>
+              <a:t>Этот пример показывает, что даже при одинаковом количестве операций и одинаковом алгоритме порядок доступа к данным может кардинально изменить производительность программы.</a:t>
             </a:r>
           </a:p>
         </p:txBody>
@@ -4940,6 +4527,535 @@
           <a:p>
             <a:fld id="{8740D86D-1409-43B0-8811-9A559436DAB5}" type="slidenum">
               <a:rPr lang="en-US" smtClean="0"/>
+              <a:t>27</a:t>
+            </a:fld>
+            <a:endParaRPr lang="en-US"/>
+          </a:p>
+        </p:txBody>
+      </p:sp>
+    </p:spTree>
+    <p:extLst>
+      <p:ext uri="{BB962C8B-B14F-4D97-AF65-F5344CB8AC3E}">
+        <p14:creationId xmlns:p14="http://schemas.microsoft.com/office/powerpoint/2010/main" val="2752448003"/>
+      </p:ext>
+    </p:extLst>
+  </p:cSld>
+  <p:clrMapOvr>
+    <a:masterClrMapping/>
+  </p:clrMapOvr>
+</p:notes>
+</file>
+
+<file path=ppt/notesSlides/notesSlide28.xml><?xml version="1.0" encoding="utf-8"?>
+<p:notes xmlns:a="http://schemas.openxmlformats.org/drawingml/2006/main" xmlns:r="http://schemas.openxmlformats.org/officeDocument/2006/relationships" xmlns:p="http://schemas.openxmlformats.org/presentationml/2006/main">
+  <p:cSld>
+    <p:spTree>
+      <p:nvGrpSpPr>
+        <p:cNvPr id="1" name=""/>
+        <p:cNvGrpSpPr/>
+        <p:nvPr/>
+      </p:nvGrpSpPr>
+      <p:grpSpPr>
+        <a:xfrm>
+          <a:off x="0" y="0"/>
+          <a:ext cx="0" cy="0"/>
+          <a:chOff x="0" y="0"/>
+          <a:chExt cx="0" cy="0"/>
+        </a:xfrm>
+      </p:grpSpPr>
+      <p:sp>
+        <p:nvSpPr>
+          <p:cNvPr id="2" name="Slide Image Placeholder 1"/>
+          <p:cNvSpPr>
+            <a:spLocks noGrp="1" noRot="1" noChangeAspect="1"/>
+          </p:cNvSpPr>
+          <p:nvPr>
+            <p:ph type="sldImg"/>
+          </p:nvPr>
+        </p:nvSpPr>
+        <p:spPr/>
+      </p:sp>
+      <p:sp>
+        <p:nvSpPr>
+          <p:cNvPr id="3" name="Notes Placeholder 2"/>
+          <p:cNvSpPr>
+            <a:spLocks noGrp="1"/>
+          </p:cNvSpPr>
+          <p:nvPr>
+            <p:ph type="body" idx="1"/>
+          </p:nvPr>
+        </p:nvSpPr>
+        <p:spPr/>
+        <p:txBody>
+          <a:bodyPr/>
+          <a:lstStyle/>
+          <a:p>
+            <a:r>
+              <a:rPr lang="ru-RU" dirty="0"/>
+              <a:t>Важно понимать, что процессор работает с памятью не на уровне отдельных байтов или переменных, а на уровне блоков.</a:t>
+            </a:r>
+          </a:p>
+          <a:p>
+            <a:r>
+              <a:rPr lang="ru-RU" dirty="0"/>
+              <a:t>Когда происходит обращение к памяти, в кеш загружается не один конкретный элемент, а целый блок данных, который называется </a:t>
+            </a:r>
+            <a:r>
+              <a:rPr lang="ru-RU" dirty="0" err="1"/>
+              <a:t>cache</a:t>
+            </a:r>
+            <a:r>
+              <a:rPr lang="ru-RU" dirty="0"/>
+              <a:t> </a:t>
+            </a:r>
+            <a:r>
+              <a:rPr lang="ru-RU" dirty="0" err="1"/>
+              <a:t>line</a:t>
+            </a:r>
+            <a:r>
+              <a:rPr lang="ru-RU" dirty="0"/>
+              <a:t> (кеш-линия).</a:t>
+            </a:r>
+          </a:p>
+          <a:p>
+            <a:endParaRPr lang="ru-RU" dirty="0"/>
+          </a:p>
+          <a:p>
+            <a:r>
+              <a:rPr lang="ru-RU" dirty="0"/>
+              <a:t>Типичный размер </a:t>
+            </a:r>
+            <a:r>
+              <a:rPr lang="ru-RU" dirty="0" err="1"/>
+              <a:t>cache</a:t>
+            </a:r>
+            <a:r>
+              <a:rPr lang="ru-RU" dirty="0"/>
+              <a:t> </a:t>
+            </a:r>
+            <a:r>
+              <a:rPr lang="ru-RU" dirty="0" err="1"/>
+              <a:t>line</a:t>
+            </a:r>
+            <a:r>
+              <a:rPr lang="ru-RU" dirty="0"/>
+              <a:t> составляет 64 байт, хотя он может отличаться в зависимости от архитектуры процессора. Это означает, что при обращении, например, к одному элементу массива, процессор фактически загружает в кеш сразу несколько соседних элементов.</a:t>
+            </a:r>
+          </a:p>
+          <a:p>
+            <a:endParaRPr lang="ru-RU" dirty="0"/>
+          </a:p>
+          <a:p>
+            <a:r>
+              <a:rPr lang="ru-RU" dirty="0"/>
+              <a:t>На иллюстрации это показано следующим образом. Справа изображена оперативная память, а слева — кеш. Цветные полосы соответствуют отдельным </a:t>
+            </a:r>
+            <a:r>
+              <a:rPr lang="ru-RU" dirty="0" err="1"/>
+              <a:t>cache</a:t>
+            </a:r>
+            <a:r>
+              <a:rPr lang="ru-RU" dirty="0"/>
+              <a:t> </a:t>
+            </a:r>
+            <a:r>
+              <a:rPr lang="ru-RU" dirty="0" err="1"/>
+              <a:t>line</a:t>
+            </a:r>
+            <a:r>
+              <a:rPr lang="ru-RU" dirty="0"/>
+              <a:t>, которые были загружены из памяти в кеш.</a:t>
+            </a:r>
+          </a:p>
+          <a:p>
+            <a:r>
+              <a:rPr lang="ru-RU" dirty="0"/>
+              <a:t>Обратите внимание, что при загрузке одного блока из оперативной памяти в кеш переносится целая непрерывная область адресов. Это делается не случайно, а исходя из предположения о пространственной локальности.</a:t>
+            </a:r>
+          </a:p>
+          <a:p>
+            <a:endParaRPr lang="ru-RU" dirty="0"/>
+          </a:p>
+          <a:p>
+            <a:r>
+              <a:rPr lang="ru-RU" dirty="0"/>
+              <a:t>Процессор предполагает, что если программа обратилась к некоторому адресу, то с высокой вероятностью она скоро обратится к соседним адресам. Поэтому выгоднее сразу загрузить их все.</a:t>
+            </a:r>
+          </a:p>
+          <a:p>
+            <a:endParaRPr lang="ru-RU" dirty="0"/>
+          </a:p>
+          <a:p>
+            <a:r>
+              <a:rPr lang="ru-RU" dirty="0"/>
+              <a:t>Именно поэтому последовательный обход массива работает очень эффективно. Когда мы читаем первый элемент, в кеш загружается вся </a:t>
+            </a:r>
+            <a:r>
+              <a:rPr lang="ru-RU" dirty="0" err="1"/>
+              <a:t>cache</a:t>
+            </a:r>
+            <a:r>
+              <a:rPr lang="ru-RU" dirty="0"/>
+              <a:t> </a:t>
+            </a:r>
+            <a:r>
+              <a:rPr lang="ru-RU" dirty="0" err="1"/>
+              <a:t>line</a:t>
+            </a:r>
+            <a:r>
+              <a:rPr lang="ru-RU" dirty="0"/>
+              <a:t>, содержащая и следующие элементы. Последующие обращения к этим данным происходят уже без дополнительных обращений к оперативной памяти.</a:t>
+            </a:r>
+          </a:p>
+          <a:p>
+            <a:endParaRPr lang="ru-RU" dirty="0"/>
+          </a:p>
+          <a:p>
+            <a:r>
+              <a:rPr lang="ru-RU" dirty="0"/>
+              <a:t>Если же доступ к данным происходит с большим шагом, например при обходе матрицы по столбцам, то каждый раз загружается новая </a:t>
+            </a:r>
+            <a:r>
+              <a:rPr lang="ru-RU" dirty="0" err="1"/>
+              <a:t>cache</a:t>
+            </a:r>
+            <a:r>
+              <a:rPr lang="ru-RU" dirty="0"/>
+              <a:t> </a:t>
+            </a:r>
+            <a:r>
+              <a:rPr lang="ru-RU" dirty="0" err="1"/>
+              <a:t>line</a:t>
+            </a:r>
+            <a:r>
+              <a:rPr lang="ru-RU" dirty="0"/>
+              <a:t>, а данные из предыдущих линий могут не использоваться. Это приводит к большому количеству </a:t>
+            </a:r>
+            <a:r>
+              <a:rPr lang="ru-RU" dirty="0" err="1"/>
+              <a:t>cache</a:t>
+            </a:r>
+            <a:r>
+              <a:rPr lang="ru-RU" dirty="0"/>
+              <a:t> </a:t>
+            </a:r>
+            <a:r>
+              <a:rPr lang="ru-RU" dirty="0" err="1"/>
+              <a:t>miss</a:t>
+            </a:r>
+            <a:r>
+              <a:rPr lang="ru-RU" dirty="0"/>
+              <a:t> и снижению производительности.</a:t>
+            </a:r>
+          </a:p>
+          <a:p>
+            <a:endParaRPr lang="ru-RU" dirty="0"/>
+          </a:p>
+          <a:p>
+            <a:r>
+              <a:rPr lang="ru-RU" dirty="0"/>
+              <a:t>Таким образом, </a:t>
+            </a:r>
+            <a:r>
+              <a:rPr lang="ru-RU" dirty="0" err="1"/>
+              <a:t>cache</a:t>
+            </a:r>
+            <a:r>
+              <a:rPr lang="ru-RU" dirty="0"/>
+              <a:t> </a:t>
+            </a:r>
+            <a:r>
+              <a:rPr lang="ru-RU" dirty="0" err="1"/>
+              <a:t>line</a:t>
+            </a:r>
+            <a:r>
+              <a:rPr lang="ru-RU" dirty="0"/>
+              <a:t> является ключевым элементом, объясняющим, почему последовательный доступ к памяти работает значительно быстрее, чем случайный или разреженный доступ.</a:t>
+            </a:r>
+          </a:p>
+        </p:txBody>
+      </p:sp>
+      <p:sp>
+        <p:nvSpPr>
+          <p:cNvPr id="4" name="Slide Number Placeholder 3"/>
+          <p:cNvSpPr>
+            <a:spLocks noGrp="1"/>
+          </p:cNvSpPr>
+          <p:nvPr>
+            <p:ph type="sldNum" sz="quarter" idx="5"/>
+          </p:nvPr>
+        </p:nvSpPr>
+        <p:spPr/>
+        <p:txBody>
+          <a:bodyPr/>
+          <a:lstStyle/>
+          <a:p>
+            <a:fld id="{8740D86D-1409-43B0-8811-9A559436DAB5}" type="slidenum">
+              <a:rPr lang="en-US" smtClean="0"/>
+              <a:t>28</a:t>
+            </a:fld>
+            <a:endParaRPr lang="en-US"/>
+          </a:p>
+        </p:txBody>
+      </p:sp>
+    </p:spTree>
+    <p:extLst>
+      <p:ext uri="{BB962C8B-B14F-4D97-AF65-F5344CB8AC3E}">
+        <p14:creationId xmlns:p14="http://schemas.microsoft.com/office/powerpoint/2010/main" val="1738147726"/>
+      </p:ext>
+    </p:extLst>
+  </p:cSld>
+  <p:clrMapOvr>
+    <a:masterClrMapping/>
+  </p:clrMapOvr>
+</p:notes>
+</file>
+
+<file path=ppt/notesSlides/notesSlide29.xml><?xml version="1.0" encoding="utf-8"?>
+<p:notes xmlns:a="http://schemas.openxmlformats.org/drawingml/2006/main" xmlns:r="http://schemas.openxmlformats.org/officeDocument/2006/relationships" xmlns:p="http://schemas.openxmlformats.org/presentationml/2006/main">
+  <p:cSld>
+    <p:spTree>
+      <p:nvGrpSpPr>
+        <p:cNvPr id="1" name=""/>
+        <p:cNvGrpSpPr/>
+        <p:nvPr/>
+      </p:nvGrpSpPr>
+      <p:grpSpPr>
+        <a:xfrm>
+          <a:off x="0" y="0"/>
+          <a:ext cx="0" cy="0"/>
+          <a:chOff x="0" y="0"/>
+          <a:chExt cx="0" cy="0"/>
+        </a:xfrm>
+      </p:grpSpPr>
+      <p:sp>
+        <p:nvSpPr>
+          <p:cNvPr id="2" name="Slide Image Placeholder 1"/>
+          <p:cNvSpPr>
+            <a:spLocks noGrp="1" noRot="1" noChangeAspect="1"/>
+          </p:cNvSpPr>
+          <p:nvPr>
+            <p:ph type="sldImg"/>
+          </p:nvPr>
+        </p:nvSpPr>
+        <p:spPr/>
+      </p:sp>
+      <p:sp>
+        <p:nvSpPr>
+          <p:cNvPr id="3" name="Notes Placeholder 2"/>
+          <p:cNvSpPr>
+            <a:spLocks noGrp="1"/>
+          </p:cNvSpPr>
+          <p:nvPr>
+            <p:ph type="body" idx="1"/>
+          </p:nvPr>
+        </p:nvSpPr>
+        <p:spPr/>
+        <p:txBody>
+          <a:bodyPr/>
+          <a:lstStyle/>
+          <a:p>
+            <a:r>
+              <a:rPr lang="ru-RU" dirty="0"/>
+              <a:t>На этом слайде показан более тонкий эксперимент, чем пример с матрицей.</a:t>
+            </a:r>
+          </a:p>
+          <a:p>
+            <a:endParaRPr lang="ru-RU" dirty="0"/>
+          </a:p>
+          <a:p>
+            <a:r>
+              <a:rPr lang="ru-RU" dirty="0"/>
+              <a:t>Здесь мы работаем с массивом размером ровно 64 байта, то есть он целиком помещается в одну кеш-линию. Кроме того, массив явно выровнен по границе кеш-линии.</a:t>
+            </a:r>
+          </a:p>
+          <a:p>
+            <a:endParaRPr lang="ru-RU" dirty="0"/>
+          </a:p>
+          <a:p>
+            <a:r>
+              <a:rPr lang="ru-RU" dirty="0"/>
+              <a:t>Это означает, что после первого обращения весь массив оказывается в кеше, и дальнейшие обращения не вызывают </a:t>
+            </a:r>
+            <a:r>
+              <a:rPr lang="ru-RU" dirty="0" err="1"/>
+              <a:t>cache</a:t>
+            </a:r>
+            <a:r>
+              <a:rPr lang="ru-RU" dirty="0"/>
+              <a:t> </a:t>
+            </a:r>
+            <a:r>
+              <a:rPr lang="ru-RU" dirty="0" err="1"/>
+              <a:t>miss</a:t>
+            </a:r>
+            <a:r>
+              <a:rPr lang="ru-RU" dirty="0"/>
+              <a:t>. Таким образом, мы исключаем влияние медленной оперативной памяти и рассматриваем только доступ внутри кеша.</a:t>
+            </a:r>
+          </a:p>
+          <a:p>
+            <a:endParaRPr lang="ru-RU" dirty="0"/>
+          </a:p>
+          <a:p>
+            <a:r>
+              <a:rPr lang="ru-RU" dirty="0"/>
+              <a:t>С точки зрения организации кода, здесь используется тот же универсальный механизм измерения. В качестве контекста передаётся структура </a:t>
+            </a:r>
+            <a:r>
+              <a:rPr lang="ru-RU" dirty="0" err="1"/>
+              <a:t>SumContext</a:t>
+            </a:r>
+            <a:r>
+              <a:rPr lang="ru-RU" dirty="0"/>
+              <a:t>, которая содержит параметры x и y, определяющие способ перехода между элементами массива.</a:t>
+            </a:r>
+          </a:p>
+          <a:p>
+            <a:endParaRPr lang="ru-RU" dirty="0"/>
+          </a:p>
+          <a:p>
+            <a:r>
+              <a:rPr lang="ru-RU" dirty="0"/>
+              <a:t>Функция </a:t>
+            </a:r>
+            <a:r>
+              <a:rPr lang="ru-RU" dirty="0" err="1"/>
+              <a:t>SumCacheLine</a:t>
+            </a:r>
+            <a:r>
+              <a:rPr lang="ru-RU" dirty="0"/>
+              <a:t> многократно обращается к элементам массива. Индекс следующего элемента вычисляется по формуле </a:t>
+            </a:r>
+            <a:r>
+              <a:rPr lang="ru-RU" dirty="0" err="1"/>
+              <a:t>pos</a:t>
+            </a:r>
+            <a:r>
+              <a:rPr lang="ru-RU" dirty="0"/>
+              <a:t> = (</a:t>
+            </a:r>
+            <a:r>
+              <a:rPr lang="ru-RU" dirty="0" err="1"/>
+              <a:t>pos</a:t>
+            </a:r>
+            <a:r>
+              <a:rPr lang="ru-RU" dirty="0"/>
+              <a:t> * x + y) </a:t>
+            </a:r>
+            <a:r>
+              <a:rPr lang="ru-RU" dirty="0" err="1"/>
+              <a:t>mod</a:t>
+            </a:r>
+            <a:r>
+              <a:rPr lang="ru-RU" dirty="0"/>
+              <a:t> </a:t>
+            </a:r>
+            <a:r>
+              <a:rPr lang="ru-RU" dirty="0" err="1"/>
+              <a:t>sizeof</a:t>
+            </a:r>
+            <a:r>
+              <a:rPr lang="ru-RU" dirty="0"/>
+              <a:t>(</a:t>
+            </a:r>
+            <a:r>
+              <a:rPr lang="ru-RU" dirty="0" err="1"/>
+              <a:t>gData</a:t>
+            </a:r>
+            <a:r>
+              <a:rPr lang="ru-RU" dirty="0"/>
+              <a:t>). В данном случае размер </a:t>
+            </a:r>
+            <a:r>
+              <a:rPr lang="ru-RU" dirty="0" err="1"/>
+              <a:t>gData</a:t>
+            </a:r>
+            <a:r>
+              <a:rPr lang="ru-RU" dirty="0"/>
+              <a:t> равен размеру одной кеш-линии.</a:t>
+            </a:r>
+          </a:p>
+          <a:p>
+            <a:r>
+              <a:rPr lang="ru-RU" dirty="0"/>
+              <a:t>В случае </a:t>
+            </a:r>
+            <a:r>
+              <a:rPr lang="ru-RU" dirty="0" err="1"/>
+              <a:t>sequential</a:t>
+            </a:r>
+            <a:r>
+              <a:rPr lang="ru-RU" dirty="0"/>
+              <a:t> доступ происходит последовательно, а в случае </a:t>
+            </a:r>
+            <a:r>
+              <a:rPr lang="ru-RU" dirty="0" err="1"/>
+              <a:t>pseudo-random</a:t>
+            </a:r>
+            <a:r>
+              <a:rPr lang="ru-RU" dirty="0"/>
+              <a:t> — в псевдослучайном порядке, но всё ещё в пределах одной кеш-линии.</a:t>
+            </a:r>
+          </a:p>
+          <a:p>
+            <a:endParaRPr lang="ru-RU" dirty="0"/>
+          </a:p>
+          <a:p>
+            <a:r>
+              <a:rPr lang="ru-RU" dirty="0"/>
+              <a:t>Обратите внимание на результаты. В отличие от предыдущего примера, здесь разница во времени небольшая и может даже меняться от запуска к запуску.</a:t>
+            </a:r>
+          </a:p>
+          <a:p>
+            <a:r>
+              <a:rPr lang="ru-RU" dirty="0"/>
+              <a:t>Это важный момент. Такие различия находятся на уровне шумов измерения. На результат влияют множество факторов: активность операционной системы, другие процессы, особенности планировщика, а также динамическое изменение частоты процессора.</a:t>
+            </a:r>
+          </a:p>
+          <a:p>
+            <a:r>
+              <a:rPr lang="ru-RU" dirty="0"/>
+              <a:t>Поэтому в данном эксперименте не стоит делать сильных выводов о том, что один способ доступа принципиально быстрее другого.</a:t>
+            </a:r>
+          </a:p>
+          <a:p>
+            <a:endParaRPr lang="ru-RU" dirty="0"/>
+          </a:p>
+          <a:p>
+            <a:r>
+              <a:rPr lang="ru-RU" dirty="0"/>
+              <a:t>Основная идея этого примера в другом. Он показывает, что если данные уже находятся в одной кеш-линии, то порядок доступа к ним оказывает гораздо меньшее влияние на производительность, чем в случае обращения к разным кеш-линиям или к оперативной памяти.</a:t>
+            </a:r>
+          </a:p>
+          <a:p>
+            <a:endParaRPr lang="ru-RU" dirty="0"/>
+          </a:p>
+          <a:p>
+            <a:r>
+              <a:rPr lang="ru-RU" dirty="0"/>
+              <a:t>Иными словами, основной выигрыш даёт попадание в кеш, а не тонкие различия в порядке обхода внутри него.</a:t>
+            </a:r>
+          </a:p>
+        </p:txBody>
+      </p:sp>
+      <p:sp>
+        <p:nvSpPr>
+          <p:cNvPr id="4" name="Slide Number Placeholder 3"/>
+          <p:cNvSpPr>
+            <a:spLocks noGrp="1"/>
+          </p:cNvSpPr>
+          <p:nvPr>
+            <p:ph type="sldNum" sz="quarter" idx="5"/>
+          </p:nvPr>
+        </p:nvSpPr>
+        <p:spPr/>
+        <p:txBody>
+          <a:bodyPr/>
+          <a:lstStyle/>
+          <a:p>
+            <a:fld id="{8740D86D-1409-43B0-8811-9A559436DAB5}" type="slidenum">
+              <a:rPr lang="en-US" smtClean="0"/>
               <a:t>29</a:t>
             </a:fld>
             <a:endParaRPr lang="en-US"/>
@@ -4959,7 +5075,283 @@
 </p:notes>
 </file>
 
-<file path=ppt/notesSlides/notesSlide28.xml><?xml version="1.0" encoding="utf-8"?>
+<file path=ppt/notesSlides/notesSlide3.xml><?xml version="1.0" encoding="utf-8"?>
+<p:notes xmlns:a="http://schemas.openxmlformats.org/drawingml/2006/main" xmlns:r="http://schemas.openxmlformats.org/officeDocument/2006/relationships" xmlns:p="http://schemas.openxmlformats.org/presentationml/2006/main">
+  <p:cSld>
+    <p:spTree>
+      <p:nvGrpSpPr>
+        <p:cNvPr id="1" name=""/>
+        <p:cNvGrpSpPr/>
+        <p:nvPr/>
+      </p:nvGrpSpPr>
+      <p:grpSpPr>
+        <a:xfrm>
+          <a:off x="0" y="0"/>
+          <a:ext cx="0" cy="0"/>
+          <a:chOff x="0" y="0"/>
+          <a:chExt cx="0" cy="0"/>
+        </a:xfrm>
+      </p:grpSpPr>
+      <p:sp>
+        <p:nvSpPr>
+          <p:cNvPr id="2" name="Slide Image Placeholder 1"/>
+          <p:cNvSpPr>
+            <a:spLocks noGrp="1" noRot="1" noChangeAspect="1"/>
+          </p:cNvSpPr>
+          <p:nvPr>
+            <p:ph type="sldImg"/>
+          </p:nvPr>
+        </p:nvSpPr>
+        <p:spPr/>
+      </p:sp>
+      <p:sp>
+        <p:nvSpPr>
+          <p:cNvPr id="3" name="Notes Placeholder 2"/>
+          <p:cNvSpPr>
+            <a:spLocks noGrp="1"/>
+          </p:cNvSpPr>
+          <p:nvPr>
+            <p:ph type="body" idx="1"/>
+          </p:nvPr>
+        </p:nvSpPr>
+        <p:spPr/>
+        <p:txBody>
+          <a:bodyPr/>
+          <a:lstStyle/>
+          <a:p>
+            <a:r>
+              <a:rPr lang="ru-RU" dirty="0"/>
+              <a:t>До этого момента мы уже сталкивались с адресами в памяти. Мы выводили адреса переменных, работали с указателями и даже смотрели дампы памяти.</a:t>
+            </a:r>
+          </a:p>
+          <a:p>
+            <a:endParaRPr lang="ru-RU" dirty="0"/>
+          </a:p>
+          <a:p>
+            <a:r>
+              <a:rPr lang="ru-RU" dirty="0"/>
+              <a:t>Однако, как правило, мы воспринимали адрес просто как некоторое число, не придавая ему особого смысла. Адреса казались абстрактными значениями, которые используются для доступа к данным, но не несут дополнительной информации.</a:t>
+            </a:r>
+          </a:p>
+          <a:p>
+            <a:endParaRPr lang="ru-RU" dirty="0"/>
+          </a:p>
+          <a:p>
+            <a:r>
+              <a:rPr lang="ru-RU" dirty="0"/>
+              <a:t>На самом деле это не так. В современных операционных системах память программы организована строго определённым образом.</a:t>
+            </a:r>
+            <a:r>
+              <a:rPr lang="en-US" dirty="0"/>
+              <a:t>  </a:t>
+            </a:r>
+            <a:r>
+              <a:rPr lang="ru-RU" dirty="0"/>
+              <a:t>Адрес в памяти указывает не просто на произвольный байт, а на конкретную область памяти с определённым назначением.</a:t>
+            </a:r>
+          </a:p>
+          <a:p>
+            <a:endParaRPr lang="ru-RU" dirty="0"/>
+          </a:p>
+          <a:p>
+            <a:r>
+              <a:rPr lang="ru-RU" dirty="0"/>
+              <a:t>Чтобы понимать, как выполняется программа, необходимо понимать, как устроено адресное пространство процесса.</a:t>
+            </a:r>
+          </a:p>
+          <a:p>
+            <a:endParaRPr lang="ru-RU" dirty="0"/>
+          </a:p>
+          <a:p>
+            <a:r>
+              <a:rPr lang="ru-RU" dirty="0"/>
+              <a:t>В современных операционных системах процесс получает собственное адресное пространство, которое разбито на несколько областей.</a:t>
+            </a:r>
+          </a:p>
+          <a:p>
+            <a:endParaRPr lang="ru-RU" dirty="0"/>
+          </a:p>
+          <a:p>
+            <a:r>
+              <a:rPr lang="ru-RU" dirty="0"/>
+              <a:t>В нижней части располагается сегмент кода, или </a:t>
+            </a:r>
+            <a:r>
+              <a:rPr lang="ru-RU" dirty="0" err="1"/>
+              <a:t>text</a:t>
+            </a:r>
+            <a:r>
+              <a:rPr lang="ru-RU" dirty="0"/>
+              <a:t> </a:t>
+            </a:r>
+            <a:r>
+              <a:rPr lang="ru-RU" dirty="0" err="1"/>
+              <a:t>segment</a:t>
+            </a:r>
+            <a:r>
+              <a:rPr lang="ru-RU" dirty="0"/>
+              <a:t>. Здесь хранится исполняемый код программы.</a:t>
+            </a:r>
+          </a:p>
+          <a:p>
+            <a:r>
+              <a:rPr lang="ru-RU" dirty="0"/>
+              <a:t>Выше находятся сегменты данных. В сегменте </a:t>
+            </a:r>
+            <a:r>
+              <a:rPr lang="ru-RU" dirty="0" err="1"/>
+              <a:t>data</a:t>
+            </a:r>
+            <a:r>
+              <a:rPr lang="ru-RU" dirty="0"/>
+              <a:t> размещаются инициализированные глобальные и статические переменные. В сегменте BSS — неинициализированные.</a:t>
+            </a:r>
+          </a:p>
+          <a:p>
+            <a:endParaRPr lang="ru-RU" dirty="0"/>
+          </a:p>
+          <a:p>
+            <a:r>
+              <a:rPr lang="ru-RU" dirty="0"/>
+              <a:t>Такое расположение не случайно. В исполняемом файле программы уже содержатся машинный код и инициализированные глобальные переменные, поэтому при загрузке программы в память операционной системе удобно размещать их рядом.</a:t>
+            </a:r>
+          </a:p>
+          <a:p>
+            <a:endParaRPr lang="ru-RU" dirty="0"/>
+          </a:p>
+          <a:p>
+            <a:r>
+              <a:rPr lang="ru-RU" dirty="0"/>
+              <a:t>На практике область данных часто дополнительно разделяется на части с разными правами доступа. В </a:t>
+            </a:r>
+            <a:r>
+              <a:rPr lang="ru-RU" dirty="0" err="1"/>
+              <a:t>read-only</a:t>
+            </a:r>
+            <a:r>
+              <a:rPr lang="ru-RU" dirty="0"/>
+              <a:t> области располагаются константы, а в </a:t>
+            </a:r>
+            <a:r>
+              <a:rPr lang="ru-RU" dirty="0" err="1"/>
+              <a:t>read</a:t>
+            </a:r>
+            <a:r>
+              <a:rPr lang="ru-RU" dirty="0"/>
+              <a:t>/</a:t>
+            </a:r>
+            <a:r>
+              <a:rPr lang="ru-RU" dirty="0" err="1"/>
+              <a:t>write</a:t>
+            </a:r>
+            <a:r>
+              <a:rPr lang="ru-RU" dirty="0"/>
+              <a:t> — обычные глобальные переменные, которые могут изменяться во время выполнения программы.</a:t>
+            </a:r>
+          </a:p>
+          <a:p>
+            <a:endParaRPr lang="ru-RU" dirty="0"/>
+          </a:p>
+          <a:p>
+            <a:r>
+              <a:rPr lang="ru-RU" dirty="0"/>
+              <a:t>Кроме того, операционная система обычно защищает область кода и область неизменяемых данных от модификации. Это означает, что программа не может случайно или намеренно изменить собственный код или константы, что обеспечивает дополнительный уровень безопасности.</a:t>
+            </a:r>
+          </a:p>
+          <a:p>
+            <a:endParaRPr lang="ru-RU" dirty="0"/>
+          </a:p>
+          <a:p>
+            <a:r>
+              <a:rPr lang="ru-RU" dirty="0"/>
+              <a:t>Далее располагается куча, или </a:t>
+            </a:r>
+            <a:r>
+              <a:rPr lang="ru-RU" dirty="0" err="1"/>
+              <a:t>heap</a:t>
+            </a:r>
+            <a:r>
+              <a:rPr lang="ru-RU" dirty="0"/>
+              <a:t>. Эта область используется для динамического выделения памяти во время выполнения программы.</a:t>
+            </a:r>
+          </a:p>
+          <a:p>
+            <a:endParaRPr lang="ru-RU" dirty="0"/>
+          </a:p>
+          <a:p>
+            <a:r>
+              <a:rPr lang="ru-RU" dirty="0"/>
+              <a:t>В верхней части находится стек, или </a:t>
+            </a:r>
+            <a:r>
+              <a:rPr lang="ru-RU" dirty="0" err="1"/>
+              <a:t>stack</a:t>
+            </a:r>
+            <a:r>
+              <a:rPr lang="ru-RU" dirty="0"/>
+              <a:t>. Он используется для хранения информации о вызовах функций, локальных переменных и параметров.</a:t>
+            </a:r>
+          </a:p>
+          <a:p>
+            <a:endParaRPr lang="ru-RU" dirty="0"/>
+          </a:p>
+          <a:p>
+            <a:r>
+              <a:rPr lang="ru-RU" dirty="0"/>
+              <a:t>Важно понимать, что это не просто абстрактная схема. Именно так программа существует в памяти во время выполнения.</a:t>
+            </a:r>
+          </a:p>
+          <a:p>
+            <a:endParaRPr lang="ru-RU" dirty="0"/>
+          </a:p>
+          <a:p>
+            <a:r>
+              <a:rPr lang="ru-RU" dirty="0"/>
+              <a:t>Дальнейшее изучение стека, кучи и вызовов функций будет опираться на это представление.</a:t>
+            </a:r>
+          </a:p>
+          <a:p>
+            <a:endParaRPr lang="en-US" dirty="0"/>
+          </a:p>
+        </p:txBody>
+      </p:sp>
+      <p:sp>
+        <p:nvSpPr>
+          <p:cNvPr id="4" name="Slide Number Placeholder 3"/>
+          <p:cNvSpPr>
+            <a:spLocks noGrp="1"/>
+          </p:cNvSpPr>
+          <p:nvPr>
+            <p:ph type="sldNum" sz="quarter" idx="5"/>
+          </p:nvPr>
+        </p:nvSpPr>
+        <p:spPr/>
+        <p:txBody>
+          <a:bodyPr/>
+          <a:lstStyle/>
+          <a:p>
+            <a:fld id="{87259E61-CD8F-4EDB-89B2-A2524EC5B40A}" type="slidenum">
+              <a:rPr lang="en-US" smtClean="0"/>
+              <a:t>3</a:t>
+            </a:fld>
+            <a:endParaRPr lang="en-US"/>
+          </a:p>
+        </p:txBody>
+      </p:sp>
+    </p:spTree>
+    <p:extLst>
+      <p:ext uri="{BB962C8B-B14F-4D97-AF65-F5344CB8AC3E}">
+        <p14:creationId xmlns:p14="http://schemas.microsoft.com/office/powerpoint/2010/main" val="3790410141"/>
+      </p:ext>
+    </p:extLst>
+  </p:cSld>
+  <p:clrMapOvr>
+    <a:masterClrMapping/>
+  </p:clrMapOvr>
+</p:notes>
+</file>
+
+<file path=ppt/notesSlides/notesSlide30.xml><?xml version="1.0" encoding="utf-8"?>
 <p:notes xmlns:a="http://schemas.openxmlformats.org/drawingml/2006/main" xmlns:r="http://schemas.openxmlformats.org/officeDocument/2006/relationships" xmlns:p="http://schemas.openxmlformats.org/presentationml/2006/main">
   <p:cSld>
     <p:spTree>
@@ -5256,7 +5648,7 @@
 </p:notes>
 </file>
 
-<file path=ppt/notesSlides/notesSlide29.xml><?xml version="1.0" encoding="utf-8"?>
+<file path=ppt/notesSlides/notesSlide31.xml><?xml version="1.0" encoding="utf-8"?>
 <p:notes xmlns:a="http://schemas.openxmlformats.org/drawingml/2006/main" xmlns:r="http://schemas.openxmlformats.org/officeDocument/2006/relationships" xmlns:p="http://schemas.openxmlformats.org/presentationml/2006/main">
   <p:cSld>
     <p:spTree>
@@ -5428,7 +5820,7 @@
 </p:notes>
 </file>
 
-<file path=ppt/notesSlides/notesSlide3.xml><?xml version="1.0" encoding="utf-8"?>
+<file path=ppt/notesSlides/notesSlide32.xml><?xml version="1.0" encoding="utf-8"?>
 <p:notes xmlns:a="http://schemas.openxmlformats.org/drawingml/2006/main" xmlns:r="http://schemas.openxmlformats.org/officeDocument/2006/relationships" xmlns:p="http://schemas.openxmlformats.org/presentationml/2006/main">
   <p:cSld>
     <p:spTree>
@@ -5474,9 +5866,8 @@
           <a:p>
             <a:r>
               <a:rPr lang="ru-RU" dirty="0"/>
-              <a:t>Стек представляет собой область памяти, которая используется для организации вызовов функций.</a:t>
-            </a:r>
-            <a:endParaRPr lang="en-US" dirty="0"/>
+              <a:t>Важно понимать, что современные процессоры работают значительно быстрее памяти.</a:t>
+            </a:r>
           </a:p>
           <a:p>
             <a:endParaRPr lang="ru-RU" dirty="0"/>
@@ -5484,9 +5875,8 @@
           <a:p>
             <a:r>
               <a:rPr lang="ru-RU" dirty="0"/>
-              <a:t>Он работает по принципу LIFO, то есть последний добавленный элемент извлекается первым. Это соответствует вложенной природе вызовов функций.</a:t>
-            </a:r>
-            <a:endParaRPr lang="en-US" dirty="0"/>
+              <a:t>Это означает, что во многих случаях дешевле выполнить вычисление, чем загрузить данные из памяти.</a:t>
+            </a:r>
           </a:p>
           <a:p>
             <a:endParaRPr lang="ru-RU" dirty="0"/>
@@ -5494,25 +5884,8 @@
           <a:p>
             <a:r>
               <a:rPr lang="ru-RU" dirty="0"/>
-              <a:t>При каждом вызове функции в стеке создаётся новый кадр, который часто называют </a:t>
-            </a:r>
-            <a:r>
-              <a:rPr lang="ru-RU" dirty="0" err="1"/>
-              <a:t>stack</a:t>
-            </a:r>
-            <a:r>
-              <a:rPr lang="ru-RU" dirty="0"/>
-              <a:t> </a:t>
-            </a:r>
-            <a:r>
-              <a:rPr lang="ru-RU" dirty="0" err="1"/>
-              <a:t>frame</a:t>
-            </a:r>
-            <a:r>
-              <a:rPr lang="ru-RU" dirty="0"/>
-              <a:t>. В этом кадре размещаются параметры функции, её локальные переменные, а также служебная информация.</a:t>
-            </a:r>
-            <a:endParaRPr lang="en-US" dirty="0"/>
+              <a:t>Исторически программисты часто использовали приёмы вроде таблиц предвычисленных значений, чтобы ускорить вычисления.</a:t>
+            </a:r>
           </a:p>
           <a:p>
             <a:endParaRPr lang="ru-RU" dirty="0"/>
@@ -5520,9 +5893,8 @@
           <a:p>
             <a:r>
               <a:rPr lang="ru-RU" dirty="0"/>
-              <a:t>Когда функция завершает выполнение, соответствующий кадр удаляется из стека, и управление возвращается в вызывающую функцию.</a:t>
-            </a:r>
-            <a:endParaRPr lang="en-US" dirty="0"/>
+              <a:t>Однако на современных архитектурах такие подходы могут быть неэффективны, поскольку обращение к памяти может стоить дороже, чем само вычисление.</a:t>
+            </a:r>
           </a:p>
           <a:p>
             <a:endParaRPr lang="ru-RU" dirty="0"/>
@@ -5530,7 +5902,25 @@
           <a:p>
             <a:r>
               <a:rPr lang="ru-RU" dirty="0"/>
-              <a:t>Таким образом, стек в каждый момент времени отражает текущую цепочку вызовов функций и играет ключевую роль в управлении выполнением программы.</a:t>
+              <a:t>Поэтому важно не полагаться на интуицию или устаревшие практики. Даже логично выглядящая оптимизация может не дать ожидаемого эффекта или даже ухудшить производительность.</a:t>
+            </a:r>
+          </a:p>
+          <a:p>
+            <a:endParaRPr lang="ru-RU" dirty="0"/>
+          </a:p>
+          <a:p>
+            <a:r>
+              <a:rPr lang="ru-RU" dirty="0"/>
+              <a:t>Ключевой принцип — проверять свои предположения с помощью бенчмарков. Только измерения позволяют объективно оценить влияние тех или иных изменений.</a:t>
+            </a:r>
+          </a:p>
+          <a:p>
+            <a:endParaRPr lang="ru-RU" dirty="0"/>
+          </a:p>
+          <a:p>
+            <a:r>
+              <a:rPr lang="ru-RU" dirty="0"/>
+              <a:t>Таким образом, эффективная работа с памятью требует не только понимания архитектуры, но и аккуратного экспериментального подхода.</a:t>
             </a:r>
           </a:p>
           <a:p>
@@ -5555,150 +5945,6 @@
           <a:p>
             <a:fld id="{87259E61-CD8F-4EDB-89B2-A2524EC5B40A}" type="slidenum">
               <a:rPr lang="en-US" smtClean="0"/>
-              <a:t>4</a:t>
-            </a:fld>
-            <a:endParaRPr lang="en-US"/>
-          </a:p>
-        </p:txBody>
-      </p:sp>
-    </p:spTree>
-    <p:extLst>
-      <p:ext uri="{BB962C8B-B14F-4D97-AF65-F5344CB8AC3E}">
-        <p14:creationId xmlns:p14="http://schemas.microsoft.com/office/powerpoint/2010/main" val="564088170"/>
-      </p:ext>
-    </p:extLst>
-  </p:cSld>
-  <p:clrMapOvr>
-    <a:masterClrMapping/>
-  </p:clrMapOvr>
-</p:notes>
-</file>
-
-<file path=ppt/notesSlides/notesSlide30.xml><?xml version="1.0" encoding="utf-8"?>
-<p:notes xmlns:a="http://schemas.openxmlformats.org/drawingml/2006/main" xmlns:r="http://schemas.openxmlformats.org/officeDocument/2006/relationships" xmlns:p="http://schemas.openxmlformats.org/presentationml/2006/main">
-  <p:cSld>
-    <p:spTree>
-      <p:nvGrpSpPr>
-        <p:cNvPr id="1" name=""/>
-        <p:cNvGrpSpPr/>
-        <p:nvPr/>
-      </p:nvGrpSpPr>
-      <p:grpSpPr>
-        <a:xfrm>
-          <a:off x="0" y="0"/>
-          <a:ext cx="0" cy="0"/>
-          <a:chOff x="0" y="0"/>
-          <a:chExt cx="0" cy="0"/>
-        </a:xfrm>
-      </p:grpSpPr>
-      <p:sp>
-        <p:nvSpPr>
-          <p:cNvPr id="2" name="Slide Image Placeholder 1"/>
-          <p:cNvSpPr>
-            <a:spLocks noGrp="1" noRot="1" noChangeAspect="1"/>
-          </p:cNvSpPr>
-          <p:nvPr>
-            <p:ph type="sldImg"/>
-          </p:nvPr>
-        </p:nvSpPr>
-        <p:spPr/>
-      </p:sp>
-      <p:sp>
-        <p:nvSpPr>
-          <p:cNvPr id="3" name="Notes Placeholder 2"/>
-          <p:cNvSpPr>
-            <a:spLocks noGrp="1"/>
-          </p:cNvSpPr>
-          <p:nvPr>
-            <p:ph type="body" idx="1"/>
-          </p:nvPr>
-        </p:nvSpPr>
-        <p:spPr/>
-        <p:txBody>
-          <a:bodyPr/>
-          <a:lstStyle/>
-          <a:p>
-            <a:r>
-              <a:rPr lang="ru-RU" dirty="0"/>
-              <a:t>Важно понимать, что современные процессоры работают значительно быстрее памяти.</a:t>
-            </a:r>
-          </a:p>
-          <a:p>
-            <a:endParaRPr lang="ru-RU" dirty="0"/>
-          </a:p>
-          <a:p>
-            <a:r>
-              <a:rPr lang="ru-RU" dirty="0"/>
-              <a:t>Это означает, что во многих случаях дешевле выполнить вычисление, чем загрузить данные из памяти.</a:t>
-            </a:r>
-          </a:p>
-          <a:p>
-            <a:endParaRPr lang="ru-RU" dirty="0"/>
-          </a:p>
-          <a:p>
-            <a:r>
-              <a:rPr lang="ru-RU" dirty="0"/>
-              <a:t>Исторически программисты часто использовали приёмы вроде таблиц предвычисленных значений, чтобы ускорить вычисления.</a:t>
-            </a:r>
-          </a:p>
-          <a:p>
-            <a:endParaRPr lang="ru-RU" dirty="0"/>
-          </a:p>
-          <a:p>
-            <a:r>
-              <a:rPr lang="ru-RU" dirty="0"/>
-              <a:t>Однако на современных архитектурах такие подходы могут быть неэффективны, поскольку обращение к памяти может стоить дороже, чем само вычисление.</a:t>
-            </a:r>
-          </a:p>
-          <a:p>
-            <a:endParaRPr lang="ru-RU" dirty="0"/>
-          </a:p>
-          <a:p>
-            <a:r>
-              <a:rPr lang="ru-RU" dirty="0"/>
-              <a:t>Поэтому важно не полагаться на интуицию или устаревшие практики. Даже логично выглядящая оптимизация может не дать ожидаемого эффекта или даже ухудшить производительность.</a:t>
-            </a:r>
-          </a:p>
-          <a:p>
-            <a:endParaRPr lang="ru-RU" dirty="0"/>
-          </a:p>
-          <a:p>
-            <a:r>
-              <a:rPr lang="ru-RU" dirty="0"/>
-              <a:t>Ключевой принцип — проверять свои предположения с помощью бенчмарков. Только измерения позволяют объективно оценить влияние тех или иных изменений.</a:t>
-            </a:r>
-          </a:p>
-          <a:p>
-            <a:endParaRPr lang="ru-RU" dirty="0"/>
-          </a:p>
-          <a:p>
-            <a:r>
-              <a:rPr lang="ru-RU" dirty="0"/>
-              <a:t>Таким образом, эффективная работа с памятью требует не только понимания архитектуры, но и аккуратного экспериментального подхода.</a:t>
-            </a:r>
-          </a:p>
-          <a:p>
-            <a:endParaRPr lang="en-US" dirty="0"/>
-          </a:p>
-        </p:txBody>
-      </p:sp>
-      <p:sp>
-        <p:nvSpPr>
-          <p:cNvPr id="4" name="Slide Number Placeholder 3"/>
-          <p:cNvSpPr>
-            <a:spLocks noGrp="1"/>
-          </p:cNvSpPr>
-          <p:nvPr>
-            <p:ph type="sldNum" sz="quarter" idx="5"/>
-          </p:nvPr>
-        </p:nvSpPr>
-        <p:spPr/>
-        <p:txBody>
-          <a:bodyPr/>
-          <a:lstStyle/>
-          <a:p>
-            <a:fld id="{87259E61-CD8F-4EDB-89B2-A2524EC5B40A}" type="slidenum">
-              <a:rPr lang="en-US" smtClean="0"/>
               <a:t>32</a:t>
             </a:fld>
             <a:endParaRPr lang="en-US"/>
@@ -5718,7 +5964,7 @@
 </p:notes>
 </file>
 
-<file path=ppt/notesSlides/notesSlide31.xml><?xml version="1.0" encoding="utf-8"?>
+<file path=ppt/notesSlides/notesSlide33.xml><?xml version="1.0" encoding="utf-8"?>
 <p:notes xmlns:a="http://schemas.openxmlformats.org/drawingml/2006/main" xmlns:r="http://schemas.openxmlformats.org/officeDocument/2006/relationships" xmlns:p="http://schemas.openxmlformats.org/presentationml/2006/main">
   <p:cSld>
     <p:spTree>
@@ -5914,8 +6160,9 @@
           <a:p>
             <a:r>
               <a:rPr lang="ru-RU" dirty="0"/>
-              <a:t>Помимо параметров и локальных переменных, в стеке хранится адрес возврата. Это адрес той инструкции, на которую необходимо передать управление после завершения функции.</a:t>
-            </a:r>
+              <a:t>Стек представляет собой область памяти, которая используется для организации вызовов функций.</a:t>
+            </a:r>
+            <a:endParaRPr lang="en-US" dirty="0"/>
           </a:p>
           <a:p>
             <a:endParaRPr lang="ru-RU" dirty="0"/>
@@ -5923,8 +6170,9 @@
           <a:p>
             <a:r>
               <a:rPr lang="ru-RU" dirty="0"/>
-              <a:t>Именно благодаря сохранению адреса возврата становится возможным корректное продолжение выполнения программы после вложенных вызовов.</a:t>
-            </a:r>
+              <a:t>Он работает по принципу LIFO, то есть последний добавленный элемент извлекается первым. Это соответствует вложенной природе вызовов функций.</a:t>
+            </a:r>
+            <a:endParaRPr lang="en-US" dirty="0"/>
           </a:p>
           <a:p>
             <a:endParaRPr lang="ru-RU" dirty="0"/>
@@ -5932,8 +6180,25 @@
           <a:p>
             <a:r>
               <a:rPr lang="ru-RU" dirty="0"/>
-              <a:t>В большинстве распространённых архитектур, таких как x86, данные и адреса возврата хранятся в одной и той же области памяти, то есть в одном стеке.</a:t>
-            </a:r>
+              <a:t>При каждом вызове функции в стеке создаётся новый кадр, который часто называют </a:t>
+            </a:r>
+            <a:r>
+              <a:rPr lang="ru-RU" dirty="0" err="1"/>
+              <a:t>stack</a:t>
+            </a:r>
+            <a:r>
+              <a:rPr lang="ru-RU" dirty="0"/>
+              <a:t> </a:t>
+            </a:r>
+            <a:r>
+              <a:rPr lang="ru-RU" dirty="0" err="1"/>
+              <a:t>frame</a:t>
+            </a:r>
+            <a:r>
+              <a:rPr lang="ru-RU" dirty="0"/>
+              <a:t>. В этом кадре размещаются параметры функции, её локальные переменные, а также служебная информация.</a:t>
+            </a:r>
+            <a:endParaRPr lang="en-US" dirty="0"/>
           </a:p>
           <a:p>
             <a:endParaRPr lang="ru-RU" dirty="0"/>
@@ -5941,7 +6206,7 @@
           <a:p>
             <a:r>
               <a:rPr lang="ru-RU" dirty="0"/>
-              <a:t>Однако существуют архитектуры, в которых для адресов возврата используется отдельный стек. Такой подход позволяет изолировать адреса возврата от пользовательских данных и тем самым повысить безопасность выполнения программы.</a:t>
+              <a:t>Когда функция завершает выполнение, соответствующий кадр удаляется из стека, и управление возвращается в вызывающую функцию.</a:t>
             </a:r>
             <a:endParaRPr lang="en-US" dirty="0"/>
           </a:p>
@@ -5951,16 +6216,7 @@
           <a:p>
             <a:r>
               <a:rPr lang="ru-RU" dirty="0"/>
-              <a:t>Примерами могут служить архитектуры с аппаратной поддержкой защищённого стека возвратов, такие как ARM с механизмами защиты потока управления, а также некоторые микроконтроллеры, например семейство PIC, где используется отдельный аппаратный стек для адресов возврата.</a:t>
-            </a:r>
-          </a:p>
-          <a:p>
-            <a:endParaRPr lang="ru-RU" dirty="0"/>
-          </a:p>
-          <a:p>
-            <a:r>
-              <a:rPr lang="ru-RU" dirty="0"/>
-              <a:t>Разделение данных и адресов возврата затрудняет эксплуатацию уязвимостей, связанных с переполнением стека, и является одним из способов повышения надёжности программ.</a:t>
+              <a:t>Таким образом, стек в каждый момент времени отражает текущую цепочку вызовов функций и играет ключевую роль в управлении выполнением программы.</a:t>
             </a:r>
           </a:p>
           <a:p>
@@ -5985,7 +6241,7 @@
           <a:p>
             <a:fld id="{87259E61-CD8F-4EDB-89B2-A2524EC5B40A}" type="slidenum">
               <a:rPr lang="en-US" smtClean="0"/>
-              <a:t>5</a:t>
+              <a:t>4</a:t>
             </a:fld>
             <a:endParaRPr lang="en-US"/>
           </a:p>
@@ -5994,7 +6250,7 @@
     </p:spTree>
     <p:extLst>
       <p:ext uri="{BB962C8B-B14F-4D97-AF65-F5344CB8AC3E}">
-        <p14:creationId xmlns:p14="http://schemas.microsoft.com/office/powerpoint/2010/main" val="1730913788"/>
+        <p14:creationId xmlns:p14="http://schemas.microsoft.com/office/powerpoint/2010/main" val="564088170"/>
       </p:ext>
     </p:extLst>
   </p:cSld>
@@ -6050,7 +6306,7 @@
           <a:p>
             <a:r>
               <a:rPr lang="ru-RU" dirty="0"/>
-              <a:t>На этом слайде показано, как стек формируется в процессе вложенных вызовов функций.</a:t>
+              <a:t>Помимо параметров и локальных переменных, в стеке хранится адрес возврата. Это адрес той инструкции, на которую необходимо передать управление после завершения функции.</a:t>
             </a:r>
           </a:p>
           <a:p>
@@ -6059,23 +6315,7 @@
           <a:p>
             <a:r>
               <a:rPr lang="ru-RU" dirty="0"/>
-              <a:t>Рассмотрим простой пример. В функции </a:t>
-            </a:r>
-            <a:r>
-              <a:rPr lang="ru-RU" dirty="0" err="1"/>
-              <a:t>main</a:t>
-            </a:r>
-            <a:r>
-              <a:rPr lang="ru-RU" dirty="0"/>
-              <a:t> вызывается функция Func1, а внутри неё вызывается функция Func2. Таким образом, выполнение программы переходит от </a:t>
-            </a:r>
-            <a:r>
-              <a:rPr lang="ru-RU" dirty="0" err="1"/>
-              <a:t>main</a:t>
-            </a:r>
-            <a:r>
-              <a:rPr lang="ru-RU" dirty="0"/>
-              <a:t> к Func1, а затем к Func2.</a:t>
+              <a:t>Именно благодаря сохранению адреса возврата становится возможным корректное продолжение выполнения программы после вложенных вызовов.</a:t>
             </a:r>
           </a:p>
           <a:p>
@@ -6084,16 +6324,38 @@
           <a:p>
             <a:r>
               <a:rPr lang="ru-RU" dirty="0"/>
-              <a:t>Каждый вызов функции приводит к созданию нового кадра стека. Вначале в стеке находится кадр функции </a:t>
-            </a:r>
-            <a:r>
-              <a:rPr lang="ru-RU" dirty="0" err="1"/>
-              <a:t>main</a:t>
-            </a:r>
-            <a:r>
-              <a:rPr lang="ru-RU" dirty="0"/>
-              <a:t>.</a:t>
-            </a:r>
+              <a:t>В большинстве распространённых архитектур, таких как x86, данные и адреса возврата хранятся в одной и той же области памяти, то есть в одном стеке.</a:t>
+            </a:r>
+          </a:p>
+          <a:p>
+            <a:endParaRPr lang="ru-RU" dirty="0"/>
+          </a:p>
+          <a:p>
+            <a:r>
+              <a:rPr lang="ru-RU" dirty="0"/>
+              <a:t>Однако существуют архитектуры, в которых для адресов возврата используется отдельный стек. Такой подход позволяет изолировать адреса возврата от пользовательских данных и тем самым повысить безопасность выполнения программы.</a:t>
+            </a:r>
+            <a:endParaRPr lang="en-US" dirty="0"/>
+          </a:p>
+          <a:p>
+            <a:endParaRPr lang="ru-RU" dirty="0"/>
+          </a:p>
+          <a:p>
+            <a:r>
+              <a:rPr lang="ru-RU" dirty="0"/>
+              <a:t>Примерами могут служить архитектуры с аппаратной поддержкой защищённого стека возвратов, такие как ARM с механизмами защиты потока управления, а также некоторые микроконтроллеры, например семейство PIC, где используется отдельный аппаратный стек для адресов возврата.</a:t>
+            </a:r>
+          </a:p>
+          <a:p>
+            <a:endParaRPr lang="ru-RU" dirty="0"/>
+          </a:p>
+          <a:p>
+            <a:r>
+              <a:rPr lang="ru-RU" dirty="0"/>
+              <a:t>Разделение данных и адресов возврата затрудняет эксплуатацию уязвимостей, связанных с переполнением стека, и является одним из способов повышения надёжности программ.</a:t>
+            </a:r>
+          </a:p>
+          <a:p>
             <a:endParaRPr lang="en-US" dirty="0"/>
           </a:p>
         </p:txBody>
@@ -6115,6 +6377,136 @@
           <a:p>
             <a:fld id="{87259E61-CD8F-4EDB-89B2-A2524EC5B40A}" type="slidenum">
               <a:rPr lang="en-US" smtClean="0"/>
+              <a:t>5</a:t>
+            </a:fld>
+            <a:endParaRPr lang="en-US"/>
+          </a:p>
+        </p:txBody>
+      </p:sp>
+    </p:spTree>
+    <p:extLst>
+      <p:ext uri="{BB962C8B-B14F-4D97-AF65-F5344CB8AC3E}">
+        <p14:creationId xmlns:p14="http://schemas.microsoft.com/office/powerpoint/2010/main" val="1730913788"/>
+      </p:ext>
+    </p:extLst>
+  </p:cSld>
+  <p:clrMapOvr>
+    <a:masterClrMapping/>
+  </p:clrMapOvr>
+</p:notes>
+</file>
+
+<file path=ppt/notesSlides/notesSlide6.xml><?xml version="1.0" encoding="utf-8"?>
+<p:notes xmlns:a="http://schemas.openxmlformats.org/drawingml/2006/main" xmlns:r="http://schemas.openxmlformats.org/officeDocument/2006/relationships" xmlns:p="http://schemas.openxmlformats.org/presentationml/2006/main">
+  <p:cSld>
+    <p:spTree>
+      <p:nvGrpSpPr>
+        <p:cNvPr id="1" name=""/>
+        <p:cNvGrpSpPr/>
+        <p:nvPr/>
+      </p:nvGrpSpPr>
+      <p:grpSpPr>
+        <a:xfrm>
+          <a:off x="0" y="0"/>
+          <a:ext cx="0" cy="0"/>
+          <a:chOff x="0" y="0"/>
+          <a:chExt cx="0" cy="0"/>
+        </a:xfrm>
+      </p:grpSpPr>
+      <p:sp>
+        <p:nvSpPr>
+          <p:cNvPr id="2" name="Slide Image Placeholder 1"/>
+          <p:cNvSpPr>
+            <a:spLocks noGrp="1" noRot="1" noChangeAspect="1"/>
+          </p:cNvSpPr>
+          <p:nvPr>
+            <p:ph type="sldImg"/>
+          </p:nvPr>
+        </p:nvSpPr>
+        <p:spPr/>
+      </p:sp>
+      <p:sp>
+        <p:nvSpPr>
+          <p:cNvPr id="3" name="Notes Placeholder 2"/>
+          <p:cNvSpPr>
+            <a:spLocks noGrp="1"/>
+          </p:cNvSpPr>
+          <p:nvPr>
+            <p:ph type="body" idx="1"/>
+          </p:nvPr>
+        </p:nvSpPr>
+        <p:spPr/>
+        <p:txBody>
+          <a:bodyPr/>
+          <a:lstStyle/>
+          <a:p>
+            <a:r>
+              <a:rPr lang="ru-RU" dirty="0"/>
+              <a:t>На этом слайде показано, как стек формируется в процессе вложенных вызовов функций.</a:t>
+            </a:r>
+          </a:p>
+          <a:p>
+            <a:endParaRPr lang="ru-RU" dirty="0"/>
+          </a:p>
+          <a:p>
+            <a:r>
+              <a:rPr lang="ru-RU" dirty="0"/>
+              <a:t>Рассмотрим простой пример. В функции </a:t>
+            </a:r>
+            <a:r>
+              <a:rPr lang="ru-RU" dirty="0" err="1"/>
+              <a:t>main</a:t>
+            </a:r>
+            <a:r>
+              <a:rPr lang="ru-RU" dirty="0"/>
+              <a:t> вызывается функция Func1, а внутри неё вызывается функция Func2. Таким образом, выполнение программы переходит от </a:t>
+            </a:r>
+            <a:r>
+              <a:rPr lang="ru-RU" dirty="0" err="1"/>
+              <a:t>main</a:t>
+            </a:r>
+            <a:r>
+              <a:rPr lang="ru-RU" dirty="0"/>
+              <a:t> к Func1, а затем к Func2.</a:t>
+            </a:r>
+          </a:p>
+          <a:p>
+            <a:endParaRPr lang="ru-RU" dirty="0"/>
+          </a:p>
+          <a:p>
+            <a:r>
+              <a:rPr lang="ru-RU" dirty="0"/>
+              <a:t>Каждый вызов функции приводит к созданию нового кадра стека. Вначале в стеке находится кадр функции </a:t>
+            </a:r>
+            <a:r>
+              <a:rPr lang="ru-RU" dirty="0" err="1"/>
+              <a:t>main</a:t>
+            </a:r>
+            <a:r>
+              <a:rPr lang="ru-RU" dirty="0"/>
+              <a:t>.</a:t>
+            </a:r>
+            <a:endParaRPr lang="en-US" dirty="0"/>
+          </a:p>
+        </p:txBody>
+      </p:sp>
+      <p:sp>
+        <p:nvSpPr>
+          <p:cNvPr id="4" name="Slide Number Placeholder 3"/>
+          <p:cNvSpPr>
+            <a:spLocks noGrp="1"/>
+          </p:cNvSpPr>
+          <p:nvPr>
+            <p:ph type="sldNum" sz="quarter" idx="5"/>
+          </p:nvPr>
+        </p:nvSpPr>
+        <p:spPr/>
+        <p:txBody>
+          <a:bodyPr/>
+          <a:lstStyle/>
+          <a:p>
+            <a:fld id="{87259E61-CD8F-4EDB-89B2-A2524EC5B40A}" type="slidenum">
+              <a:rPr lang="en-US" smtClean="0"/>
               <a:t>6</a:t>
             </a:fld>
             <a:endParaRPr lang="en-US"/>
@@ -6134,7 +6526,7 @@
 </p:notes>
 </file>
 
-<file path=ppt/notesSlides/notesSlide6.xml><?xml version="1.0" encoding="utf-8"?>
+<file path=ppt/notesSlides/notesSlide7.xml><?xml version="1.0" encoding="utf-8"?>
 <p:notes xmlns:a="http://schemas.openxmlformats.org/drawingml/2006/main" xmlns:r="http://schemas.openxmlformats.org/officeDocument/2006/relationships" xmlns:p="http://schemas.openxmlformats.org/presentationml/2006/main">
   <p:cSld>
     <p:spTree>
@@ -6246,7 +6638,7 @@
 </p:notes>
 </file>
 
-<file path=ppt/notesSlides/notesSlide7.xml><?xml version="1.0" encoding="utf-8"?>
+<file path=ppt/notesSlides/notesSlide8.xml><?xml version="1.0" encoding="utf-8"?>
 <p:notes xmlns:a="http://schemas.openxmlformats.org/drawingml/2006/main" xmlns:r="http://schemas.openxmlformats.org/officeDocument/2006/relationships" xmlns:p="http://schemas.openxmlformats.org/presentationml/2006/main">
   <p:cSld>
     <p:spTree>
@@ -6390,7 +6782,7 @@
 </p:notes>
 </file>
 
-<file path=ppt/notesSlides/notesSlide8.xml><?xml version="1.0" encoding="utf-8"?>
+<file path=ppt/notesSlides/notesSlide9.xml><?xml version="1.0" encoding="utf-8"?>
 <p:notes xmlns:a="http://schemas.openxmlformats.org/drawingml/2006/main" xmlns:r="http://schemas.openxmlformats.org/officeDocument/2006/relationships" xmlns:p="http://schemas.openxmlformats.org/presentationml/2006/main">
   <p:cSld>
     <p:spTree>
@@ -6493,143 +6885,6 @@
     <p:extLst>
       <p:ext uri="{BB962C8B-B14F-4D97-AF65-F5344CB8AC3E}">
         <p14:creationId xmlns:p14="http://schemas.microsoft.com/office/powerpoint/2010/main" val="2138455280"/>
-      </p:ext>
-    </p:extLst>
-  </p:cSld>
-  <p:clrMapOvr>
-    <a:masterClrMapping/>
-  </p:clrMapOvr>
-</p:notes>
-</file>
-
-<file path=ppt/notesSlides/notesSlide9.xml><?xml version="1.0" encoding="utf-8"?>
-<p:notes xmlns:a="http://schemas.openxmlformats.org/drawingml/2006/main" xmlns:r="http://schemas.openxmlformats.org/officeDocument/2006/relationships" xmlns:p="http://schemas.openxmlformats.org/presentationml/2006/main">
-  <p:cSld>
-    <p:spTree>
-      <p:nvGrpSpPr>
-        <p:cNvPr id="1" name="">
-          <a:extLst>
-            <a:ext uri="{FF2B5EF4-FFF2-40B4-BE49-F238E27FC236}">
-              <a16:creationId xmlns:a16="http://schemas.microsoft.com/office/drawing/2014/main" id="{A1ED1150-353F-E84F-4F8F-3107302DAFB8}"/>
-            </a:ext>
-          </a:extLst>
-        </p:cNvPr>
-        <p:cNvGrpSpPr/>
-        <p:nvPr/>
-      </p:nvGrpSpPr>
-      <p:grpSpPr>
-        <a:xfrm>
-          <a:off x="0" y="0"/>
-          <a:ext cx="0" cy="0"/>
-          <a:chOff x="0" y="0"/>
-          <a:chExt cx="0" cy="0"/>
-        </a:xfrm>
-      </p:grpSpPr>
-      <p:sp>
-        <p:nvSpPr>
-          <p:cNvPr id="2" name="Slide Image Placeholder 1">
-            <a:extLst>
-              <a:ext uri="{FF2B5EF4-FFF2-40B4-BE49-F238E27FC236}">
-                <a16:creationId xmlns:a16="http://schemas.microsoft.com/office/drawing/2014/main" id="{0EB06648-0916-1DC2-E2BD-13E557C63F9B}"/>
-              </a:ext>
-            </a:extLst>
-          </p:cNvPr>
-          <p:cNvSpPr>
-            <a:spLocks noGrp="1" noRot="1" noChangeAspect="1"/>
-          </p:cNvSpPr>
-          <p:nvPr>
-            <p:ph type="sldImg"/>
-          </p:nvPr>
-        </p:nvSpPr>
-        <p:spPr/>
-      </p:sp>
-      <p:sp>
-        <p:nvSpPr>
-          <p:cNvPr id="3" name="Notes Placeholder 2">
-            <a:extLst>
-              <a:ext uri="{FF2B5EF4-FFF2-40B4-BE49-F238E27FC236}">
-                <a16:creationId xmlns:a16="http://schemas.microsoft.com/office/drawing/2014/main" id="{18377747-FD29-CA1F-FCE6-C94C9B285131}"/>
-              </a:ext>
-            </a:extLst>
-          </p:cNvPr>
-          <p:cNvSpPr>
-            <a:spLocks noGrp="1"/>
-          </p:cNvSpPr>
-          <p:nvPr>
-            <p:ph type="body" idx="1"/>
-          </p:nvPr>
-        </p:nvSpPr>
-        <p:spPr/>
-        <p:txBody>
-          <a:bodyPr/>
-          <a:lstStyle/>
-          <a:p>
-            <a:r>
-              <a:rPr lang="ru-RU" dirty="0"/>
-              <a:t>Затем аналогичным образом происходит возврат в </a:t>
-            </a:r>
-            <a:r>
-              <a:rPr lang="ru-RU" dirty="0" err="1"/>
-              <a:t>main</a:t>
-            </a:r>
-            <a:r>
-              <a:rPr lang="ru-RU" dirty="0"/>
-              <a:t>.</a:t>
-            </a:r>
-          </a:p>
-          <a:p>
-            <a:r>
-              <a:rPr lang="ru-RU" dirty="0"/>
-              <a:t>Обратите внимание, что память под кадры стека не очищается явно. После удаления кадра его содержимое может оставаться в памяти и рассматривается как неиспользуемые данные, которые могут быть перезаписаны при последующих вызовах функций.</a:t>
-            </a:r>
-          </a:p>
-          <a:p>
-            <a:endParaRPr lang="ru-RU" dirty="0"/>
-          </a:p>
-          <a:p>
-            <a:r>
-              <a:rPr lang="ru-RU" dirty="0"/>
-              <a:t>Таким образом, стек отражает не только структуру вызовов, но и текущее состояние выполнения программы.</a:t>
-            </a:r>
-          </a:p>
-          <a:p>
-            <a:endParaRPr lang="en-US" dirty="0"/>
-          </a:p>
-        </p:txBody>
-      </p:sp>
-      <p:sp>
-        <p:nvSpPr>
-          <p:cNvPr id="4" name="Slide Number Placeholder 3">
-            <a:extLst>
-              <a:ext uri="{FF2B5EF4-FFF2-40B4-BE49-F238E27FC236}">
-                <a16:creationId xmlns:a16="http://schemas.microsoft.com/office/drawing/2014/main" id="{C81F0EF6-64B7-2B8F-B086-D999C739D2ED}"/>
-              </a:ext>
-            </a:extLst>
-          </p:cNvPr>
-          <p:cNvSpPr>
-            <a:spLocks noGrp="1"/>
-          </p:cNvSpPr>
-          <p:nvPr>
-            <p:ph type="sldNum" sz="quarter" idx="5"/>
-          </p:nvPr>
-        </p:nvSpPr>
-        <p:spPr/>
-        <p:txBody>
-          <a:bodyPr/>
-          <a:lstStyle/>
-          <a:p>
-            <a:fld id="{87259E61-CD8F-4EDB-89B2-A2524EC5B40A}" type="slidenum">
-              <a:rPr lang="en-US" smtClean="0"/>
-              <a:t>10</a:t>
-            </a:fld>
-            <a:endParaRPr lang="en-US"/>
-          </a:p>
-        </p:txBody>
-      </p:sp>
-    </p:spTree>
-    <p:extLst>
-      <p:ext uri="{BB962C8B-B14F-4D97-AF65-F5344CB8AC3E}">
-        <p14:creationId xmlns:p14="http://schemas.microsoft.com/office/powerpoint/2010/main" val="4091617741"/>
       </p:ext>
     </p:extLst>
   </p:cSld>
@@ -6786,7 +7041,7 @@
           <a:p>
             <a:fld id="{9C2EB594-0548-4CA8-B9FA-0C1389152C06}" type="datetimeFigureOut">
               <a:rPr lang="en-US" smtClean="0"/>
-              <a:t>4/11/2026</a:t>
+              <a:t>7/1/2026</a:t>
             </a:fld>
             <a:endParaRPr lang="en-US"/>
           </a:p>
@@ -6984,7 +7239,7 @@
           <a:p>
             <a:fld id="{9C2EB594-0548-4CA8-B9FA-0C1389152C06}" type="datetimeFigureOut">
               <a:rPr lang="en-US" smtClean="0"/>
-              <a:t>4/11/2026</a:t>
+              <a:t>7/1/2026</a:t>
             </a:fld>
             <a:endParaRPr lang="en-US"/>
           </a:p>
@@ -7192,7 +7447,7 @@
           <a:p>
             <a:fld id="{9C2EB594-0548-4CA8-B9FA-0C1389152C06}" type="datetimeFigureOut">
               <a:rPr lang="en-US" smtClean="0"/>
-              <a:t>4/11/2026</a:t>
+              <a:t>7/1/2026</a:t>
             </a:fld>
             <a:endParaRPr lang="en-US"/>
           </a:p>
@@ -7390,7 +7645,7 @@
           <a:p>
             <a:fld id="{9C2EB594-0548-4CA8-B9FA-0C1389152C06}" type="datetimeFigureOut">
               <a:rPr lang="en-US" smtClean="0"/>
-              <a:t>4/11/2026</a:t>
+              <a:t>7/1/2026</a:t>
             </a:fld>
             <a:endParaRPr lang="en-US"/>
           </a:p>
@@ -7665,7 +7920,7 @@
           <a:p>
             <a:fld id="{9C2EB594-0548-4CA8-B9FA-0C1389152C06}" type="datetimeFigureOut">
               <a:rPr lang="en-US" smtClean="0"/>
-              <a:t>4/11/2026</a:t>
+              <a:t>7/1/2026</a:t>
             </a:fld>
             <a:endParaRPr lang="en-US"/>
           </a:p>
@@ -7930,7 +8185,7 @@
           <a:p>
             <a:fld id="{9C2EB594-0548-4CA8-B9FA-0C1389152C06}" type="datetimeFigureOut">
               <a:rPr lang="en-US" smtClean="0"/>
-              <a:t>4/11/2026</a:t>
+              <a:t>7/1/2026</a:t>
             </a:fld>
             <a:endParaRPr lang="en-US"/>
           </a:p>
@@ -8342,7 +8597,7 @@
           <a:p>
             <a:fld id="{9C2EB594-0548-4CA8-B9FA-0C1389152C06}" type="datetimeFigureOut">
               <a:rPr lang="en-US" smtClean="0"/>
-              <a:t>4/11/2026</a:t>
+              <a:t>7/1/2026</a:t>
             </a:fld>
             <a:endParaRPr lang="en-US"/>
           </a:p>
@@ -8483,7 +8738,7 @@
           <a:p>
             <a:fld id="{9C2EB594-0548-4CA8-B9FA-0C1389152C06}" type="datetimeFigureOut">
               <a:rPr lang="en-US" smtClean="0"/>
-              <a:t>4/11/2026</a:t>
+              <a:t>7/1/2026</a:t>
             </a:fld>
             <a:endParaRPr lang="en-US"/>
           </a:p>
@@ -8596,7 +8851,7 @@
           <a:p>
             <a:fld id="{9C2EB594-0548-4CA8-B9FA-0C1389152C06}" type="datetimeFigureOut">
               <a:rPr lang="en-US" smtClean="0"/>
-              <a:t>4/11/2026</a:t>
+              <a:t>7/1/2026</a:t>
             </a:fld>
             <a:endParaRPr lang="en-US"/>
           </a:p>
@@ -8907,7 +9162,7 @@
           <a:p>
             <a:fld id="{9C2EB594-0548-4CA8-B9FA-0C1389152C06}" type="datetimeFigureOut">
               <a:rPr lang="en-US" smtClean="0"/>
-              <a:t>4/11/2026</a:t>
+              <a:t>7/1/2026</a:t>
             </a:fld>
             <a:endParaRPr lang="en-US"/>
           </a:p>
@@ -9195,7 +9450,7 @@
           <a:p>
             <a:fld id="{9C2EB594-0548-4CA8-B9FA-0C1389152C06}" type="datetimeFigureOut">
               <a:rPr lang="en-US" smtClean="0"/>
-              <a:t>4/11/2026</a:t>
+              <a:t>7/1/2026</a:t>
             </a:fld>
             <a:endParaRPr lang="en-US"/>
           </a:p>
@@ -9436,7 +9691,7 @@
           <a:p>
             <a:fld id="{9C2EB594-0548-4CA8-B9FA-0C1389152C06}" type="datetimeFigureOut">
               <a:rPr lang="en-US" smtClean="0"/>
-              <a:t>4/11/2026</a:t>
+              <a:t>7/1/2026</a:t>
             </a:fld>
             <a:endParaRPr lang="en-US"/>
           </a:p>
@@ -9887,43 +10142,6 @@
           </a:p>
         </p:txBody>
       </p:sp>
-      <p:pic>
-        <p:nvPicPr>
-          <p:cNvPr id="5" name="Picture 4">
-            <a:extLst>
-              <a:ext uri="{FF2B5EF4-FFF2-40B4-BE49-F238E27FC236}">
-                <a16:creationId xmlns:a16="http://schemas.microsoft.com/office/drawing/2014/main" id="{DFE19945-0179-1564-0FDA-AF812469AADA}"/>
-              </a:ext>
-            </a:extLst>
-          </p:cNvPr>
-          <p:cNvPicPr>
-            <a:picLocks noChangeAspect="1"/>
-          </p:cNvPicPr>
-          <p:nvPr/>
-        </p:nvPicPr>
-        <p:blipFill>
-          <a:blip r:embed="rId2">
-            <a:extLst>
-              <a:ext uri="{28A0092B-C50C-407E-A947-70E740481C1C}">
-                <a14:useLocalDpi xmlns:a14="http://schemas.microsoft.com/office/drawing/2010/main" val="0"/>
-              </a:ext>
-            </a:extLst>
-          </a:blip>
-          <a:srcRect b="16413"/>
-          <a:stretch>
-            <a:fillRect/>
-          </a:stretch>
-        </p:blipFill>
-        <p:spPr>
-          <a:xfrm>
-            <a:off x="0" y="0"/>
-            <a:ext cx="12306994" cy="6858000"/>
-          </a:xfrm>
-          <a:prstGeom prst="rect">
-            <a:avLst/>
-          </a:prstGeom>
-        </p:spPr>
-      </p:pic>
     </p:spTree>
     <p:extLst>
       <p:ext uri="{BB962C8B-B14F-4D97-AF65-F5344CB8AC3E}">
@@ -13317,8 +13535,8 @@
         </p:nvSpPr>
         <p:spPr>
           <a:xfrm>
-            <a:off x="4838701" y="1690688"/>
-            <a:ext cx="7353300" cy="4524315"/>
+            <a:off x="4697260" y="1690688"/>
+            <a:ext cx="7494741" cy="4524315"/>
           </a:xfrm>
           <a:prstGeom prst="rect">
             <a:avLst/>
@@ -13653,6 +13871,97 @@
                 <a:latin typeface="Consolas" panose="020B0609020204030204" pitchFamily="49" charset="0"/>
               </a:rPr>
               <a:t>eax</a:t>
+            </a:r>
+            <a:r>
+              <a:rPr lang="ru-RU" sz="1600" b="0" dirty="0">
+                <a:solidFill>
+                  <a:srgbClr val="4864AA"/>
+                </a:solidFill>
+                <a:effectLst/>
+                <a:latin typeface="Consolas" panose="020B0609020204030204" pitchFamily="49" charset="0"/>
+              </a:rPr>
+              <a:t> </a:t>
+            </a:r>
+            <a:r>
+              <a:rPr lang="en-US" sz="1600" dirty="0">
+                <a:solidFill>
+                  <a:srgbClr val="00B050"/>
+                </a:solidFill>
+                <a:latin typeface="Consolas" panose="020B0609020204030204" pitchFamily="49" charset="0"/>
+              </a:rPr>
+              <a:t>//</a:t>
+            </a:r>
+            <a:r>
+              <a:rPr lang="ru-RU" sz="1600" dirty="0">
+                <a:solidFill>
+                  <a:srgbClr val="00B050"/>
+                </a:solidFill>
+                <a:latin typeface="Consolas" panose="020B0609020204030204" pitchFamily="49" charset="0"/>
+              </a:rPr>
+              <a:t> </a:t>
+            </a:r>
+            <a:r>
+              <a:rPr lang="en-US" sz="1600" dirty="0">
+                <a:solidFill>
+                  <a:srgbClr val="00B050"/>
+                </a:solidFill>
+                <a:latin typeface="Consolas" panose="020B0609020204030204" pitchFamily="49" charset="0"/>
+              </a:rPr>
+              <a:t>#</a:t>
+            </a:r>
+            <a:r>
+              <a:rPr lang="ru-RU" sz="1600" dirty="0">
+                <a:solidFill>
+                  <a:srgbClr val="00B050"/>
+                </a:solidFill>
+                <a:latin typeface="Consolas" panose="020B0609020204030204" pitchFamily="49" charset="0"/>
+              </a:rPr>
+              <a:t> </a:t>
+            </a:r>
+            <a:r>
+              <a:rPr lang="en-US" sz="1600" dirty="0">
+                <a:solidFill>
+                  <a:srgbClr val="00B050"/>
+                </a:solidFill>
+                <a:latin typeface="Consolas" panose="020B0609020204030204" pitchFamily="49" charset="0"/>
+              </a:rPr>
+              <a:t>of </a:t>
+            </a:r>
+            <a:r>
+              <a:rPr lang="en-US" sz="1600" dirty="0" err="1">
+                <a:solidFill>
+                  <a:srgbClr val="00B050"/>
+                </a:solidFill>
+                <a:latin typeface="Consolas" panose="020B0609020204030204" pitchFamily="49" charset="0"/>
+              </a:rPr>
+              <a:t>printf</a:t>
+            </a:r>
+            <a:r>
+              <a:rPr lang="en-US" sz="1600" dirty="0">
+                <a:solidFill>
+                  <a:srgbClr val="00B050"/>
+                </a:solidFill>
+                <a:latin typeface="Consolas" panose="020B0609020204030204" pitchFamily="49" charset="0"/>
+              </a:rPr>
+              <a:t> </a:t>
+            </a:r>
+            <a:r>
+              <a:rPr lang="en-US" sz="1600" dirty="0" err="1">
+                <a:solidFill>
+                  <a:srgbClr val="00B050"/>
+                </a:solidFill>
+                <a:latin typeface="Consolas" panose="020B0609020204030204" pitchFamily="49" charset="0"/>
+              </a:rPr>
+              <a:t>args</a:t>
+            </a:r>
+            <a:r>
+              <a:rPr lang="en-US" sz="1600" dirty="0">
+                <a:solidFill>
+                  <a:srgbClr val="00B050"/>
+                </a:solidFill>
+                <a:latin typeface="Consolas" panose="020B0609020204030204" pitchFamily="49" charset="0"/>
+              </a:rPr>
+              <a:t> in SSE registers (0)</a:t>
             </a:r>
             <a:endParaRPr lang="en-US" sz="1600" b="0" dirty="0">
               <a:solidFill>
@@ -15434,8 +15743,8 @@
         </p:nvSpPr>
         <p:spPr>
           <a:xfrm>
-            <a:off x="4838701" y="1996801"/>
-            <a:ext cx="673099" cy="340519"/>
+            <a:off x="4697260" y="1953938"/>
+            <a:ext cx="673099" cy="306467"/>
           </a:xfrm>
           <a:prstGeom prst="roundRect">
             <a:avLst/>
@@ -15462,7 +15771,7 @@
           <a:lstStyle/>
           <a:p>
             <a:r>
-              <a:rPr lang="en-US" sz="1400" dirty="0"/>
+              <a:rPr lang="en-US" sz="1200" dirty="0"/>
               <a:t>RDI:</a:t>
             </a:r>
           </a:p>
@@ -47147,15 +47456,15 @@
         </p:spPr>
         <p:style>
           <a:lnRef idx="2">
-            <a:schemeClr val="accent4">
+            <a:schemeClr val="accent6">
               <a:shade val="15000"/>
             </a:schemeClr>
           </a:lnRef>
           <a:fillRef idx="1">
-            <a:schemeClr val="accent4"/>
+            <a:schemeClr val="accent6"/>
           </a:fillRef>
           <a:effectRef idx="0">
-            <a:schemeClr val="accent4"/>
+            <a:schemeClr val="accent6"/>
           </a:effectRef>
           <a:fontRef idx="minor">
             <a:schemeClr val="lt1"/>
@@ -47311,7 +47620,7 @@
           <a:p>
             <a:r>
               <a:rPr lang="ru-RU" dirty="0"/>
-              <a:t>Динамически-выделенные объекты</a:t>
+              <a:t>Динамически выделенные объекты</a:t>
             </a:r>
             <a:endParaRPr lang="en-US" dirty="0"/>
           </a:p>
@@ -47347,11 +47656,7 @@
           <a:p>
             <a:r>
               <a:rPr lang="ru-RU" dirty="0"/>
-              <a:t>Локальные переменные и адреса </a:t>
-            </a:r>
-            <a:r>
-              <a:rPr lang="ru-RU" dirty="0" err="1"/>
-              <a:t>возвраат</a:t>
+              <a:t>Локальные переменные и адреса возврата</a:t>
             </a:r>
             <a:endParaRPr lang="en-US" dirty="0"/>
           </a:p>
